--- a/Kashmir_Transit_Diagrammatic_Pitch.pptx
+++ b/Kashmir_Transit_Diagrammatic_Pitch.pptx
@@ -18,6 +18,7 @@
     <p:sldId id="266" r:id="rId17"/>
     <p:sldId id="267" r:id="rId18"/>
     <p:sldId id="268" r:id="rId19"/>
+    <p:sldId id="269" r:id="rId20"/>
   </p:sldIdLst>
   <p:sldSz cx="12191695" cy="6858000" type="screen4x3"/>
   <p:notesSz cx="6858000" cy="9144000"/>
@@ -7559,6 +7560,121 @@
             <a:avLst/>
           </a:prstGeom>
           <a:solidFill>
+            <a:srgbClr val="00695C"/>
+          </a:solidFill>
+          <a:ln>
+            <a:noFill/>
+          </a:ln>
+        </p:spPr>
+        <p:style>
+          <a:lnRef idx="1">
+            <a:schemeClr val="accent1"/>
+          </a:lnRef>
+          <a:fillRef idx="3">
+            <a:schemeClr val="accent1"/>
+          </a:fillRef>
+          <a:effectRef idx="2">
+            <a:schemeClr val="accent1"/>
+          </a:effectRef>
+          <a:fontRef idx="minor">
+            <a:schemeClr val="lt1"/>
+          </a:fontRef>
+        </p:style>
+        <p:txBody>
+          <a:bodyPr rtlCol="0" anchor="ctr"/>
+          <a:lstStyle/>
+          <a:p>
+            <a:pPr algn="ctr"/>
+          </a:p>
+        </p:txBody>
+      </p:sp>
+      <p:sp>
+        <p:nvSpPr>
+          <p:cNvPr id="3" name="TextBox 2"/>
+          <p:cNvSpPr txBox="1"/>
+          <p:nvPr/>
+        </p:nvSpPr>
+        <p:spPr>
+          <a:xfrm>
+            <a:off x="457200" y="320040"/>
+            <a:ext cx="11247120" cy="640080"/>
+          </a:xfrm>
+          <a:prstGeom prst="rect">
+            <a:avLst/>
+          </a:prstGeom>
+          <a:noFill/>
+        </p:spPr>
+        <p:txBody>
+          <a:bodyPr wrap="square" lIns="45720" rIns="45720" tIns="18288" bIns="18288" anchor="t">
+            <a:spAutoFit/>
+          </a:bodyPr>
+          <a:lstStyle/>
+          <a:p>
+            <a:pPr algn="l"/>
+            <a:r>
+              <a:rPr sz="2800" b="1" i="0">
+                <a:solidFill>
+                  <a:srgbClr val="00695C"/>
+                </a:solidFill>
+                <a:latin typeface="Calibri"/>
+              </a:rPr>
+              <a:t>Data we'd need from your office to sharpen v3.4</a:t>
+            </a:r>
+          </a:p>
+        </p:txBody>
+      </p:sp>
+      <p:sp>
+        <p:nvSpPr>
+          <p:cNvPr id="4" name="TextBox 3"/>
+          <p:cNvSpPr txBox="1"/>
+          <p:nvPr/>
+        </p:nvSpPr>
+        <p:spPr>
+          <a:xfrm>
+            <a:off x="457200" y="914400"/>
+            <a:ext cx="11247120" cy="365760"/>
+          </a:xfrm>
+          <a:prstGeom prst="rect">
+            <a:avLst/>
+          </a:prstGeom>
+          <a:noFill/>
+        </p:spPr>
+        <p:txBody>
+          <a:bodyPr wrap="square" lIns="45720" rIns="45720" tIns="18288" bIns="18288" anchor="t">
+            <a:spAutoFit/>
+          </a:bodyPr>
+          <a:lstStyle/>
+          <a:p>
+            <a:pPr algn="l"/>
+            <a:r>
+              <a:rPr sz="1400" b="0" i="1">
+                <a:solidFill>
+                  <a:srgbClr val="757575"/>
+                </a:solidFill>
+                <a:latin typeface="Segoe UI"/>
+              </a:rPr>
+              <a:t>Phase-2 features above are limited by data, not by maths. Here is the concrete ask.</a:t>
+            </a:r>
+          </a:p>
+        </p:txBody>
+      </p:sp>
+      <p:sp>
+        <p:nvSpPr>
+          <p:cNvPr id="5" name="Rounded Rectangle 4"/>
+          <p:cNvSpPr/>
+          <p:nvPr/>
+        </p:nvSpPr>
+        <p:spPr>
+          <a:xfrm>
+            <a:off x="411480" y="1417320"/>
+            <a:ext cx="11475720" cy="292608"/>
+          </a:xfrm>
+          <a:prstGeom prst="roundRect">
+            <a:avLst>
+              <a:gd name="adj" fmla="val 12000"/>
+            </a:avLst>
+          </a:prstGeom>
+          <a:solidFill>
             <a:srgbClr val="1A237E"/>
           </a:solidFill>
           <a:ln>
@@ -7589,14 +7705,14 @@
       </p:sp>
       <p:sp>
         <p:nvSpPr>
-          <p:cNvPr id="3" name="TextBox 2"/>
-          <p:cNvSpPr txBox="1"/>
-          <p:nvPr/>
-        </p:nvSpPr>
-        <p:spPr>
-          <a:xfrm>
-            <a:off x="457200" y="320040"/>
-            <a:ext cx="11247120" cy="640080"/>
+          <p:cNvPr id="6" name="TextBox 5"/>
+          <p:cNvSpPr txBox="1"/>
+          <p:nvPr/>
+        </p:nvSpPr>
+        <p:spPr>
+          <a:xfrm>
+            <a:off x="502920" y="1453896"/>
+            <a:ext cx="777240" cy="237744"/>
           </a:xfrm>
           <a:prstGeom prst="rect">
             <a:avLst/>
@@ -7611,40 +7727,141 @@
           <a:p>
             <a:pPr algn="l"/>
             <a:r>
-              <a:rPr sz="2800" b="1" i="0">
-                <a:solidFill>
-                  <a:srgbClr val="1A237E"/>
-                </a:solidFill>
-                <a:latin typeface="Calibri"/>
-              </a:rPr>
-              <a:t>What this output is — and what it is not</a:t>
-            </a:r>
-          </a:p>
-        </p:txBody>
-      </p:sp>
-      <p:sp>
-        <p:nvSpPr>
-          <p:cNvPr id="4" name="Rounded Rectangle 3"/>
+              <a:rPr sz="1000" b="1" i="0">
+                <a:solidFill>
+                  <a:srgbClr val="FFFFFF"/>
+                </a:solidFill>
+                <a:latin typeface="Segoe UI"/>
+              </a:rPr>
+              <a:t>Priority</a:t>
+            </a:r>
+          </a:p>
+        </p:txBody>
+      </p:sp>
+      <p:sp>
+        <p:nvSpPr>
+          <p:cNvPr id="7" name="TextBox 6"/>
+          <p:cNvSpPr txBox="1"/>
+          <p:nvPr/>
+        </p:nvSpPr>
+        <p:spPr>
+          <a:xfrm>
+            <a:off x="1417320" y="1453896"/>
+            <a:ext cx="3794760" cy="237744"/>
+          </a:xfrm>
+          <a:prstGeom prst="rect">
+            <a:avLst/>
+          </a:prstGeom>
+          <a:noFill/>
+        </p:spPr>
+        <p:txBody>
+          <a:bodyPr wrap="square" lIns="45720" rIns="45720" tIns="18288" bIns="18288" anchor="t">
+            <a:spAutoFit/>
+          </a:bodyPr>
+          <a:lstStyle/>
+          <a:p>
+            <a:pPr algn="l"/>
+            <a:r>
+              <a:rPr sz="1000" b="1" i="0">
+                <a:solidFill>
+                  <a:srgbClr val="FFFFFF"/>
+                </a:solidFill>
+                <a:latin typeface="Segoe UI"/>
+              </a:rPr>
+              <a:t>Dataset</a:t>
+            </a:r>
+          </a:p>
+        </p:txBody>
+      </p:sp>
+      <p:sp>
+        <p:nvSpPr>
+          <p:cNvPr id="8" name="TextBox 7"/>
+          <p:cNvSpPr txBox="1"/>
+          <p:nvPr/>
+        </p:nvSpPr>
+        <p:spPr>
+          <a:xfrm>
+            <a:off x="5349240" y="1453896"/>
+            <a:ext cx="2834640" cy="237744"/>
+          </a:xfrm>
+          <a:prstGeom prst="rect">
+            <a:avLst/>
+          </a:prstGeom>
+          <a:noFill/>
+        </p:spPr>
+        <p:txBody>
+          <a:bodyPr wrap="square" lIns="45720" rIns="45720" tIns="18288" bIns="18288" anchor="t">
+            <a:spAutoFit/>
+          </a:bodyPr>
+          <a:lstStyle/>
+          <a:p>
+            <a:pPr algn="l"/>
+            <a:r>
+              <a:rPr sz="1000" b="1" i="0">
+                <a:solidFill>
+                  <a:srgbClr val="FFFFFF"/>
+                </a:solidFill>
+                <a:latin typeface="Segoe UI"/>
+              </a:rPr>
+              <a:t>Custodian</a:t>
+            </a:r>
+          </a:p>
+        </p:txBody>
+      </p:sp>
+      <p:sp>
+        <p:nvSpPr>
+          <p:cNvPr id="9" name="TextBox 8"/>
+          <p:cNvSpPr txBox="1"/>
+          <p:nvPr/>
+        </p:nvSpPr>
+        <p:spPr>
+          <a:xfrm>
+            <a:off x="8321040" y="1453896"/>
+            <a:ext cx="3520440" cy="237744"/>
+          </a:xfrm>
+          <a:prstGeom prst="rect">
+            <a:avLst/>
+          </a:prstGeom>
+          <a:noFill/>
+        </p:spPr>
+        <p:txBody>
+          <a:bodyPr wrap="square" lIns="45720" rIns="45720" tIns="18288" bIns="18288" anchor="t">
+            <a:spAutoFit/>
+          </a:bodyPr>
+          <a:lstStyle/>
+          <a:p>
+            <a:pPr algn="l"/>
+            <a:r>
+              <a:rPr sz="1000" b="1" i="0">
+                <a:solidFill>
+                  <a:srgbClr val="FFFFFF"/>
+                </a:solidFill>
+                <a:latin typeface="Segoe UI"/>
+              </a:rPr>
+              <a:t>Why it matters</a:t>
+            </a:r>
+          </a:p>
+        </p:txBody>
+      </p:sp>
+      <p:sp>
+        <p:nvSpPr>
+          <p:cNvPr id="10" name="Rectangle 9"/>
           <p:cNvSpPr/>
           <p:nvPr/>
         </p:nvSpPr>
         <p:spPr>
           <a:xfrm>
-            <a:off x="548640" y="1691640"/>
-            <a:ext cx="5577840" cy="4572000"/>
-          </a:xfrm>
-          <a:prstGeom prst="roundRect">
-            <a:avLst>
-              <a:gd name="adj" fmla="val 12000"/>
-            </a:avLst>
+            <a:off x="411480" y="1737360"/>
+            <a:ext cx="11475720" cy="438912"/>
+          </a:xfrm>
+          <a:prstGeom prst="rect">
+            <a:avLst/>
           </a:prstGeom>
           <a:solidFill>
-            <a:srgbClr val="E8F5E9"/>
+            <a:srgbClr val="F5F5F5"/>
           </a:solidFill>
-          <a:ln w="9525">
-            <a:solidFill>
-              <a:srgbClr val="2E7D32"/>
-            </a:solidFill>
+          <a:ln>
+            <a:noFill/>
           </a:ln>
         </p:spPr>
         <p:style>
@@ -7671,706 +7888,14 @@
       </p:sp>
       <p:sp>
         <p:nvSpPr>
-          <p:cNvPr id="5" name="Rounded Rectangle 4"/>
+          <p:cNvPr id="11" name="Rounded Rectangle 10"/>
           <p:cNvSpPr/>
           <p:nvPr/>
         </p:nvSpPr>
         <p:spPr>
           <a:xfrm>
-            <a:off x="548640" y="1691640"/>
-            <a:ext cx="5577840" cy="548640"/>
-          </a:xfrm>
-          <a:prstGeom prst="roundRect">
-            <a:avLst>
-              <a:gd name="adj" fmla="val 12000"/>
-            </a:avLst>
-          </a:prstGeom>
-          <a:solidFill>
-            <a:srgbClr val="2E7D32"/>
-          </a:solidFill>
-          <a:ln>
-            <a:noFill/>
-          </a:ln>
-        </p:spPr>
-        <p:style>
-          <a:lnRef idx="1">
-            <a:schemeClr val="accent1"/>
-          </a:lnRef>
-          <a:fillRef idx="3">
-            <a:schemeClr val="accent1"/>
-          </a:fillRef>
-          <a:effectRef idx="2">
-            <a:schemeClr val="accent1"/>
-          </a:effectRef>
-          <a:fontRef idx="minor">
-            <a:schemeClr val="lt1"/>
-          </a:fontRef>
-        </p:style>
-        <p:txBody>
-          <a:bodyPr rtlCol="0" anchor="ctr"/>
-          <a:lstStyle/>
-          <a:p>
-            <a:pPr algn="ctr"/>
-          </a:p>
-        </p:txBody>
-      </p:sp>
-      <p:sp>
-        <p:nvSpPr>
-          <p:cNvPr id="6" name="TextBox 5"/>
-          <p:cNvSpPr txBox="1"/>
-          <p:nvPr/>
-        </p:nvSpPr>
-        <p:spPr>
-          <a:xfrm>
-            <a:off x="548640" y="1691640"/>
-            <a:ext cx="5577840" cy="548640"/>
-          </a:xfrm>
-          <a:prstGeom prst="rect">
-            <a:avLst/>
-          </a:prstGeom>
-          <a:noFill/>
-        </p:spPr>
-        <p:txBody>
-          <a:bodyPr wrap="square" lIns="45720" rIns="45720" tIns="18288" bIns="18288" anchor="ctr">
-            <a:spAutoFit/>
-          </a:bodyPr>
-          <a:lstStyle/>
-          <a:p>
-            <a:pPr algn="ctr"/>
-            <a:r>
-              <a:rPr sz="1600" b="1">
-                <a:solidFill>
-                  <a:srgbClr val="FFFFFF"/>
-                </a:solidFill>
-                <a:latin typeface="Segoe UI"/>
-              </a:rPr>
-              <a:t>WHAT IT IS</a:t>
-            </a:r>
-          </a:p>
-        </p:txBody>
-      </p:sp>
-      <p:sp>
-        <p:nvSpPr>
-          <p:cNvPr id="7" name="Oval 6"/>
-          <p:cNvSpPr/>
-          <p:nvPr/>
-        </p:nvSpPr>
-        <p:spPr>
-          <a:xfrm>
-            <a:off x="777240" y="2532888"/>
-            <a:ext cx="320040" cy="320040"/>
-          </a:xfrm>
-          <a:prstGeom prst="ellipse">
-            <a:avLst/>
-          </a:prstGeom>
-          <a:solidFill>
-            <a:srgbClr val="2E7D32"/>
-          </a:solidFill>
-          <a:ln>
-            <a:noFill/>
-          </a:ln>
-        </p:spPr>
-        <p:style>
-          <a:lnRef idx="1">
-            <a:schemeClr val="accent1"/>
-          </a:lnRef>
-          <a:fillRef idx="3">
-            <a:schemeClr val="accent1"/>
-          </a:fillRef>
-          <a:effectRef idx="2">
-            <a:schemeClr val="accent1"/>
-          </a:effectRef>
-          <a:fontRef idx="minor">
-            <a:schemeClr val="lt1"/>
-          </a:fontRef>
-        </p:style>
-        <p:txBody>
-          <a:bodyPr rtlCol="0" anchor="ctr"/>
-          <a:lstStyle/>
-          <a:p>
-            <a:pPr algn="ctr"/>
-          </a:p>
-        </p:txBody>
-      </p:sp>
-      <p:sp>
-        <p:nvSpPr>
-          <p:cNvPr id="8" name="TextBox 7"/>
-          <p:cNvSpPr txBox="1"/>
-          <p:nvPr/>
-        </p:nvSpPr>
-        <p:spPr>
-          <a:xfrm>
-            <a:off x="777240" y="2532888"/>
-            <a:ext cx="320040" cy="320040"/>
-          </a:xfrm>
-          <a:prstGeom prst="rect">
-            <a:avLst/>
-          </a:prstGeom>
-          <a:noFill/>
-        </p:spPr>
-        <p:txBody>
-          <a:bodyPr wrap="square" lIns="45720" rIns="45720" tIns="18288" bIns="18288" anchor="ctr">
-            <a:spAutoFit/>
-          </a:bodyPr>
-          <a:lstStyle/>
-          <a:p>
-            <a:pPr algn="ctr"/>
-            <a:r>
-              <a:rPr sz="1400" b="1">
-                <a:solidFill>
-                  <a:srgbClr val="FFFFFF"/>
-                </a:solidFill>
-                <a:latin typeface="Segoe UI"/>
-              </a:rPr>
-              <a:t>✓</a:t>
-            </a:r>
-          </a:p>
-        </p:txBody>
-      </p:sp>
-      <p:sp>
-        <p:nvSpPr>
-          <p:cNvPr id="9" name="TextBox 8"/>
-          <p:cNvSpPr txBox="1"/>
-          <p:nvPr/>
-        </p:nvSpPr>
-        <p:spPr>
-          <a:xfrm>
-            <a:off x="1234440" y="2468880"/>
-            <a:ext cx="4754880" cy="731520"/>
-          </a:xfrm>
-          <a:prstGeom prst="rect">
-            <a:avLst/>
-          </a:prstGeom>
-          <a:noFill/>
-        </p:spPr>
-        <p:txBody>
-          <a:bodyPr wrap="square" lIns="45720" rIns="45720" tIns="18288" bIns="18288" anchor="ctr">
-            <a:spAutoFit/>
-          </a:bodyPr>
-          <a:lstStyle/>
-          <a:p>
-            <a:pPr algn="l"/>
-            <a:r>
-              <a:rPr sz="1200" b="0" i="0">
-                <a:solidFill>
-                  <a:srgbClr val="212121"/>
-                </a:solidFill>
-                <a:latin typeface="Segoe UI"/>
-              </a:rPr>
-              <a:t>207 active routes classified with HP / MP / LP bands</a:t>
-            </a:r>
-          </a:p>
-        </p:txBody>
-      </p:sp>
-      <p:sp>
-        <p:nvSpPr>
-          <p:cNvPr id="10" name="Oval 9"/>
-          <p:cNvSpPr/>
-          <p:nvPr/>
-        </p:nvSpPr>
-        <p:spPr>
-          <a:xfrm>
-            <a:off x="777240" y="3310128"/>
-            <a:ext cx="320040" cy="320040"/>
-          </a:xfrm>
-          <a:prstGeom prst="ellipse">
-            <a:avLst/>
-          </a:prstGeom>
-          <a:solidFill>
-            <a:srgbClr val="2E7D32"/>
-          </a:solidFill>
-          <a:ln>
-            <a:noFill/>
-          </a:ln>
-        </p:spPr>
-        <p:style>
-          <a:lnRef idx="1">
-            <a:schemeClr val="accent1"/>
-          </a:lnRef>
-          <a:fillRef idx="3">
-            <a:schemeClr val="accent1"/>
-          </a:fillRef>
-          <a:effectRef idx="2">
-            <a:schemeClr val="accent1"/>
-          </a:effectRef>
-          <a:fontRef idx="minor">
-            <a:schemeClr val="lt1"/>
-          </a:fontRef>
-        </p:style>
-        <p:txBody>
-          <a:bodyPr rtlCol="0" anchor="ctr"/>
-          <a:lstStyle/>
-          <a:p>
-            <a:pPr algn="ctr"/>
-          </a:p>
-        </p:txBody>
-      </p:sp>
-      <p:sp>
-        <p:nvSpPr>
-          <p:cNvPr id="11" name="TextBox 10"/>
-          <p:cNvSpPr txBox="1"/>
-          <p:nvPr/>
-        </p:nvSpPr>
-        <p:spPr>
-          <a:xfrm>
-            <a:off x="777240" y="3310128"/>
-            <a:ext cx="320040" cy="320040"/>
-          </a:xfrm>
-          <a:prstGeom prst="rect">
-            <a:avLst/>
-          </a:prstGeom>
-          <a:noFill/>
-        </p:spPr>
-        <p:txBody>
-          <a:bodyPr wrap="square" lIns="45720" rIns="45720" tIns="18288" bIns="18288" anchor="ctr">
-            <a:spAutoFit/>
-          </a:bodyPr>
-          <a:lstStyle/>
-          <a:p>
-            <a:pPr algn="ctr"/>
-            <a:r>
-              <a:rPr sz="1400" b="1">
-                <a:solidFill>
-                  <a:srgbClr val="FFFFFF"/>
-                </a:solidFill>
-                <a:latin typeface="Segoe UI"/>
-              </a:rPr>
-              <a:t>✓</a:t>
-            </a:r>
-          </a:p>
-        </p:txBody>
-      </p:sp>
-      <p:sp>
-        <p:nvSpPr>
-          <p:cNvPr id="12" name="TextBox 11"/>
-          <p:cNvSpPr txBox="1"/>
-          <p:nvPr/>
-        </p:nvSpPr>
-        <p:spPr>
-          <a:xfrm>
-            <a:off x="1234440" y="3246120"/>
-            <a:ext cx="4754880" cy="731520"/>
-          </a:xfrm>
-          <a:prstGeom prst="rect">
-            <a:avLst/>
-          </a:prstGeom>
-          <a:noFill/>
-        </p:spPr>
-        <p:txBody>
-          <a:bodyPr wrap="square" lIns="45720" rIns="45720" tIns="18288" bIns="18288" anchor="ctr">
-            <a:spAutoFit/>
-          </a:bodyPr>
-          <a:lstStyle/>
-          <a:p>
-            <a:pPr algn="l"/>
-            <a:r>
-              <a:rPr sz="1200" b="0" i="0">
-                <a:solidFill>
-                  <a:srgbClr val="212121"/>
-                </a:solidFill>
-                <a:latin typeface="Segoe UI"/>
-              </a:rPr>
-              <a:t>Fleet sized for phase-1 conservative headways (15/20/35/60 min)</a:t>
-            </a:r>
-          </a:p>
-        </p:txBody>
-      </p:sp>
-      <p:sp>
-        <p:nvSpPr>
-          <p:cNvPr id="13" name="Oval 12"/>
-          <p:cNvSpPr/>
-          <p:nvPr/>
-        </p:nvSpPr>
-        <p:spPr>
-          <a:xfrm>
-            <a:off x="777240" y="4087368"/>
-            <a:ext cx="320040" cy="320040"/>
-          </a:xfrm>
-          <a:prstGeom prst="ellipse">
-            <a:avLst/>
-          </a:prstGeom>
-          <a:solidFill>
-            <a:srgbClr val="2E7D32"/>
-          </a:solidFill>
-          <a:ln>
-            <a:noFill/>
-          </a:ln>
-        </p:spPr>
-        <p:style>
-          <a:lnRef idx="1">
-            <a:schemeClr val="accent1"/>
-          </a:lnRef>
-          <a:fillRef idx="3">
-            <a:schemeClr val="accent1"/>
-          </a:fillRef>
-          <a:effectRef idx="2">
-            <a:schemeClr val="accent1"/>
-          </a:effectRef>
-          <a:fontRef idx="minor">
-            <a:schemeClr val="lt1"/>
-          </a:fontRef>
-        </p:style>
-        <p:txBody>
-          <a:bodyPr rtlCol="0" anchor="ctr"/>
-          <a:lstStyle/>
-          <a:p>
-            <a:pPr algn="ctr"/>
-          </a:p>
-        </p:txBody>
-      </p:sp>
-      <p:sp>
-        <p:nvSpPr>
-          <p:cNvPr id="14" name="TextBox 13"/>
-          <p:cNvSpPr txBox="1"/>
-          <p:nvPr/>
-        </p:nvSpPr>
-        <p:spPr>
-          <a:xfrm>
-            <a:off x="777240" y="4087368"/>
-            <a:ext cx="320040" cy="320040"/>
-          </a:xfrm>
-          <a:prstGeom prst="rect">
-            <a:avLst/>
-          </a:prstGeom>
-          <a:noFill/>
-        </p:spPr>
-        <p:txBody>
-          <a:bodyPr wrap="square" lIns="45720" rIns="45720" tIns="18288" bIns="18288" anchor="ctr">
-            <a:spAutoFit/>
-          </a:bodyPr>
-          <a:lstStyle/>
-          <a:p>
-            <a:pPr algn="ctr"/>
-            <a:r>
-              <a:rPr sz="1400" b="1">
-                <a:solidFill>
-                  <a:srgbClr val="FFFFFF"/>
-                </a:solidFill>
-                <a:latin typeface="Segoe UI"/>
-              </a:rPr>
-              <a:t>✓</a:t>
-            </a:r>
-          </a:p>
-        </p:txBody>
-      </p:sp>
-      <p:sp>
-        <p:nvSpPr>
-          <p:cNvPr id="15" name="TextBox 14"/>
-          <p:cNvSpPr txBox="1"/>
-          <p:nvPr/>
-        </p:nvSpPr>
-        <p:spPr>
-          <a:xfrm>
-            <a:off x="1234440" y="4023360"/>
-            <a:ext cx="4754880" cy="731520"/>
-          </a:xfrm>
-          <a:prstGeom prst="rect">
-            <a:avLst/>
-          </a:prstGeom>
-          <a:noFill/>
-        </p:spPr>
-        <p:txBody>
-          <a:bodyPr wrap="square" lIns="45720" rIns="45720" tIns="18288" bIns="18288" anchor="ctr">
-            <a:spAutoFit/>
-          </a:bodyPr>
-          <a:lstStyle/>
-          <a:p>
-            <a:pPr algn="l"/>
-            <a:r>
-              <a:rPr sz="1200" b="0" i="0">
-                <a:solidFill>
-                  <a:srgbClr val="212121"/>
-                </a:solidFill>
-                <a:latin typeface="Segoe UI"/>
-              </a:rPr>
-              <a:t>30 SSCL backbone routes calibrated against CHALO Apr 2026 data</a:t>
-            </a:r>
-          </a:p>
-        </p:txBody>
-      </p:sp>
-      <p:sp>
-        <p:nvSpPr>
-          <p:cNvPr id="16" name="Oval 15"/>
-          <p:cNvSpPr/>
-          <p:nvPr/>
-        </p:nvSpPr>
-        <p:spPr>
-          <a:xfrm>
-            <a:off x="777240" y="4864608"/>
-            <a:ext cx="320040" cy="320040"/>
-          </a:xfrm>
-          <a:prstGeom prst="ellipse">
-            <a:avLst/>
-          </a:prstGeom>
-          <a:solidFill>
-            <a:srgbClr val="2E7D32"/>
-          </a:solidFill>
-          <a:ln>
-            <a:noFill/>
-          </a:ln>
-        </p:spPr>
-        <p:style>
-          <a:lnRef idx="1">
-            <a:schemeClr val="accent1"/>
-          </a:lnRef>
-          <a:fillRef idx="3">
-            <a:schemeClr val="accent1"/>
-          </a:fillRef>
-          <a:effectRef idx="2">
-            <a:schemeClr val="accent1"/>
-          </a:effectRef>
-          <a:fontRef idx="minor">
-            <a:schemeClr val="lt1"/>
-          </a:fontRef>
-        </p:style>
-        <p:txBody>
-          <a:bodyPr rtlCol="0" anchor="ctr"/>
-          <a:lstStyle/>
-          <a:p>
-            <a:pPr algn="ctr"/>
-          </a:p>
-        </p:txBody>
-      </p:sp>
-      <p:sp>
-        <p:nvSpPr>
-          <p:cNvPr id="17" name="TextBox 16"/>
-          <p:cNvSpPr txBox="1"/>
-          <p:nvPr/>
-        </p:nvSpPr>
-        <p:spPr>
-          <a:xfrm>
-            <a:off x="777240" y="4864608"/>
-            <a:ext cx="320040" cy="320040"/>
-          </a:xfrm>
-          <a:prstGeom prst="rect">
-            <a:avLst/>
-          </a:prstGeom>
-          <a:noFill/>
-        </p:spPr>
-        <p:txBody>
-          <a:bodyPr wrap="square" lIns="45720" rIns="45720" tIns="18288" bIns="18288" anchor="ctr">
-            <a:spAutoFit/>
-          </a:bodyPr>
-          <a:lstStyle/>
-          <a:p>
-            <a:pPr algn="ctr"/>
-            <a:r>
-              <a:rPr sz="1400" b="1">
-                <a:solidFill>
-                  <a:srgbClr val="FFFFFF"/>
-                </a:solidFill>
-                <a:latin typeface="Segoe UI"/>
-              </a:rPr>
-              <a:t>✓</a:t>
-            </a:r>
-          </a:p>
-        </p:txBody>
-      </p:sp>
-      <p:sp>
-        <p:nvSpPr>
-          <p:cNvPr id="18" name="TextBox 17"/>
-          <p:cNvSpPr txBox="1"/>
-          <p:nvPr/>
-        </p:nvSpPr>
-        <p:spPr>
-          <a:xfrm>
-            <a:off x="1234440" y="4800600"/>
-            <a:ext cx="4754880" cy="731520"/>
-          </a:xfrm>
-          <a:prstGeom prst="rect">
-            <a:avLst/>
-          </a:prstGeom>
-          <a:noFill/>
-        </p:spPr>
-        <p:txBody>
-          <a:bodyPr wrap="square" lIns="45720" rIns="45720" tIns="18288" bIns="18288" anchor="ctr">
-            <a:spAutoFit/>
-          </a:bodyPr>
-          <a:lstStyle/>
-          <a:p>
-            <a:pPr algn="l"/>
-            <a:r>
-              <a:rPr sz="1200" b="0" i="0">
-                <a:solidFill>
-                  <a:srgbClr val="212121"/>
-                </a:solidFill>
-                <a:latin typeface="Segoe UI"/>
-              </a:rPr>
-              <a:t>9-sheet RTO workbook with operator absorption + buyback estimates</a:t>
-            </a:r>
-          </a:p>
-        </p:txBody>
-      </p:sp>
-      <p:sp>
-        <p:nvSpPr>
-          <p:cNvPr id="19" name="Oval 18"/>
-          <p:cNvSpPr/>
-          <p:nvPr/>
-        </p:nvSpPr>
-        <p:spPr>
-          <a:xfrm>
-            <a:off x="777240" y="5641848"/>
-            <a:ext cx="320040" cy="320040"/>
-          </a:xfrm>
-          <a:prstGeom prst="ellipse">
-            <a:avLst/>
-          </a:prstGeom>
-          <a:solidFill>
-            <a:srgbClr val="2E7D32"/>
-          </a:solidFill>
-          <a:ln>
-            <a:noFill/>
-          </a:ln>
-        </p:spPr>
-        <p:style>
-          <a:lnRef idx="1">
-            <a:schemeClr val="accent1"/>
-          </a:lnRef>
-          <a:fillRef idx="3">
-            <a:schemeClr val="accent1"/>
-          </a:fillRef>
-          <a:effectRef idx="2">
-            <a:schemeClr val="accent1"/>
-          </a:effectRef>
-          <a:fontRef idx="minor">
-            <a:schemeClr val="lt1"/>
-          </a:fontRef>
-        </p:style>
-        <p:txBody>
-          <a:bodyPr rtlCol="0" anchor="ctr"/>
-          <a:lstStyle/>
-          <a:p>
-            <a:pPr algn="ctr"/>
-          </a:p>
-        </p:txBody>
-      </p:sp>
-      <p:sp>
-        <p:nvSpPr>
-          <p:cNvPr id="20" name="TextBox 19"/>
-          <p:cNvSpPr txBox="1"/>
-          <p:nvPr/>
-        </p:nvSpPr>
-        <p:spPr>
-          <a:xfrm>
-            <a:off x="777240" y="5641848"/>
-            <a:ext cx="320040" cy="320040"/>
-          </a:xfrm>
-          <a:prstGeom prst="rect">
-            <a:avLst/>
-          </a:prstGeom>
-          <a:noFill/>
-        </p:spPr>
-        <p:txBody>
-          <a:bodyPr wrap="square" lIns="45720" rIns="45720" tIns="18288" bIns="18288" anchor="ctr">
-            <a:spAutoFit/>
-          </a:bodyPr>
-          <a:lstStyle/>
-          <a:p>
-            <a:pPr algn="ctr"/>
-            <a:r>
-              <a:rPr sz="1400" b="1">
-                <a:solidFill>
-                  <a:srgbClr val="FFFFFF"/>
-                </a:solidFill>
-                <a:latin typeface="Segoe UI"/>
-              </a:rPr>
-              <a:t>✓</a:t>
-            </a:r>
-          </a:p>
-        </p:txBody>
-      </p:sp>
-      <p:sp>
-        <p:nvSpPr>
-          <p:cNvPr id="21" name="TextBox 20"/>
-          <p:cNvSpPr txBox="1"/>
-          <p:nvPr/>
-        </p:nvSpPr>
-        <p:spPr>
-          <a:xfrm>
-            <a:off x="1234440" y="5577840"/>
-            <a:ext cx="4754880" cy="731520"/>
-          </a:xfrm>
-          <a:prstGeom prst="rect">
-            <a:avLst/>
-          </a:prstGeom>
-          <a:noFill/>
-        </p:spPr>
-        <p:txBody>
-          <a:bodyPr wrap="square" lIns="45720" rIns="45720" tIns="18288" bIns="18288" anchor="ctr">
-            <a:spAutoFit/>
-          </a:bodyPr>
-          <a:lstStyle/>
-          <a:p>
-            <a:pPr algn="l"/>
-            <a:r>
-              <a:rPr sz="1200" b="0" i="0">
-                <a:solidFill>
-                  <a:srgbClr val="212121"/>
-                </a:solidFill>
-                <a:latin typeface="Segoe UI"/>
-              </a:rPr>
-              <a:t>Reproducible pipeline — every number traces to a CSV row</a:t>
-            </a:r>
-          </a:p>
-        </p:txBody>
-      </p:sp>
-      <p:sp>
-        <p:nvSpPr>
-          <p:cNvPr id="22" name="Rounded Rectangle 21"/>
-          <p:cNvSpPr/>
-          <p:nvPr/>
-        </p:nvSpPr>
-        <p:spPr>
-          <a:xfrm>
-            <a:off x="6355080" y="1691640"/>
-            <a:ext cx="5577840" cy="4572000"/>
-          </a:xfrm>
-          <a:prstGeom prst="roundRect">
-            <a:avLst>
-              <a:gd name="adj" fmla="val 12000"/>
-            </a:avLst>
-          </a:prstGeom>
-          <a:solidFill>
-            <a:srgbClr val="FFEBEE"/>
-          </a:solidFill>
-          <a:ln w="9525">
-            <a:solidFill>
-              <a:srgbClr val="D32F2F"/>
-            </a:solidFill>
-          </a:ln>
-        </p:spPr>
-        <p:style>
-          <a:lnRef idx="1">
-            <a:schemeClr val="accent1"/>
-          </a:lnRef>
-          <a:fillRef idx="3">
-            <a:schemeClr val="accent1"/>
-          </a:fillRef>
-          <a:effectRef idx="2">
-            <a:schemeClr val="accent1"/>
-          </a:effectRef>
-          <a:fontRef idx="minor">
-            <a:schemeClr val="lt1"/>
-          </a:fontRef>
-        </p:style>
-        <p:txBody>
-          <a:bodyPr rtlCol="0" anchor="ctr"/>
-          <a:lstStyle/>
-          <a:p>
-            <a:pPr algn="ctr"/>
-          </a:p>
-        </p:txBody>
-      </p:sp>
-      <p:sp>
-        <p:nvSpPr>
-          <p:cNvPr id="23" name="Rounded Rectangle 22"/>
-          <p:cNvSpPr/>
-          <p:nvPr/>
-        </p:nvSpPr>
-        <p:spPr>
-          <a:xfrm>
-            <a:off x="6355080" y="1691640"/>
-            <a:ext cx="5577840" cy="548640"/>
+            <a:off x="502920" y="1828800"/>
+            <a:ext cx="594360" cy="256032"/>
           </a:xfrm>
           <a:prstGeom prst="roundRect">
             <a:avLst>
@@ -8408,14 +7933,14 @@
       </p:sp>
       <p:sp>
         <p:nvSpPr>
-          <p:cNvPr id="24" name="TextBox 23"/>
-          <p:cNvSpPr txBox="1"/>
-          <p:nvPr/>
-        </p:nvSpPr>
-        <p:spPr>
-          <a:xfrm>
-            <a:off x="6355080" y="1691640"/>
-            <a:ext cx="5577840" cy="548640"/>
+          <p:cNvPr id="12" name="TextBox 11"/>
+          <p:cNvSpPr txBox="1"/>
+          <p:nvPr/>
+        </p:nvSpPr>
+        <p:spPr>
+          <a:xfrm>
+            <a:off x="502920" y="1828800"/>
+            <a:ext cx="594360" cy="256032"/>
           </a:xfrm>
           <a:prstGeom prst="rect">
             <a:avLst/>
@@ -8430,30 +7955,172 @@
           <a:p>
             <a:pPr algn="ctr"/>
             <a:r>
-              <a:rPr sz="1600" b="1">
+              <a:rPr sz="1000" b="1">
                 <a:solidFill>
                   <a:srgbClr val="FFFFFF"/>
                 </a:solidFill>
                 <a:latin typeface="Segoe UI"/>
               </a:rPr>
-              <a:t>WHAT IT IS NOT</a:t>
-            </a:r>
-          </a:p>
-        </p:txBody>
-      </p:sp>
-      <p:sp>
-        <p:nvSpPr>
-          <p:cNvPr id="25" name="Oval 24"/>
+              <a:t>P0</a:t>
+            </a:r>
+          </a:p>
+        </p:txBody>
+      </p:sp>
+      <p:sp>
+        <p:nvSpPr>
+          <p:cNvPr id="13" name="TextBox 12"/>
+          <p:cNvSpPr txBox="1"/>
+          <p:nvPr/>
+        </p:nvSpPr>
+        <p:spPr>
+          <a:xfrm>
+            <a:off x="1417320" y="1773936"/>
+            <a:ext cx="3794760" cy="219456"/>
+          </a:xfrm>
+          <a:prstGeom prst="rect">
+            <a:avLst/>
+          </a:prstGeom>
+          <a:noFill/>
+        </p:spPr>
+        <p:txBody>
+          <a:bodyPr wrap="square" lIns="45720" rIns="45720" tIns="18288" bIns="18288" anchor="t">
+            <a:spAutoFit/>
+          </a:bodyPr>
+          <a:lstStyle/>
+          <a:p>
+            <a:pPr algn="l"/>
+            <a:r>
+              <a:rPr sz="1000" b="1" i="0">
+                <a:solidFill>
+                  <a:srgbClr val="212121"/>
+                </a:solidFill>
+                <a:latin typeface="Segoe UI"/>
+              </a:rPr>
+              <a:t>Master stops register</a:t>
+            </a:r>
+          </a:p>
+        </p:txBody>
+      </p:sp>
+      <p:sp>
+        <p:nvSpPr>
+          <p:cNvPr id="14" name="TextBox 13"/>
+          <p:cNvSpPr txBox="1"/>
+          <p:nvPr/>
+        </p:nvSpPr>
+        <p:spPr>
+          <a:xfrm>
+            <a:off x="1417320" y="1975104"/>
+            <a:ext cx="3794760" cy="201168"/>
+          </a:xfrm>
+          <a:prstGeom prst="rect">
+            <a:avLst/>
+          </a:prstGeom>
+          <a:noFill/>
+        </p:spPr>
+        <p:txBody>
+          <a:bodyPr wrap="square" lIns="45720" rIns="45720" tIns="18288" bIns="18288" anchor="t">
+            <a:spAutoFit/>
+          </a:bodyPr>
+          <a:lstStyle/>
+          <a:p>
+            <a:pPr algn="l"/>
+            <a:r>
+              <a:rPr sz="850" b="0" i="1">
+                <a:solidFill>
+                  <a:srgbClr val="757575"/>
+                </a:solidFill>
+                <a:latin typeface="Segoe UI"/>
+              </a:rPr>
+              <a:t>Kashmir_Stops_Sectored_V2.csv</a:t>
+            </a:r>
+          </a:p>
+        </p:txBody>
+      </p:sp>
+      <p:sp>
+        <p:nvSpPr>
+          <p:cNvPr id="15" name="TextBox 14"/>
+          <p:cNvSpPr txBox="1"/>
+          <p:nvPr/>
+        </p:nvSpPr>
+        <p:spPr>
+          <a:xfrm>
+            <a:off x="5349240" y="1737360"/>
+            <a:ext cx="2834640" cy="438912"/>
+          </a:xfrm>
+          <a:prstGeom prst="rect">
+            <a:avLst/>
+          </a:prstGeom>
+          <a:noFill/>
+        </p:spPr>
+        <p:txBody>
+          <a:bodyPr wrap="square" lIns="45720" rIns="45720" tIns="18288" bIns="18288" anchor="ctr">
+            <a:spAutoFit/>
+          </a:bodyPr>
+          <a:lstStyle/>
+          <a:p>
+            <a:pPr algn="l"/>
+            <a:r>
+              <a:rPr sz="950" b="0" i="0">
+                <a:solidFill>
+                  <a:srgbClr val="212121"/>
+                </a:solidFill>
+                <a:latin typeface="Segoe UI"/>
+              </a:rPr>
+              <a:t>RTOs / SSCL</a:t>
+            </a:r>
+          </a:p>
+        </p:txBody>
+      </p:sp>
+      <p:sp>
+        <p:nvSpPr>
+          <p:cNvPr id="16" name="TextBox 15"/>
+          <p:cNvSpPr txBox="1"/>
+          <p:nvPr/>
+        </p:nvSpPr>
+        <p:spPr>
+          <a:xfrm>
+            <a:off x="8321040" y="1737360"/>
+            <a:ext cx="3520440" cy="438912"/>
+          </a:xfrm>
+          <a:prstGeom prst="rect">
+            <a:avLst/>
+          </a:prstGeom>
+          <a:noFill/>
+        </p:spPr>
+        <p:txBody>
+          <a:bodyPr wrap="square" lIns="45720" rIns="45720" tIns="18288" bIns="18288" anchor="ctr">
+            <a:spAutoFit/>
+          </a:bodyPr>
+          <a:lstStyle/>
+          <a:p>
+            <a:pPr algn="l"/>
+            <a:r>
+              <a:rPr sz="950" b="0" i="0">
+                <a:solidFill>
+                  <a:srgbClr val="212121"/>
+                </a:solidFill>
+                <a:latin typeface="Segoe UI"/>
+              </a:rPr>
+              <a:t>Retires the 23 TMP-K placeholder route codes.</a:t>
+            </a:r>
+          </a:p>
+        </p:txBody>
+      </p:sp>
+      <p:sp>
+        <p:nvSpPr>
+          <p:cNvPr id="17" name="Rounded Rectangle 16"/>
           <p:cNvSpPr/>
           <p:nvPr/>
         </p:nvSpPr>
         <p:spPr>
           <a:xfrm>
-            <a:off x="6583680" y="2532888"/>
-            <a:ext cx="320040" cy="320040"/>
-          </a:xfrm>
-          <a:prstGeom prst="ellipse">
-            <a:avLst/>
+            <a:off x="502920" y="2304288"/>
+            <a:ext cx="594360" cy="256032"/>
+          </a:xfrm>
+          <a:prstGeom prst="roundRect">
+            <a:avLst>
+              <a:gd name="adj" fmla="val 12000"/>
+            </a:avLst>
           </a:prstGeom>
           <a:solidFill>
             <a:srgbClr val="D32F2F"/>
@@ -8486,14 +8153,14 @@
       </p:sp>
       <p:sp>
         <p:nvSpPr>
-          <p:cNvPr id="26" name="TextBox 25"/>
-          <p:cNvSpPr txBox="1"/>
-          <p:nvPr/>
-        </p:nvSpPr>
-        <p:spPr>
-          <a:xfrm>
-            <a:off x="6583680" y="2532888"/>
-            <a:ext cx="320040" cy="320040"/>
+          <p:cNvPr id="18" name="TextBox 17"/>
+          <p:cNvSpPr txBox="1"/>
+          <p:nvPr/>
+        </p:nvSpPr>
+        <p:spPr>
+          <a:xfrm>
+            <a:off x="502920" y="2304288"/>
+            <a:ext cx="594360" cy="256032"/>
           </a:xfrm>
           <a:prstGeom prst="rect">
             <a:avLst/>
@@ -8508,27 +8175,97 @@
           <a:p>
             <a:pPr algn="ctr"/>
             <a:r>
-              <a:rPr sz="1400" b="1">
+              <a:rPr sz="1000" b="1">
                 <a:solidFill>
                   <a:srgbClr val="FFFFFF"/>
                 </a:solidFill>
                 <a:latin typeface="Segoe UI"/>
               </a:rPr>
-              <a:t>✗</a:t>
-            </a:r>
-          </a:p>
-        </p:txBody>
-      </p:sp>
-      <p:sp>
-        <p:nvSpPr>
-          <p:cNvPr id="27" name="TextBox 26"/>
-          <p:cNvSpPr txBox="1"/>
-          <p:nvPr/>
-        </p:nvSpPr>
-        <p:spPr>
-          <a:xfrm>
-            <a:off x="7040880" y="2468880"/>
-            <a:ext cx="4754880" cy="731520"/>
+              <a:t>P0</a:t>
+            </a:r>
+          </a:p>
+        </p:txBody>
+      </p:sp>
+      <p:sp>
+        <p:nvSpPr>
+          <p:cNvPr id="19" name="TextBox 18"/>
+          <p:cNvSpPr txBox="1"/>
+          <p:nvPr/>
+        </p:nvSpPr>
+        <p:spPr>
+          <a:xfrm>
+            <a:off x="1417320" y="2249424"/>
+            <a:ext cx="3794760" cy="219456"/>
+          </a:xfrm>
+          <a:prstGeom prst="rect">
+            <a:avLst/>
+          </a:prstGeom>
+          <a:noFill/>
+        </p:spPr>
+        <p:txBody>
+          <a:bodyPr wrap="square" lIns="45720" rIns="45720" tIns="18288" bIns="18288" anchor="t">
+            <a:spAutoFit/>
+          </a:bodyPr>
+          <a:lstStyle/>
+          <a:p>
+            <a:pPr algn="l"/>
+            <a:r>
+              <a:rPr sz="1000" b="1" i="0">
+                <a:solidFill>
+                  <a:srgbClr val="212121"/>
+                </a:solidFill>
+                <a:latin typeface="Segoe UI"/>
+              </a:rPr>
+              <a:t>Operator permit registry (live)</a:t>
+            </a:r>
+          </a:p>
+        </p:txBody>
+      </p:sp>
+      <p:sp>
+        <p:nvSpPr>
+          <p:cNvPr id="20" name="TextBox 19"/>
+          <p:cNvSpPr txBox="1"/>
+          <p:nvPr/>
+        </p:nvSpPr>
+        <p:spPr>
+          <a:xfrm>
+            <a:off x="1417320" y="2450591"/>
+            <a:ext cx="3794760" cy="201168"/>
+          </a:xfrm>
+          <a:prstGeom prst="rect">
+            <a:avLst/>
+          </a:prstGeom>
+          <a:noFill/>
+        </p:spPr>
+        <p:txBody>
+          <a:bodyPr wrap="square" lIns="45720" rIns="45720" tIns="18288" bIns="18288" anchor="t">
+            <a:spAutoFit/>
+          </a:bodyPr>
+          <a:lstStyle/>
+          <a:p>
+            <a:pPr algn="l"/>
+            <a:r>
+              <a:rPr sz="850" b="0" i="1">
+                <a:solidFill>
+                  <a:srgbClr val="757575"/>
+                </a:solidFill>
+                <a:latin typeface="Segoe UI"/>
+              </a:rPr>
+              <a:t>Permit no. · owner · vehicle no. · depot</a:t>
+            </a:r>
+          </a:p>
+        </p:txBody>
+      </p:sp>
+      <p:sp>
+        <p:nvSpPr>
+          <p:cNvPr id="21" name="TextBox 20"/>
+          <p:cNvSpPr txBox="1"/>
+          <p:nvPr/>
+        </p:nvSpPr>
+        <p:spPr>
+          <a:xfrm>
+            <a:off x="5349240" y="2212848"/>
+            <a:ext cx="2834640" cy="438912"/>
           </a:xfrm>
           <a:prstGeom prst="rect">
             <a:avLst/>
@@ -8543,30 +8280,110 @@
           <a:p>
             <a:pPr algn="l"/>
             <a:r>
-              <a:rPr sz="1200" b="0" i="0">
+              <a:rPr sz="950" b="0" i="0">
                 <a:solidFill>
                   <a:srgbClr val="212121"/>
                 </a:solidFill>
                 <a:latin typeface="Segoe UI"/>
               </a:rPr>
-              <a:t>A ridership survey — field validation still required</a:t>
-            </a:r>
-          </a:p>
-        </p:txBody>
-      </p:sp>
-      <p:sp>
-        <p:nvSpPr>
-          <p:cNvPr id="28" name="Oval 27"/>
+              <a:t>RTO offices · J&amp;K Transport Commr</a:t>
+            </a:r>
+          </a:p>
+        </p:txBody>
+      </p:sp>
+      <p:sp>
+        <p:nvSpPr>
+          <p:cNvPr id="22" name="TextBox 21"/>
+          <p:cNvSpPr txBox="1"/>
+          <p:nvPr/>
+        </p:nvSpPr>
+        <p:spPr>
+          <a:xfrm>
+            <a:off x="8321040" y="2212848"/>
+            <a:ext cx="3520440" cy="438912"/>
+          </a:xfrm>
+          <a:prstGeom prst="rect">
+            <a:avLst/>
+          </a:prstGeom>
+          <a:noFill/>
+        </p:spPr>
+        <p:txBody>
+          <a:bodyPr wrap="square" lIns="45720" rIns="45720" tIns="18288" bIns="18288" anchor="ctr">
+            <a:spAutoFit/>
+          </a:bodyPr>
+          <a:lstStyle/>
+          <a:p>
+            <a:pPr algn="l"/>
+            <a:r>
+              <a:rPr sz="950" b="0" i="0">
+                <a:solidFill>
+                  <a:srgbClr val="212121"/>
+                </a:solidFill>
+                <a:latin typeface="Segoe UI"/>
+              </a:rPr>
+              <a:t>Exact displaced vehicles → defensible buyback.</a:t>
+            </a:r>
+          </a:p>
+        </p:txBody>
+      </p:sp>
+      <p:sp>
+        <p:nvSpPr>
+          <p:cNvPr id="23" name="Rectangle 22"/>
           <p:cNvSpPr/>
           <p:nvPr/>
         </p:nvSpPr>
         <p:spPr>
           <a:xfrm>
-            <a:off x="6583680" y="3310128"/>
-            <a:ext cx="320040" cy="320040"/>
-          </a:xfrm>
-          <a:prstGeom prst="ellipse">
-            <a:avLst/>
+            <a:off x="411480" y="2688336"/>
+            <a:ext cx="11475720" cy="438912"/>
+          </a:xfrm>
+          <a:prstGeom prst="rect">
+            <a:avLst/>
+          </a:prstGeom>
+          <a:solidFill>
+            <a:srgbClr val="F5F5F5"/>
+          </a:solidFill>
+          <a:ln>
+            <a:noFill/>
+          </a:ln>
+        </p:spPr>
+        <p:style>
+          <a:lnRef idx="1">
+            <a:schemeClr val="accent1"/>
+          </a:lnRef>
+          <a:fillRef idx="3">
+            <a:schemeClr val="accent1"/>
+          </a:fillRef>
+          <a:effectRef idx="2">
+            <a:schemeClr val="accent1"/>
+          </a:effectRef>
+          <a:fontRef idx="minor">
+            <a:schemeClr val="lt1"/>
+          </a:fontRef>
+        </p:style>
+        <p:txBody>
+          <a:bodyPr rtlCol="0" anchor="ctr"/>
+          <a:lstStyle/>
+          <a:p>
+            <a:pPr algn="ctr"/>
+          </a:p>
+        </p:txBody>
+      </p:sp>
+      <p:sp>
+        <p:nvSpPr>
+          <p:cNvPr id="24" name="Rounded Rectangle 23"/>
+          <p:cNvSpPr/>
+          <p:nvPr/>
+        </p:nvSpPr>
+        <p:spPr>
+          <a:xfrm>
+            <a:off x="502920" y="2779776"/>
+            <a:ext cx="594360" cy="256032"/>
+          </a:xfrm>
+          <a:prstGeom prst="roundRect">
+            <a:avLst>
+              <a:gd name="adj" fmla="val 12000"/>
+            </a:avLst>
           </a:prstGeom>
           <a:solidFill>
             <a:srgbClr val="D32F2F"/>
@@ -8599,14 +8416,154 @@
       </p:sp>
       <p:sp>
         <p:nvSpPr>
+          <p:cNvPr id="25" name="TextBox 24"/>
+          <p:cNvSpPr txBox="1"/>
+          <p:nvPr/>
+        </p:nvSpPr>
+        <p:spPr>
+          <a:xfrm>
+            <a:off x="502920" y="2779776"/>
+            <a:ext cx="594360" cy="256032"/>
+          </a:xfrm>
+          <a:prstGeom prst="rect">
+            <a:avLst/>
+          </a:prstGeom>
+          <a:noFill/>
+        </p:spPr>
+        <p:txBody>
+          <a:bodyPr wrap="square" lIns="45720" rIns="45720" tIns="18288" bIns="18288" anchor="ctr">
+            <a:spAutoFit/>
+          </a:bodyPr>
+          <a:lstStyle/>
+          <a:p>
+            <a:pPr algn="ctr"/>
+            <a:r>
+              <a:rPr sz="1000" b="1">
+                <a:solidFill>
+                  <a:srgbClr val="FFFFFF"/>
+                </a:solidFill>
+                <a:latin typeface="Segoe UI"/>
+              </a:rPr>
+              <a:t>P0</a:t>
+            </a:r>
+          </a:p>
+        </p:txBody>
+      </p:sp>
+      <p:sp>
+        <p:nvSpPr>
+          <p:cNvPr id="26" name="TextBox 25"/>
+          <p:cNvSpPr txBox="1"/>
+          <p:nvPr/>
+        </p:nvSpPr>
+        <p:spPr>
+          <a:xfrm>
+            <a:off x="1417320" y="2724912"/>
+            <a:ext cx="3794760" cy="219456"/>
+          </a:xfrm>
+          <a:prstGeom prst="rect">
+            <a:avLst/>
+          </a:prstGeom>
+          <a:noFill/>
+        </p:spPr>
+        <p:txBody>
+          <a:bodyPr wrap="square" lIns="45720" rIns="45720" tIns="18288" bIns="18288" anchor="t">
+            <a:spAutoFit/>
+          </a:bodyPr>
+          <a:lstStyle/>
+          <a:p>
+            <a:pPr algn="l"/>
+            <a:r>
+              <a:rPr sz="1000" b="1" i="0">
+                <a:solidFill>
+                  <a:srgbClr val="212121"/>
+                </a:solidFill>
+                <a:latin typeface="Segoe UI"/>
+              </a:rPr>
+              <a:t>GPS traces — current operators</a:t>
+            </a:r>
+          </a:p>
+        </p:txBody>
+      </p:sp>
+      <p:sp>
+        <p:nvSpPr>
+          <p:cNvPr id="27" name="TextBox 26"/>
+          <p:cNvSpPr txBox="1"/>
+          <p:nvPr/>
+        </p:nvSpPr>
+        <p:spPr>
+          <a:xfrm>
+            <a:off x="1417320" y="2926080"/>
+            <a:ext cx="3794760" cy="201168"/>
+          </a:xfrm>
+          <a:prstGeom prst="rect">
+            <a:avLst/>
+          </a:prstGeom>
+          <a:noFill/>
+        </p:spPr>
+        <p:txBody>
+          <a:bodyPr wrap="square" lIns="45720" rIns="45720" tIns="18288" bIns="18288" anchor="t">
+            <a:spAutoFit/>
+          </a:bodyPr>
+          <a:lstStyle/>
+          <a:p>
+            <a:pPr algn="l"/>
+            <a:r>
+              <a:rPr sz="850" b="0" i="1">
+                <a:solidFill>
+                  <a:srgbClr val="757575"/>
+                </a:solidFill>
+                <a:latin typeface="Segoe UI"/>
+              </a:rPr>
+              <a:t>30 days · 1 Hz · SSCL + private operators</a:t>
+            </a:r>
+          </a:p>
+        </p:txBody>
+      </p:sp>
+      <p:sp>
+        <p:nvSpPr>
+          <p:cNvPr id="28" name="TextBox 27"/>
+          <p:cNvSpPr txBox="1"/>
+          <p:nvPr/>
+        </p:nvSpPr>
+        <p:spPr>
+          <a:xfrm>
+            <a:off x="5349240" y="2688336"/>
+            <a:ext cx="2834640" cy="438912"/>
+          </a:xfrm>
+          <a:prstGeom prst="rect">
+            <a:avLst/>
+          </a:prstGeom>
+          <a:noFill/>
+        </p:spPr>
+        <p:txBody>
+          <a:bodyPr wrap="square" lIns="45720" rIns="45720" tIns="18288" bIns="18288" anchor="ctr">
+            <a:spAutoFit/>
+          </a:bodyPr>
+          <a:lstStyle/>
+          <a:p>
+            <a:pPr algn="l"/>
+            <a:r>
+              <a:rPr sz="950" b="0" i="0">
+                <a:solidFill>
+                  <a:srgbClr val="212121"/>
+                </a:solidFill>
+                <a:latin typeface="Segoe UI"/>
+              </a:rPr>
+              <a:t>SSCL CHALO ops · MTS Kashmir</a:t>
+            </a:r>
+          </a:p>
+        </p:txBody>
+      </p:sp>
+      <p:sp>
+        <p:nvSpPr>
           <p:cNvPr id="29" name="TextBox 28"/>
           <p:cNvSpPr txBox="1"/>
           <p:nvPr/>
         </p:nvSpPr>
         <p:spPr>
           <a:xfrm>
-            <a:off x="6583680" y="3310128"/>
-            <a:ext cx="320040" cy="320040"/>
+            <a:off x="8321040" y="2688336"/>
+            <a:ext cx="3520440" cy="438912"/>
           </a:xfrm>
           <a:prstGeom prst="rect">
             <a:avLst/>
@@ -8619,29 +8576,179 @@
           </a:bodyPr>
           <a:lstStyle/>
           <a:p>
-            <a:pPr algn="ctr"/>
-            <a:r>
-              <a:rPr sz="1400" b="1">
+            <a:pPr algn="l"/>
+            <a:r>
+              <a:rPr sz="950" b="0" i="0">
+                <a:solidFill>
+                  <a:srgbClr val="212121"/>
+                </a:solidFill>
+                <a:latin typeface="Segoe UI"/>
+              </a:rPr>
+              <a:t>Replaces OSRM free-flow + congestion×2.2 model.</a:t>
+            </a:r>
+          </a:p>
+        </p:txBody>
+      </p:sp>
+      <p:sp>
+        <p:nvSpPr>
+          <p:cNvPr id="30" name="Rounded Rectangle 29"/>
+          <p:cNvSpPr/>
+          <p:nvPr/>
+        </p:nvSpPr>
+        <p:spPr>
+          <a:xfrm>
+            <a:off x="502920" y="3255264"/>
+            <a:ext cx="594360" cy="256032"/>
+          </a:xfrm>
+          <a:prstGeom prst="roundRect">
+            <a:avLst>
+              <a:gd name="adj" fmla="val 12000"/>
+            </a:avLst>
+          </a:prstGeom>
+          <a:solidFill>
+            <a:srgbClr val="F9A825"/>
+          </a:solidFill>
+          <a:ln>
+            <a:noFill/>
+          </a:ln>
+        </p:spPr>
+        <p:style>
+          <a:lnRef idx="1">
+            <a:schemeClr val="accent1"/>
+          </a:lnRef>
+          <a:fillRef idx="3">
+            <a:schemeClr val="accent1"/>
+          </a:fillRef>
+          <a:effectRef idx="2">
+            <a:schemeClr val="accent1"/>
+          </a:effectRef>
+          <a:fontRef idx="minor">
+            <a:schemeClr val="lt1"/>
+          </a:fontRef>
+        </p:style>
+        <p:txBody>
+          <a:bodyPr rtlCol="0" anchor="ctr"/>
+          <a:lstStyle/>
+          <a:p>
+            <a:pPr algn="ctr"/>
+          </a:p>
+        </p:txBody>
+      </p:sp>
+      <p:sp>
+        <p:nvSpPr>
+          <p:cNvPr id="31" name="TextBox 30"/>
+          <p:cNvSpPr txBox="1"/>
+          <p:nvPr/>
+        </p:nvSpPr>
+        <p:spPr>
+          <a:xfrm>
+            <a:off x="502920" y="3255264"/>
+            <a:ext cx="594360" cy="256032"/>
+          </a:xfrm>
+          <a:prstGeom prst="rect">
+            <a:avLst/>
+          </a:prstGeom>
+          <a:noFill/>
+        </p:spPr>
+        <p:txBody>
+          <a:bodyPr wrap="square" lIns="45720" rIns="45720" tIns="18288" bIns="18288" anchor="ctr">
+            <a:spAutoFit/>
+          </a:bodyPr>
+          <a:lstStyle/>
+          <a:p>
+            <a:pPr algn="ctr"/>
+            <a:r>
+              <a:rPr sz="1000" b="1">
                 <a:solidFill>
                   <a:srgbClr val="FFFFFF"/>
                 </a:solidFill>
                 <a:latin typeface="Segoe UI"/>
               </a:rPr>
-              <a:t>✗</a:t>
-            </a:r>
-          </a:p>
-        </p:txBody>
-      </p:sp>
-      <p:sp>
-        <p:nvSpPr>
-          <p:cNvPr id="30" name="TextBox 29"/>
-          <p:cNvSpPr txBox="1"/>
-          <p:nvPr/>
-        </p:nvSpPr>
-        <p:spPr>
-          <a:xfrm>
-            <a:off x="7040880" y="3246120"/>
-            <a:ext cx="4754880" cy="731520"/>
+              <a:t>P1</a:t>
+            </a:r>
+          </a:p>
+        </p:txBody>
+      </p:sp>
+      <p:sp>
+        <p:nvSpPr>
+          <p:cNvPr id="32" name="TextBox 31"/>
+          <p:cNvSpPr txBox="1"/>
+          <p:nvPr/>
+        </p:nvSpPr>
+        <p:spPr>
+          <a:xfrm>
+            <a:off x="1417320" y="3200400"/>
+            <a:ext cx="3794760" cy="219456"/>
+          </a:xfrm>
+          <a:prstGeom prst="rect">
+            <a:avLst/>
+          </a:prstGeom>
+          <a:noFill/>
+        </p:spPr>
+        <p:txBody>
+          <a:bodyPr wrap="square" lIns="45720" rIns="45720" tIns="18288" bIns="18288" anchor="t">
+            <a:spAutoFit/>
+          </a:bodyPr>
+          <a:lstStyle/>
+          <a:p>
+            <a:pPr algn="l"/>
+            <a:r>
+              <a:rPr sz="1000" b="1" i="0">
+                <a:solidFill>
+                  <a:srgbClr val="212121"/>
+                </a:solidFill>
+                <a:latin typeface="Segoe UI"/>
+              </a:rPr>
+              <a:t>Census 2021 ward-level population</a:t>
+            </a:r>
+          </a:p>
+        </p:txBody>
+      </p:sp>
+      <p:sp>
+        <p:nvSpPr>
+          <p:cNvPr id="33" name="TextBox 32"/>
+          <p:cNvSpPr txBox="1"/>
+          <p:nvPr/>
+        </p:nvSpPr>
+        <p:spPr>
+          <a:xfrm>
+            <a:off x="1417320" y="3401568"/>
+            <a:ext cx="3794760" cy="201168"/>
+          </a:xfrm>
+          <a:prstGeom prst="rect">
+            <a:avLst/>
+          </a:prstGeom>
+          <a:noFill/>
+        </p:spPr>
+        <p:txBody>
+          <a:bodyPr wrap="square" lIns="45720" rIns="45720" tIns="18288" bIns="18288" anchor="t">
+            <a:spAutoFit/>
+          </a:bodyPr>
+          <a:lstStyle/>
+          <a:p>
+            <a:pPr algn="l"/>
+            <a:r>
+              <a:rPr sz="850" b="0" i="1">
+                <a:solidFill>
+                  <a:srgbClr val="757575"/>
+                </a:solidFill>
+                <a:latin typeface="Segoe UI"/>
+              </a:rPr>
+              <a:t>Ward boundaries + counts</a:t>
+            </a:r>
+          </a:p>
+        </p:txBody>
+      </p:sp>
+      <p:sp>
+        <p:nvSpPr>
+          <p:cNvPr id="34" name="TextBox 33"/>
+          <p:cNvSpPr txBox="1"/>
+          <p:nvPr/>
+        </p:nvSpPr>
+        <p:spPr>
+          <a:xfrm>
+            <a:off x="5349240" y="3163824"/>
+            <a:ext cx="2834640" cy="438912"/>
           </a:xfrm>
           <a:prstGeom prst="rect">
             <a:avLst/>
@@ -8656,30 +8763,1331 @@
           <a:p>
             <a:pPr algn="l"/>
             <a:r>
-              <a:rPr sz="1200" b="0" i="0">
+              <a:rPr sz="950" b="0" i="0">
                 <a:solidFill>
                   <a:srgbClr val="212121"/>
                 </a:solidFill>
                 <a:latin typeface="Segoe UI"/>
               </a:rPr>
-              <a:t>A net-fleet-gap report — current ops verification needed</a:t>
-            </a:r>
-          </a:p>
-        </p:txBody>
-      </p:sp>
-      <p:sp>
-        <p:nvSpPr>
-          <p:cNvPr id="31" name="Oval 30"/>
+              <a:t>Census of India · J&amp;K Directorate</a:t>
+            </a:r>
+          </a:p>
+        </p:txBody>
+      </p:sp>
+      <p:sp>
+        <p:nvSpPr>
+          <p:cNvPr id="35" name="TextBox 34"/>
+          <p:cNvSpPr txBox="1"/>
+          <p:nvPr/>
+        </p:nvSpPr>
+        <p:spPr>
+          <a:xfrm>
+            <a:off x="8321040" y="3163824"/>
+            <a:ext cx="3520440" cy="438912"/>
+          </a:xfrm>
+          <a:prstGeom prst="rect">
+            <a:avLst/>
+          </a:prstGeom>
+          <a:noFill/>
+        </p:spPr>
+        <p:txBody>
+          <a:bodyPr wrap="square" lIns="45720" rIns="45720" tIns="18288" bIns="18288" anchor="ctr">
+            <a:spAutoFit/>
+          </a:bodyPr>
+          <a:lstStyle/>
+          <a:p>
+            <a:pPr algn="l"/>
+            <a:r>
+              <a:rPr sz="950" b="0" i="0">
+                <a:solidFill>
+                  <a:srgbClr val="212121"/>
+                </a:solidFill>
+                <a:latin typeface="Segoe UI"/>
+              </a:rPr>
+              <a:t>Tighter Pop_Score → tighter CDI bands.</a:t>
+            </a:r>
+          </a:p>
+        </p:txBody>
+      </p:sp>
+      <p:sp>
+        <p:nvSpPr>
+          <p:cNvPr id="36" name="Rectangle 35"/>
           <p:cNvSpPr/>
           <p:nvPr/>
         </p:nvSpPr>
         <p:spPr>
           <a:xfrm>
-            <a:off x="6583680" y="4087368"/>
-            <a:ext cx="320040" cy="320040"/>
-          </a:xfrm>
-          <a:prstGeom prst="ellipse">
-            <a:avLst/>
+            <a:off x="411480" y="3639312"/>
+            <a:ext cx="11475720" cy="438912"/>
+          </a:xfrm>
+          <a:prstGeom prst="rect">
+            <a:avLst/>
+          </a:prstGeom>
+          <a:solidFill>
+            <a:srgbClr val="F5F5F5"/>
+          </a:solidFill>
+          <a:ln>
+            <a:noFill/>
+          </a:ln>
+        </p:spPr>
+        <p:style>
+          <a:lnRef idx="1">
+            <a:schemeClr val="accent1"/>
+          </a:lnRef>
+          <a:fillRef idx="3">
+            <a:schemeClr val="accent1"/>
+          </a:fillRef>
+          <a:effectRef idx="2">
+            <a:schemeClr val="accent1"/>
+          </a:effectRef>
+          <a:fontRef idx="minor">
+            <a:schemeClr val="lt1"/>
+          </a:fontRef>
+        </p:style>
+        <p:txBody>
+          <a:bodyPr rtlCol="0" anchor="ctr"/>
+          <a:lstStyle/>
+          <a:p>
+            <a:pPr algn="ctr"/>
+          </a:p>
+        </p:txBody>
+      </p:sp>
+      <p:sp>
+        <p:nvSpPr>
+          <p:cNvPr id="37" name="Rounded Rectangle 36"/>
+          <p:cNvSpPr/>
+          <p:nvPr/>
+        </p:nvSpPr>
+        <p:spPr>
+          <a:xfrm>
+            <a:off x="502920" y="3730752"/>
+            <a:ext cx="594360" cy="256032"/>
+          </a:xfrm>
+          <a:prstGeom prst="roundRect">
+            <a:avLst>
+              <a:gd name="adj" fmla="val 12000"/>
+            </a:avLst>
+          </a:prstGeom>
+          <a:solidFill>
+            <a:srgbClr val="F9A825"/>
+          </a:solidFill>
+          <a:ln>
+            <a:noFill/>
+          </a:ln>
+        </p:spPr>
+        <p:style>
+          <a:lnRef idx="1">
+            <a:schemeClr val="accent1"/>
+          </a:lnRef>
+          <a:fillRef idx="3">
+            <a:schemeClr val="accent1"/>
+          </a:fillRef>
+          <a:effectRef idx="2">
+            <a:schemeClr val="accent1"/>
+          </a:effectRef>
+          <a:fontRef idx="minor">
+            <a:schemeClr val="lt1"/>
+          </a:fontRef>
+        </p:style>
+        <p:txBody>
+          <a:bodyPr rtlCol="0" anchor="ctr"/>
+          <a:lstStyle/>
+          <a:p>
+            <a:pPr algn="ctr"/>
+          </a:p>
+        </p:txBody>
+      </p:sp>
+      <p:sp>
+        <p:nvSpPr>
+          <p:cNvPr id="38" name="TextBox 37"/>
+          <p:cNvSpPr txBox="1"/>
+          <p:nvPr/>
+        </p:nvSpPr>
+        <p:spPr>
+          <a:xfrm>
+            <a:off x="502920" y="3730752"/>
+            <a:ext cx="594360" cy="256032"/>
+          </a:xfrm>
+          <a:prstGeom prst="rect">
+            <a:avLst/>
+          </a:prstGeom>
+          <a:noFill/>
+        </p:spPr>
+        <p:txBody>
+          <a:bodyPr wrap="square" lIns="45720" rIns="45720" tIns="18288" bIns="18288" anchor="ctr">
+            <a:spAutoFit/>
+          </a:bodyPr>
+          <a:lstStyle/>
+          <a:p>
+            <a:pPr algn="ctr"/>
+            <a:r>
+              <a:rPr sz="1000" b="1">
+                <a:solidFill>
+                  <a:srgbClr val="FFFFFF"/>
+                </a:solidFill>
+                <a:latin typeface="Segoe UI"/>
+              </a:rPr>
+              <a:t>P1</a:t>
+            </a:r>
+          </a:p>
+        </p:txBody>
+      </p:sp>
+      <p:sp>
+        <p:nvSpPr>
+          <p:cNvPr id="39" name="TextBox 38"/>
+          <p:cNvSpPr txBox="1"/>
+          <p:nvPr/>
+        </p:nvSpPr>
+        <p:spPr>
+          <a:xfrm>
+            <a:off x="1417320" y="3675887"/>
+            <a:ext cx="3794760" cy="219456"/>
+          </a:xfrm>
+          <a:prstGeom prst="rect">
+            <a:avLst/>
+          </a:prstGeom>
+          <a:noFill/>
+        </p:spPr>
+        <p:txBody>
+          <a:bodyPr wrap="square" lIns="45720" rIns="45720" tIns="18288" bIns="18288" anchor="t">
+            <a:spAutoFit/>
+          </a:bodyPr>
+          <a:lstStyle/>
+          <a:p>
+            <a:pPr algn="l"/>
+            <a:r>
+              <a:rPr sz="1000" b="1" i="0">
+                <a:solidFill>
+                  <a:srgbClr val="212121"/>
+                </a:solidFill>
+                <a:latin typeface="Segoe UI"/>
+              </a:rPr>
+              <a:t>AFC / fare-card ridership (per route)</a:t>
+            </a:r>
+          </a:p>
+        </p:txBody>
+      </p:sp>
+      <p:sp>
+        <p:nvSpPr>
+          <p:cNvPr id="40" name="TextBox 39"/>
+          <p:cNvSpPr txBox="1"/>
+          <p:nvPr/>
+        </p:nvSpPr>
+        <p:spPr>
+          <a:xfrm>
+            <a:off x="1417320" y="3877056"/>
+            <a:ext cx="3794760" cy="201168"/>
+          </a:xfrm>
+          <a:prstGeom prst="rect">
+            <a:avLst/>
+          </a:prstGeom>
+          <a:noFill/>
+        </p:spPr>
+        <p:txBody>
+          <a:bodyPr wrap="square" lIns="45720" rIns="45720" tIns="18288" bIns="18288" anchor="t">
+            <a:spAutoFit/>
+          </a:bodyPr>
+          <a:lstStyle/>
+          <a:p>
+            <a:pPr algn="l"/>
+            <a:r>
+              <a:rPr sz="850" b="0" i="1">
+                <a:solidFill>
+                  <a:srgbClr val="757575"/>
+                </a:solidFill>
+                <a:latin typeface="Segoe UI"/>
+              </a:rPr>
+              <a:t>Per-route per-day boardings</a:t>
+            </a:r>
+          </a:p>
+        </p:txBody>
+      </p:sp>
+      <p:sp>
+        <p:nvSpPr>
+          <p:cNvPr id="41" name="TextBox 40"/>
+          <p:cNvSpPr txBox="1"/>
+          <p:nvPr/>
+        </p:nvSpPr>
+        <p:spPr>
+          <a:xfrm>
+            <a:off x="5349240" y="3639312"/>
+            <a:ext cx="2834640" cy="438912"/>
+          </a:xfrm>
+          <a:prstGeom prst="rect">
+            <a:avLst/>
+          </a:prstGeom>
+          <a:noFill/>
+        </p:spPr>
+        <p:txBody>
+          <a:bodyPr wrap="square" lIns="45720" rIns="45720" tIns="18288" bIns="18288" anchor="ctr">
+            <a:spAutoFit/>
+          </a:bodyPr>
+          <a:lstStyle/>
+          <a:p>
+            <a:pPr algn="l"/>
+            <a:r>
+              <a:rPr sz="950" b="0" i="0">
+                <a:solidFill>
+                  <a:srgbClr val="212121"/>
+                </a:solidFill>
+                <a:latin typeface="Segoe UI"/>
+              </a:rPr>
+              <a:t>SSCL CHALO platform</a:t>
+            </a:r>
+          </a:p>
+        </p:txBody>
+      </p:sp>
+      <p:sp>
+        <p:nvSpPr>
+          <p:cNvPr id="42" name="TextBox 41"/>
+          <p:cNvSpPr txBox="1"/>
+          <p:nvPr/>
+        </p:nvSpPr>
+        <p:spPr>
+          <a:xfrm>
+            <a:off x="8321040" y="3639312"/>
+            <a:ext cx="3520440" cy="438912"/>
+          </a:xfrm>
+          <a:prstGeom prst="rect">
+            <a:avLst/>
+          </a:prstGeom>
+          <a:noFill/>
+        </p:spPr>
+        <p:txBody>
+          <a:bodyPr wrap="square" lIns="45720" rIns="45720" tIns="18288" bIns="18288" anchor="ctr">
+            <a:spAutoFit/>
+          </a:bodyPr>
+          <a:lstStyle/>
+          <a:p>
+            <a:pPr algn="l"/>
+            <a:r>
+              <a:rPr sz="950" b="0" i="0">
+                <a:solidFill>
+                  <a:srgbClr val="212121"/>
+                </a:solidFill>
+                <a:latin typeface="Segoe UI"/>
+              </a:rPr>
+              <a:t>Enables route-level demand &amp; Mohring elasticity.</a:t>
+            </a:r>
+          </a:p>
+        </p:txBody>
+      </p:sp>
+      <p:sp>
+        <p:nvSpPr>
+          <p:cNvPr id="43" name="Rounded Rectangle 42"/>
+          <p:cNvSpPr/>
+          <p:nvPr/>
+        </p:nvSpPr>
+        <p:spPr>
+          <a:xfrm>
+            <a:off x="502920" y="4206240"/>
+            <a:ext cx="594360" cy="256032"/>
+          </a:xfrm>
+          <a:prstGeom prst="roundRect">
+            <a:avLst>
+              <a:gd name="adj" fmla="val 12000"/>
+            </a:avLst>
+          </a:prstGeom>
+          <a:solidFill>
+            <a:srgbClr val="F9A825"/>
+          </a:solidFill>
+          <a:ln>
+            <a:noFill/>
+          </a:ln>
+        </p:spPr>
+        <p:style>
+          <a:lnRef idx="1">
+            <a:schemeClr val="accent1"/>
+          </a:lnRef>
+          <a:fillRef idx="3">
+            <a:schemeClr val="accent1"/>
+          </a:fillRef>
+          <a:effectRef idx="2">
+            <a:schemeClr val="accent1"/>
+          </a:effectRef>
+          <a:fontRef idx="minor">
+            <a:schemeClr val="lt1"/>
+          </a:fontRef>
+        </p:style>
+        <p:txBody>
+          <a:bodyPr rtlCol="0" anchor="ctr"/>
+          <a:lstStyle/>
+          <a:p>
+            <a:pPr algn="ctr"/>
+          </a:p>
+        </p:txBody>
+      </p:sp>
+      <p:sp>
+        <p:nvSpPr>
+          <p:cNvPr id="44" name="TextBox 43"/>
+          <p:cNvSpPr txBox="1"/>
+          <p:nvPr/>
+        </p:nvSpPr>
+        <p:spPr>
+          <a:xfrm>
+            <a:off x="502920" y="4206240"/>
+            <a:ext cx="594360" cy="256032"/>
+          </a:xfrm>
+          <a:prstGeom prst="rect">
+            <a:avLst/>
+          </a:prstGeom>
+          <a:noFill/>
+        </p:spPr>
+        <p:txBody>
+          <a:bodyPr wrap="square" lIns="45720" rIns="45720" tIns="18288" bIns="18288" anchor="ctr">
+            <a:spAutoFit/>
+          </a:bodyPr>
+          <a:lstStyle/>
+          <a:p>
+            <a:pPr algn="ctr"/>
+            <a:r>
+              <a:rPr sz="1000" b="1">
+                <a:solidFill>
+                  <a:srgbClr val="FFFFFF"/>
+                </a:solidFill>
+                <a:latin typeface="Segoe UI"/>
+              </a:rPr>
+              <a:t>P1</a:t>
+            </a:r>
+          </a:p>
+        </p:txBody>
+      </p:sp>
+      <p:sp>
+        <p:nvSpPr>
+          <p:cNvPr id="45" name="TextBox 44"/>
+          <p:cNvSpPr txBox="1"/>
+          <p:nvPr/>
+        </p:nvSpPr>
+        <p:spPr>
+          <a:xfrm>
+            <a:off x="1417320" y="4151376"/>
+            <a:ext cx="3794760" cy="219456"/>
+          </a:xfrm>
+          <a:prstGeom prst="rect">
+            <a:avLst/>
+          </a:prstGeom>
+          <a:noFill/>
+        </p:spPr>
+        <p:txBody>
+          <a:bodyPr wrap="square" lIns="45720" rIns="45720" tIns="18288" bIns="18288" anchor="t">
+            <a:spAutoFit/>
+          </a:bodyPr>
+          <a:lstStyle/>
+          <a:p>
+            <a:pPr algn="l"/>
+            <a:r>
+              <a:rPr sz="1000" b="1" i="0">
+                <a:solidFill>
+                  <a:srgbClr val="212121"/>
+                </a:solidFill>
+                <a:latin typeface="Segoe UI"/>
+              </a:rPr>
+              <a:t>JKTDC tourist arrival data</a:t>
+            </a:r>
+          </a:p>
+        </p:txBody>
+      </p:sp>
+      <p:sp>
+        <p:nvSpPr>
+          <p:cNvPr id="46" name="TextBox 45"/>
+          <p:cNvSpPr txBox="1"/>
+          <p:nvPr/>
+        </p:nvSpPr>
+        <p:spPr>
+          <a:xfrm>
+            <a:off x="1417320" y="4352544"/>
+            <a:ext cx="3794760" cy="201168"/>
+          </a:xfrm>
+          <a:prstGeom prst="rect">
+            <a:avLst/>
+          </a:prstGeom>
+          <a:noFill/>
+        </p:spPr>
+        <p:txBody>
+          <a:bodyPr wrap="square" lIns="45720" rIns="45720" tIns="18288" bIns="18288" anchor="t">
+            <a:spAutoFit/>
+          </a:bodyPr>
+          <a:lstStyle/>
+          <a:p>
+            <a:pPr algn="l"/>
+            <a:r>
+              <a:rPr sz="850" b="0" i="1">
+                <a:solidFill>
+                  <a:srgbClr val="757575"/>
+                </a:solidFill>
+                <a:latin typeface="Segoe UI"/>
+              </a:rPr>
+              <a:t>Daily arrivals · Gulmarg / Pahalgam / Sonamarg</a:t>
+            </a:r>
+          </a:p>
+        </p:txBody>
+      </p:sp>
+      <p:sp>
+        <p:nvSpPr>
+          <p:cNvPr id="47" name="TextBox 46"/>
+          <p:cNvSpPr txBox="1"/>
+          <p:nvPr/>
+        </p:nvSpPr>
+        <p:spPr>
+          <a:xfrm>
+            <a:off x="5349240" y="4114800"/>
+            <a:ext cx="2834640" cy="438912"/>
+          </a:xfrm>
+          <a:prstGeom prst="rect">
+            <a:avLst/>
+          </a:prstGeom>
+          <a:noFill/>
+        </p:spPr>
+        <p:txBody>
+          <a:bodyPr wrap="square" lIns="45720" rIns="45720" tIns="18288" bIns="18288" anchor="ctr">
+            <a:spAutoFit/>
+          </a:bodyPr>
+          <a:lstStyle/>
+          <a:p>
+            <a:pPr algn="l"/>
+            <a:r>
+              <a:rPr sz="950" b="0" i="0">
+                <a:solidFill>
+                  <a:srgbClr val="212121"/>
+                </a:solidFill>
+                <a:latin typeface="Segoe UI"/>
+              </a:rPr>
+              <a:t>J&amp;K Tourism Dept (JKTDC)</a:t>
+            </a:r>
+          </a:p>
+        </p:txBody>
+      </p:sp>
+      <p:sp>
+        <p:nvSpPr>
+          <p:cNvPr id="48" name="TextBox 47"/>
+          <p:cNvSpPr txBox="1"/>
+          <p:nvPr/>
+        </p:nvSpPr>
+        <p:spPr>
+          <a:xfrm>
+            <a:off x="8321040" y="4114800"/>
+            <a:ext cx="3520440" cy="438912"/>
+          </a:xfrm>
+          <a:prstGeom prst="rect">
+            <a:avLst/>
+          </a:prstGeom>
+          <a:noFill/>
+        </p:spPr>
+        <p:txBody>
+          <a:bodyPr wrap="square" lIns="45720" rIns="45720" tIns="18288" bIns="18288" anchor="ctr">
+            <a:spAutoFit/>
+          </a:bodyPr>
+          <a:lstStyle/>
+          <a:p>
+            <a:pPr algn="l"/>
+            <a:r>
+              <a:rPr sz="950" b="0" i="0">
+                <a:solidFill>
+                  <a:srgbClr val="212121"/>
+                </a:solidFill>
+                <a:latin typeface="Segoe UI"/>
+              </a:rPr>
+              <a:t>Real seasonal surge → tourist fleet sizing.</a:t>
+            </a:r>
+          </a:p>
+        </p:txBody>
+      </p:sp>
+      <p:sp>
+        <p:nvSpPr>
+          <p:cNvPr id="49" name="Rectangle 48"/>
+          <p:cNvSpPr/>
+          <p:nvPr/>
+        </p:nvSpPr>
+        <p:spPr>
+          <a:xfrm>
+            <a:off x="411480" y="4590288"/>
+            <a:ext cx="11475720" cy="438912"/>
+          </a:xfrm>
+          <a:prstGeom prst="rect">
+            <a:avLst/>
+          </a:prstGeom>
+          <a:solidFill>
+            <a:srgbClr val="F5F5F5"/>
+          </a:solidFill>
+          <a:ln>
+            <a:noFill/>
+          </a:ln>
+        </p:spPr>
+        <p:style>
+          <a:lnRef idx="1">
+            <a:schemeClr val="accent1"/>
+          </a:lnRef>
+          <a:fillRef idx="3">
+            <a:schemeClr val="accent1"/>
+          </a:fillRef>
+          <a:effectRef idx="2">
+            <a:schemeClr val="accent1"/>
+          </a:effectRef>
+          <a:fontRef idx="minor">
+            <a:schemeClr val="lt1"/>
+          </a:fontRef>
+        </p:style>
+        <p:txBody>
+          <a:bodyPr rtlCol="0" anchor="ctr"/>
+          <a:lstStyle/>
+          <a:p>
+            <a:pPr algn="ctr"/>
+          </a:p>
+        </p:txBody>
+      </p:sp>
+      <p:sp>
+        <p:nvSpPr>
+          <p:cNvPr id="50" name="Rounded Rectangle 49"/>
+          <p:cNvSpPr/>
+          <p:nvPr/>
+        </p:nvSpPr>
+        <p:spPr>
+          <a:xfrm>
+            <a:off x="502920" y="4681727"/>
+            <a:ext cx="594360" cy="256032"/>
+          </a:xfrm>
+          <a:prstGeom prst="roundRect">
+            <a:avLst>
+              <a:gd name="adj" fmla="val 12000"/>
+            </a:avLst>
+          </a:prstGeom>
+          <a:solidFill>
+            <a:srgbClr val="1A237E"/>
+          </a:solidFill>
+          <a:ln>
+            <a:noFill/>
+          </a:ln>
+        </p:spPr>
+        <p:style>
+          <a:lnRef idx="1">
+            <a:schemeClr val="accent1"/>
+          </a:lnRef>
+          <a:fillRef idx="3">
+            <a:schemeClr val="accent1"/>
+          </a:fillRef>
+          <a:effectRef idx="2">
+            <a:schemeClr val="accent1"/>
+          </a:effectRef>
+          <a:fontRef idx="minor">
+            <a:schemeClr val="lt1"/>
+          </a:fontRef>
+        </p:style>
+        <p:txBody>
+          <a:bodyPr rtlCol="0" anchor="ctr"/>
+          <a:lstStyle/>
+          <a:p>
+            <a:pPr algn="ctr"/>
+          </a:p>
+        </p:txBody>
+      </p:sp>
+      <p:sp>
+        <p:nvSpPr>
+          <p:cNvPr id="51" name="TextBox 50"/>
+          <p:cNvSpPr txBox="1"/>
+          <p:nvPr/>
+        </p:nvSpPr>
+        <p:spPr>
+          <a:xfrm>
+            <a:off x="502920" y="4681727"/>
+            <a:ext cx="594360" cy="256032"/>
+          </a:xfrm>
+          <a:prstGeom prst="rect">
+            <a:avLst/>
+          </a:prstGeom>
+          <a:noFill/>
+        </p:spPr>
+        <p:txBody>
+          <a:bodyPr wrap="square" lIns="45720" rIns="45720" tIns="18288" bIns="18288" anchor="ctr">
+            <a:spAutoFit/>
+          </a:bodyPr>
+          <a:lstStyle/>
+          <a:p>
+            <a:pPr algn="ctr"/>
+            <a:r>
+              <a:rPr sz="1000" b="1">
+                <a:solidFill>
+                  <a:srgbClr val="FFFFFF"/>
+                </a:solidFill>
+                <a:latin typeface="Segoe UI"/>
+              </a:rPr>
+              <a:t>P2</a:t>
+            </a:r>
+          </a:p>
+        </p:txBody>
+      </p:sp>
+      <p:sp>
+        <p:nvSpPr>
+          <p:cNvPr id="52" name="TextBox 51"/>
+          <p:cNvSpPr txBox="1"/>
+          <p:nvPr/>
+        </p:nvSpPr>
+        <p:spPr>
+          <a:xfrm>
+            <a:off x="1417320" y="4626864"/>
+            <a:ext cx="3794760" cy="219456"/>
+          </a:xfrm>
+          <a:prstGeom prst="rect">
+            <a:avLst/>
+          </a:prstGeom>
+          <a:noFill/>
+        </p:spPr>
+        <p:txBody>
+          <a:bodyPr wrap="square" lIns="45720" rIns="45720" tIns="18288" bIns="18288" anchor="t">
+            <a:spAutoFit/>
+          </a:bodyPr>
+          <a:lstStyle/>
+          <a:p>
+            <a:pPr algn="l"/>
+            <a:r>
+              <a:rPr sz="1000" b="1" i="0">
+                <a:solidFill>
+                  <a:srgbClr val="212121"/>
+                </a:solidFill>
+                <a:latin typeface="Segoe UI"/>
+              </a:rPr>
+              <a:t>Road operability calendar</a:t>
+            </a:r>
+          </a:p>
+        </p:txBody>
+      </p:sp>
+      <p:sp>
+        <p:nvSpPr>
+          <p:cNvPr id="53" name="TextBox 52"/>
+          <p:cNvSpPr txBox="1"/>
+          <p:nvPr/>
+        </p:nvSpPr>
+        <p:spPr>
+          <a:xfrm>
+            <a:off x="1417320" y="4828031"/>
+            <a:ext cx="3794760" cy="201168"/>
+          </a:xfrm>
+          <a:prstGeom prst="rect">
+            <a:avLst/>
+          </a:prstGeom>
+          <a:noFill/>
+        </p:spPr>
+        <p:txBody>
+          <a:bodyPr wrap="square" lIns="45720" rIns="45720" tIns="18288" bIns="18288" anchor="t">
+            <a:spAutoFit/>
+          </a:bodyPr>
+          <a:lstStyle/>
+          <a:p>
+            <a:pPr algn="l"/>
+            <a:r>
+              <a:rPr sz="850" b="0" i="1">
+                <a:solidFill>
+                  <a:srgbClr val="757575"/>
+                </a:solidFill>
+                <a:latin typeface="Segoe UI"/>
+              </a:rPr>
+              <a:t>NH-44 convoys · Sinthan / Z-Morh / Mughal Road dates</a:t>
+            </a:r>
+          </a:p>
+        </p:txBody>
+      </p:sp>
+      <p:sp>
+        <p:nvSpPr>
+          <p:cNvPr id="54" name="TextBox 53"/>
+          <p:cNvSpPr txBox="1"/>
+          <p:nvPr/>
+        </p:nvSpPr>
+        <p:spPr>
+          <a:xfrm>
+            <a:off x="5349240" y="4590288"/>
+            <a:ext cx="2834640" cy="438912"/>
+          </a:xfrm>
+          <a:prstGeom prst="rect">
+            <a:avLst/>
+          </a:prstGeom>
+          <a:noFill/>
+        </p:spPr>
+        <p:txBody>
+          <a:bodyPr wrap="square" lIns="45720" rIns="45720" tIns="18288" bIns="18288" anchor="ctr">
+            <a:spAutoFit/>
+          </a:bodyPr>
+          <a:lstStyle/>
+          <a:p>
+            <a:pPr algn="l"/>
+            <a:r>
+              <a:rPr sz="950" b="0" i="0">
+                <a:solidFill>
+                  <a:srgbClr val="212121"/>
+                </a:solidFill>
+                <a:latin typeface="Segoe UI"/>
+              </a:rPr>
+              <a:t>BRO · J&amp;K Traffic · Border Mgmt</a:t>
+            </a:r>
+          </a:p>
+        </p:txBody>
+      </p:sp>
+      <p:sp>
+        <p:nvSpPr>
+          <p:cNvPr id="55" name="TextBox 54"/>
+          <p:cNvSpPr txBox="1"/>
+          <p:nvPr/>
+        </p:nvSpPr>
+        <p:spPr>
+          <a:xfrm>
+            <a:off x="8321040" y="4590288"/>
+            <a:ext cx="3520440" cy="438912"/>
+          </a:xfrm>
+          <a:prstGeom prst="rect">
+            <a:avLst/>
+          </a:prstGeom>
+          <a:noFill/>
+        </p:spPr>
+        <p:txBody>
+          <a:bodyPr wrap="square" lIns="45720" rIns="45720" tIns="18288" bIns="18288" anchor="ctr">
+            <a:spAutoFit/>
+          </a:bodyPr>
+          <a:lstStyle/>
+          <a:p>
+            <a:pPr algn="l"/>
+            <a:r>
+              <a:rPr sz="950" b="0" i="0">
+                <a:solidFill>
+                  <a:srgbClr val="212121"/>
+                </a:solidFill>
+                <a:latin typeface="Segoe UI"/>
+              </a:rPr>
+              <a:t>Auto-flag Winter_Suspended; subtract un-operable hours.</a:t>
+            </a:r>
+          </a:p>
+        </p:txBody>
+      </p:sp>
+      <p:sp>
+        <p:nvSpPr>
+          <p:cNvPr id="56" name="Rounded Rectangle 55"/>
+          <p:cNvSpPr/>
+          <p:nvPr/>
+        </p:nvSpPr>
+        <p:spPr>
+          <a:xfrm>
+            <a:off x="502920" y="5157216"/>
+            <a:ext cx="594360" cy="256032"/>
+          </a:xfrm>
+          <a:prstGeom prst="roundRect">
+            <a:avLst>
+              <a:gd name="adj" fmla="val 12000"/>
+            </a:avLst>
+          </a:prstGeom>
+          <a:solidFill>
+            <a:srgbClr val="1A237E"/>
+          </a:solidFill>
+          <a:ln>
+            <a:noFill/>
+          </a:ln>
+        </p:spPr>
+        <p:style>
+          <a:lnRef idx="1">
+            <a:schemeClr val="accent1"/>
+          </a:lnRef>
+          <a:fillRef idx="3">
+            <a:schemeClr val="accent1"/>
+          </a:fillRef>
+          <a:effectRef idx="2">
+            <a:schemeClr val="accent1"/>
+          </a:effectRef>
+          <a:fontRef idx="minor">
+            <a:schemeClr val="lt1"/>
+          </a:fontRef>
+        </p:style>
+        <p:txBody>
+          <a:bodyPr rtlCol="0" anchor="ctr"/>
+          <a:lstStyle/>
+          <a:p>
+            <a:pPr algn="ctr"/>
+          </a:p>
+        </p:txBody>
+      </p:sp>
+      <p:sp>
+        <p:nvSpPr>
+          <p:cNvPr id="57" name="TextBox 56"/>
+          <p:cNvSpPr txBox="1"/>
+          <p:nvPr/>
+        </p:nvSpPr>
+        <p:spPr>
+          <a:xfrm>
+            <a:off x="502920" y="5157216"/>
+            <a:ext cx="594360" cy="256032"/>
+          </a:xfrm>
+          <a:prstGeom prst="rect">
+            <a:avLst/>
+          </a:prstGeom>
+          <a:noFill/>
+        </p:spPr>
+        <p:txBody>
+          <a:bodyPr wrap="square" lIns="45720" rIns="45720" tIns="18288" bIns="18288" anchor="ctr">
+            <a:spAutoFit/>
+          </a:bodyPr>
+          <a:lstStyle/>
+          <a:p>
+            <a:pPr algn="ctr"/>
+            <a:r>
+              <a:rPr sz="1000" b="1">
+                <a:solidFill>
+                  <a:srgbClr val="FFFFFF"/>
+                </a:solidFill>
+                <a:latin typeface="Segoe UI"/>
+              </a:rPr>
+              <a:t>P2</a:t>
+            </a:r>
+          </a:p>
+        </p:txBody>
+      </p:sp>
+      <p:sp>
+        <p:nvSpPr>
+          <p:cNvPr id="58" name="TextBox 57"/>
+          <p:cNvSpPr txBox="1"/>
+          <p:nvPr/>
+        </p:nvSpPr>
+        <p:spPr>
+          <a:xfrm>
+            <a:off x="1417320" y="5102352"/>
+            <a:ext cx="3794760" cy="219456"/>
+          </a:xfrm>
+          <a:prstGeom prst="rect">
+            <a:avLst/>
+          </a:prstGeom>
+          <a:noFill/>
+        </p:spPr>
+        <p:txBody>
+          <a:bodyPr wrap="square" lIns="45720" rIns="45720" tIns="18288" bIns="18288" anchor="t">
+            <a:spAutoFit/>
+          </a:bodyPr>
+          <a:lstStyle/>
+          <a:p>
+            <a:pPr algn="l"/>
+            <a:r>
+              <a:rPr sz="1000" b="1" i="0">
+                <a:solidFill>
+                  <a:srgbClr val="212121"/>
+                </a:solidFill>
+                <a:latin typeface="Segoe UI"/>
+              </a:rPr>
+              <a:t>Bus stop / depot inventory</a:t>
+            </a:r>
+          </a:p>
+        </p:txBody>
+      </p:sp>
+      <p:sp>
+        <p:nvSpPr>
+          <p:cNvPr id="59" name="TextBox 58"/>
+          <p:cNvSpPr txBox="1"/>
+          <p:nvPr/>
+        </p:nvSpPr>
+        <p:spPr>
+          <a:xfrm>
+            <a:off x="1417320" y="5303520"/>
+            <a:ext cx="3794760" cy="201168"/>
+          </a:xfrm>
+          <a:prstGeom prst="rect">
+            <a:avLst/>
+          </a:prstGeom>
+          <a:noFill/>
+        </p:spPr>
+        <p:txBody>
+          <a:bodyPr wrap="square" lIns="45720" rIns="45720" tIns="18288" bIns="18288" anchor="t">
+            <a:spAutoFit/>
+          </a:bodyPr>
+          <a:lstStyle/>
+          <a:p>
+            <a:pPr algn="l"/>
+            <a:r>
+              <a:rPr sz="850" b="0" i="1">
+                <a:solidFill>
+                  <a:srgbClr val="757575"/>
+                </a:solidFill>
+                <a:latin typeface="Segoe UI"/>
+              </a:rPr>
+              <a:t>Lat-lon of every stop · depot capacity</a:t>
+            </a:r>
+          </a:p>
+        </p:txBody>
+      </p:sp>
+      <p:sp>
+        <p:nvSpPr>
+          <p:cNvPr id="60" name="TextBox 59"/>
+          <p:cNvSpPr txBox="1"/>
+          <p:nvPr/>
+        </p:nvSpPr>
+        <p:spPr>
+          <a:xfrm>
+            <a:off x="5349240" y="5065776"/>
+            <a:ext cx="2834640" cy="438912"/>
+          </a:xfrm>
+          <a:prstGeom prst="rect">
+            <a:avLst/>
+          </a:prstGeom>
+          <a:noFill/>
+        </p:spPr>
+        <p:txBody>
+          <a:bodyPr wrap="square" lIns="45720" rIns="45720" tIns="18288" bIns="18288" anchor="ctr">
+            <a:spAutoFit/>
+          </a:bodyPr>
+          <a:lstStyle/>
+          <a:p>
+            <a:pPr algn="l"/>
+            <a:r>
+              <a:rPr sz="950" b="0" i="0">
+                <a:solidFill>
+                  <a:srgbClr val="212121"/>
+                </a:solidFill>
+                <a:latin typeface="Segoe UI"/>
+              </a:rPr>
+              <a:t>SSCL / JKRTC / RTO offices</a:t>
+            </a:r>
+          </a:p>
+        </p:txBody>
+      </p:sp>
+      <p:sp>
+        <p:nvSpPr>
+          <p:cNvPr id="61" name="TextBox 60"/>
+          <p:cNvSpPr txBox="1"/>
+          <p:nvPr/>
+        </p:nvSpPr>
+        <p:spPr>
+          <a:xfrm>
+            <a:off x="8321040" y="5065776"/>
+            <a:ext cx="3520440" cy="438912"/>
+          </a:xfrm>
+          <a:prstGeom prst="rect">
+            <a:avLst/>
+          </a:prstGeom>
+          <a:noFill/>
+        </p:spPr>
+        <p:txBody>
+          <a:bodyPr wrap="square" lIns="45720" rIns="45720" tIns="18288" bIns="18288" anchor="ctr">
+            <a:spAutoFit/>
+          </a:bodyPr>
+          <a:lstStyle/>
+          <a:p>
+            <a:pPr algn="l"/>
+            <a:r>
+              <a:rPr sz="950" b="0" i="0">
+                <a:solidFill>
+                  <a:srgbClr val="212121"/>
+                </a:solidFill>
+                <a:latin typeface="Segoe UI"/>
+              </a:rPr>
+              <a:t>Replaces virtual 500 m stop spacing.</a:t>
+            </a:r>
+          </a:p>
+        </p:txBody>
+      </p:sp>
+      <p:sp>
+        <p:nvSpPr>
+          <p:cNvPr id="62" name="Rectangle 61"/>
+          <p:cNvSpPr/>
+          <p:nvPr/>
+        </p:nvSpPr>
+        <p:spPr>
+          <a:xfrm>
+            <a:off x="411480" y="5541264"/>
+            <a:ext cx="11475720" cy="438912"/>
+          </a:xfrm>
+          <a:prstGeom prst="rect">
+            <a:avLst/>
+          </a:prstGeom>
+          <a:solidFill>
+            <a:srgbClr val="F5F5F5"/>
+          </a:solidFill>
+          <a:ln>
+            <a:noFill/>
+          </a:ln>
+        </p:spPr>
+        <p:style>
+          <a:lnRef idx="1">
+            <a:schemeClr val="accent1"/>
+          </a:lnRef>
+          <a:fillRef idx="3">
+            <a:schemeClr val="accent1"/>
+          </a:fillRef>
+          <a:effectRef idx="2">
+            <a:schemeClr val="accent1"/>
+          </a:effectRef>
+          <a:fontRef idx="minor">
+            <a:schemeClr val="lt1"/>
+          </a:fontRef>
+        </p:style>
+        <p:txBody>
+          <a:bodyPr rtlCol="0" anchor="ctr"/>
+          <a:lstStyle/>
+          <a:p>
+            <a:pPr algn="ctr"/>
+          </a:p>
+        </p:txBody>
+      </p:sp>
+      <p:sp>
+        <p:nvSpPr>
+          <p:cNvPr id="63" name="Rounded Rectangle 62"/>
+          <p:cNvSpPr/>
+          <p:nvPr/>
+        </p:nvSpPr>
+        <p:spPr>
+          <a:xfrm>
+            <a:off x="502920" y="5632704"/>
+            <a:ext cx="594360" cy="256032"/>
+          </a:xfrm>
+          <a:prstGeom prst="roundRect">
+            <a:avLst>
+              <a:gd name="adj" fmla="val 12000"/>
+            </a:avLst>
+          </a:prstGeom>
+          <a:solidFill>
+            <a:srgbClr val="1A237E"/>
+          </a:solidFill>
+          <a:ln>
+            <a:noFill/>
+          </a:ln>
+        </p:spPr>
+        <p:style>
+          <a:lnRef idx="1">
+            <a:schemeClr val="accent1"/>
+          </a:lnRef>
+          <a:fillRef idx="3">
+            <a:schemeClr val="accent1"/>
+          </a:fillRef>
+          <a:effectRef idx="2">
+            <a:schemeClr val="accent1"/>
+          </a:effectRef>
+          <a:fontRef idx="minor">
+            <a:schemeClr val="lt1"/>
+          </a:fontRef>
+        </p:style>
+        <p:txBody>
+          <a:bodyPr rtlCol="0" anchor="ctr"/>
+          <a:lstStyle/>
+          <a:p>
+            <a:pPr algn="ctr"/>
+          </a:p>
+        </p:txBody>
+      </p:sp>
+      <p:sp>
+        <p:nvSpPr>
+          <p:cNvPr id="64" name="TextBox 63"/>
+          <p:cNvSpPr txBox="1"/>
+          <p:nvPr/>
+        </p:nvSpPr>
+        <p:spPr>
+          <a:xfrm>
+            <a:off x="502920" y="5632704"/>
+            <a:ext cx="594360" cy="256032"/>
+          </a:xfrm>
+          <a:prstGeom prst="rect">
+            <a:avLst/>
+          </a:prstGeom>
+          <a:noFill/>
+        </p:spPr>
+        <p:txBody>
+          <a:bodyPr wrap="square" lIns="45720" rIns="45720" tIns="18288" bIns="18288" anchor="ctr">
+            <a:spAutoFit/>
+          </a:bodyPr>
+          <a:lstStyle/>
+          <a:p>
+            <a:pPr algn="ctr"/>
+            <a:r>
+              <a:rPr sz="1000" b="1">
+                <a:solidFill>
+                  <a:srgbClr val="FFFFFF"/>
+                </a:solidFill>
+                <a:latin typeface="Segoe UI"/>
+              </a:rPr>
+              <a:t>P2</a:t>
+            </a:r>
+          </a:p>
+        </p:txBody>
+      </p:sp>
+      <p:sp>
+        <p:nvSpPr>
+          <p:cNvPr id="65" name="TextBox 64"/>
+          <p:cNvSpPr txBox="1"/>
+          <p:nvPr/>
+        </p:nvSpPr>
+        <p:spPr>
+          <a:xfrm>
+            <a:off x="1417320" y="5577840"/>
+            <a:ext cx="3794760" cy="219456"/>
+          </a:xfrm>
+          <a:prstGeom prst="rect">
+            <a:avLst/>
+          </a:prstGeom>
+          <a:noFill/>
+        </p:spPr>
+        <p:txBody>
+          <a:bodyPr wrap="square" lIns="45720" rIns="45720" tIns="18288" bIns="18288" anchor="t">
+            <a:spAutoFit/>
+          </a:bodyPr>
+          <a:lstStyle/>
+          <a:p>
+            <a:pPr algn="l"/>
+            <a:r>
+              <a:rPr sz="1000" b="1" i="0">
+                <a:solidFill>
+                  <a:srgbClr val="212121"/>
+                </a:solidFill>
+                <a:latin typeface="Segoe UI"/>
+              </a:rPr>
+              <a:t>Bridge load / road-width registry</a:t>
+            </a:r>
+          </a:p>
+        </p:txBody>
+      </p:sp>
+      <p:sp>
+        <p:nvSpPr>
+          <p:cNvPr id="66" name="TextBox 65"/>
+          <p:cNvSpPr txBox="1"/>
+          <p:nvPr/>
+        </p:nvSpPr>
+        <p:spPr>
+          <a:xfrm>
+            <a:off x="1417320" y="5779008"/>
+            <a:ext cx="3794760" cy="201168"/>
+          </a:xfrm>
+          <a:prstGeom prst="rect">
+            <a:avLst/>
+          </a:prstGeom>
+          <a:noFill/>
+        </p:spPr>
+        <p:txBody>
+          <a:bodyPr wrap="square" lIns="45720" rIns="45720" tIns="18288" bIns="18288" anchor="t">
+            <a:spAutoFit/>
+          </a:bodyPr>
+          <a:lstStyle/>
+          <a:p>
+            <a:pPr algn="l"/>
+            <a:r>
+              <a:rPr sz="850" b="0" i="1">
+                <a:solidFill>
+                  <a:srgbClr val="757575"/>
+                </a:solidFill>
+                <a:latin typeface="Segoe UI"/>
+              </a:rPr>
+              <a:t>Per-bridge weight limit · arterial road widths</a:t>
+            </a:r>
+          </a:p>
+        </p:txBody>
+      </p:sp>
+      <p:sp>
+        <p:nvSpPr>
+          <p:cNvPr id="67" name="TextBox 66"/>
+          <p:cNvSpPr txBox="1"/>
+          <p:nvPr/>
+        </p:nvSpPr>
+        <p:spPr>
+          <a:xfrm>
+            <a:off x="5349240" y="5541264"/>
+            <a:ext cx="2834640" cy="438912"/>
+          </a:xfrm>
+          <a:prstGeom prst="rect">
+            <a:avLst/>
+          </a:prstGeom>
+          <a:noFill/>
+        </p:spPr>
+        <p:txBody>
+          <a:bodyPr wrap="square" lIns="45720" rIns="45720" tIns="18288" bIns="18288" anchor="ctr">
+            <a:spAutoFit/>
+          </a:bodyPr>
+          <a:lstStyle/>
+          <a:p>
+            <a:pPr algn="l"/>
+            <a:r>
+              <a:rPr sz="950" b="0" i="0">
+                <a:solidFill>
+                  <a:srgbClr val="212121"/>
+                </a:solidFill>
+                <a:latin typeface="Segoe UI"/>
+              </a:rPr>
+              <a:t>R&amp;B Dept · MC Srinagar</a:t>
+            </a:r>
+          </a:p>
+        </p:txBody>
+      </p:sp>
+      <p:sp>
+        <p:nvSpPr>
+          <p:cNvPr id="68" name="TextBox 67"/>
+          <p:cNvSpPr txBox="1"/>
+          <p:nvPr/>
+        </p:nvSpPr>
+        <p:spPr>
+          <a:xfrm>
+            <a:off x="8321040" y="5541264"/>
+            <a:ext cx="3520440" cy="438912"/>
+          </a:xfrm>
+          <a:prstGeom prst="rect">
+            <a:avLst/>
+          </a:prstGeom>
+          <a:noFill/>
+        </p:spPr>
+        <p:txBody>
+          <a:bodyPr wrap="square" lIns="45720" rIns="45720" tIns="18288" bIns="18288" anchor="ctr">
+            <a:spAutoFit/>
+          </a:bodyPr>
+          <a:lstStyle/>
+          <a:p>
+            <a:pPr algn="l"/>
+            <a:r>
+              <a:rPr sz="950" b="0" i="0">
+                <a:solidFill>
+                  <a:srgbClr val="212121"/>
+                </a:solidFill>
+                <a:latin typeface="Segoe UI"/>
+              </a:rPr>
+              <a:t>Restricts 12 m HPV to roads/bridges that can take it.</a:t>
+            </a:r>
+          </a:p>
+        </p:txBody>
+      </p:sp>
+      <p:sp>
+        <p:nvSpPr>
+          <p:cNvPr id="69" name="TextBox 68"/>
+          <p:cNvSpPr txBox="1"/>
+          <p:nvPr/>
+        </p:nvSpPr>
+        <p:spPr>
+          <a:xfrm>
+            <a:off x="502920" y="6181344"/>
+            <a:ext cx="1280160" cy="228600"/>
+          </a:xfrm>
+          <a:prstGeom prst="rect">
+            <a:avLst/>
+          </a:prstGeom>
+          <a:noFill/>
+        </p:spPr>
+        <p:txBody>
+          <a:bodyPr wrap="square" lIns="45720" rIns="45720" tIns="18288" bIns="18288" anchor="t">
+            <a:spAutoFit/>
+          </a:bodyPr>
+          <a:lstStyle/>
+          <a:p>
+            <a:pPr algn="l"/>
+            <a:r>
+              <a:rPr sz="1000" b="1" i="0">
+                <a:solidFill>
+                  <a:srgbClr val="757575"/>
+                </a:solidFill>
+                <a:latin typeface="Segoe UI"/>
+              </a:rPr>
+              <a:t>Priority key:</a:t>
+            </a:r>
+          </a:p>
+        </p:txBody>
+      </p:sp>
+      <p:sp>
+        <p:nvSpPr>
+          <p:cNvPr id="70" name="Rounded Rectangle 69"/>
+          <p:cNvSpPr/>
+          <p:nvPr/>
+        </p:nvSpPr>
+        <p:spPr>
+          <a:xfrm>
+            <a:off x="1783080" y="6199631"/>
+            <a:ext cx="365760" cy="201168"/>
+          </a:xfrm>
+          <a:prstGeom prst="roundRect">
+            <a:avLst>
+              <a:gd name="adj" fmla="val 12000"/>
+            </a:avLst>
           </a:prstGeom>
           <a:solidFill>
             <a:srgbClr val="D32F2F"/>
@@ -8712,14 +10120,14 @@
       </p:sp>
       <p:sp>
         <p:nvSpPr>
-          <p:cNvPr id="32" name="TextBox 31"/>
-          <p:cNvSpPr txBox="1"/>
-          <p:nvPr/>
-        </p:nvSpPr>
-        <p:spPr>
-          <a:xfrm>
-            <a:off x="6583680" y="4087368"/>
-            <a:ext cx="320040" cy="320040"/>
+          <p:cNvPr id="71" name="TextBox 70"/>
+          <p:cNvSpPr txBox="1"/>
+          <p:nvPr/>
+        </p:nvSpPr>
+        <p:spPr>
+          <a:xfrm>
+            <a:off x="1783080" y="6199631"/>
+            <a:ext cx="365760" cy="201168"/>
           </a:xfrm>
           <a:prstGeom prst="rect">
             <a:avLst/>
@@ -8734,68 +10142,70 @@
           <a:p>
             <a:pPr algn="ctr"/>
             <a:r>
-              <a:rPr sz="1400" b="1">
+              <a:rPr sz="800" b="1">
                 <a:solidFill>
                   <a:srgbClr val="FFFFFF"/>
                 </a:solidFill>
                 <a:latin typeface="Segoe UI"/>
               </a:rPr>
-              <a:t>✗</a:t>
-            </a:r>
-          </a:p>
-        </p:txBody>
-      </p:sp>
-      <p:sp>
-        <p:nvSpPr>
-          <p:cNvPr id="33" name="TextBox 32"/>
-          <p:cNvSpPr txBox="1"/>
-          <p:nvPr/>
-        </p:nvSpPr>
-        <p:spPr>
-          <a:xfrm>
-            <a:off x="7040880" y="4023360"/>
-            <a:ext cx="4754880" cy="731520"/>
-          </a:xfrm>
-          <a:prstGeom prst="rect">
-            <a:avLst/>
-          </a:prstGeom>
-          <a:noFill/>
-        </p:spPr>
-        <p:txBody>
-          <a:bodyPr wrap="square" lIns="45720" rIns="45720" tIns="18288" bIns="18288" anchor="ctr">
+              <a:t>P0</a:t>
+            </a:r>
+          </a:p>
+        </p:txBody>
+      </p:sp>
+      <p:sp>
+        <p:nvSpPr>
+          <p:cNvPr id="72" name="TextBox 71"/>
+          <p:cNvSpPr txBox="1"/>
+          <p:nvPr/>
+        </p:nvSpPr>
+        <p:spPr>
+          <a:xfrm>
+            <a:off x="2240280" y="6181344"/>
+            <a:ext cx="3017520" cy="228600"/>
+          </a:xfrm>
+          <a:prstGeom prst="rect">
+            <a:avLst/>
+          </a:prstGeom>
+          <a:noFill/>
+        </p:spPr>
+        <p:txBody>
+          <a:bodyPr wrap="square" lIns="45720" rIns="45720" tIns="18288" bIns="18288" anchor="t">
             <a:spAutoFit/>
           </a:bodyPr>
           <a:lstStyle/>
           <a:p>
             <a:pPr algn="l"/>
             <a:r>
-              <a:rPr sz="1200" b="0" i="0">
+              <a:rPr sz="950" b="0" i="1">
                 <a:solidFill>
                   <a:srgbClr val="212121"/>
                 </a:solidFill>
                 <a:latin typeface="Segoe UI"/>
               </a:rPr>
-              <a:t>Final headway commitments — RTO consultation still pending</a:t>
-            </a:r>
-          </a:p>
-        </p:txBody>
-      </p:sp>
-      <p:sp>
-        <p:nvSpPr>
-          <p:cNvPr id="34" name="Oval 33"/>
+              <a:t>blocks v3.4 calibration</a:t>
+            </a:r>
+          </a:p>
+        </p:txBody>
+      </p:sp>
+      <p:sp>
+        <p:nvSpPr>
+          <p:cNvPr id="73" name="Rounded Rectangle 72"/>
           <p:cNvSpPr/>
           <p:nvPr/>
         </p:nvSpPr>
         <p:spPr>
           <a:xfrm>
-            <a:off x="6583680" y="4864608"/>
-            <a:ext cx="320040" cy="320040"/>
-          </a:xfrm>
-          <a:prstGeom prst="ellipse">
-            <a:avLst/>
+            <a:off x="4983480" y="6199631"/>
+            <a:ext cx="365760" cy="201168"/>
+          </a:xfrm>
+          <a:prstGeom prst="roundRect">
+            <a:avLst>
+              <a:gd name="adj" fmla="val 12000"/>
+            </a:avLst>
           </a:prstGeom>
           <a:solidFill>
-            <a:srgbClr val="D32F2F"/>
+            <a:srgbClr val="F9A825"/>
           </a:solidFill>
           <a:ln>
             <a:noFill/>
@@ -8825,14 +10235,14 @@
       </p:sp>
       <p:sp>
         <p:nvSpPr>
-          <p:cNvPr id="35" name="TextBox 34"/>
-          <p:cNvSpPr txBox="1"/>
-          <p:nvPr/>
-        </p:nvSpPr>
-        <p:spPr>
-          <a:xfrm>
-            <a:off x="6583680" y="4864608"/>
-            <a:ext cx="320040" cy="320040"/>
+          <p:cNvPr id="74" name="TextBox 73"/>
+          <p:cNvSpPr txBox="1"/>
+          <p:nvPr/>
+        </p:nvSpPr>
+        <p:spPr>
+          <a:xfrm>
+            <a:off x="4983480" y="6199631"/>
+            <a:ext cx="365760" cy="201168"/>
           </a:xfrm>
           <a:prstGeom prst="rect">
             <a:avLst/>
@@ -8847,68 +10257,70 @@
           <a:p>
             <a:pPr algn="ctr"/>
             <a:r>
-              <a:rPr sz="1400" b="1">
+              <a:rPr sz="800" b="1">
                 <a:solidFill>
                   <a:srgbClr val="FFFFFF"/>
                 </a:solidFill>
                 <a:latin typeface="Segoe UI"/>
               </a:rPr>
-              <a:t>✗</a:t>
-            </a:r>
-          </a:p>
-        </p:txBody>
-      </p:sp>
-      <p:sp>
-        <p:nvSpPr>
-          <p:cNvPr id="36" name="TextBox 35"/>
-          <p:cNvSpPr txBox="1"/>
-          <p:nvPr/>
-        </p:nvSpPr>
-        <p:spPr>
-          <a:xfrm>
-            <a:off x="7040880" y="4800600"/>
-            <a:ext cx="4754880" cy="731520"/>
-          </a:xfrm>
-          <a:prstGeom prst="rect">
-            <a:avLst/>
-          </a:prstGeom>
-          <a:noFill/>
-        </p:spPr>
-        <p:txBody>
-          <a:bodyPr wrap="square" lIns="45720" rIns="45720" tIns="18288" bIns="18288" anchor="ctr">
+              <a:t>P1</a:t>
+            </a:r>
+          </a:p>
+        </p:txBody>
+      </p:sp>
+      <p:sp>
+        <p:nvSpPr>
+          <p:cNvPr id="75" name="TextBox 74"/>
+          <p:cNvSpPr txBox="1"/>
+          <p:nvPr/>
+        </p:nvSpPr>
+        <p:spPr>
+          <a:xfrm>
+            <a:off x="5440680" y="6181344"/>
+            <a:ext cx="3017520" cy="228600"/>
+          </a:xfrm>
+          <a:prstGeom prst="rect">
+            <a:avLst/>
+          </a:prstGeom>
+          <a:noFill/>
+        </p:spPr>
+        <p:txBody>
+          <a:bodyPr wrap="square" lIns="45720" rIns="45720" tIns="18288" bIns="18288" anchor="t">
             <a:spAutoFit/>
           </a:bodyPr>
           <a:lstStyle/>
           <a:p>
             <a:pPr algn="l"/>
             <a:r>
-              <a:rPr sz="1200" b="0" i="0">
+              <a:rPr sz="950" b="0" i="1">
                 <a:solidFill>
                   <a:srgbClr val="212121"/>
                 </a:solidFill>
                 <a:latin typeface="Segoe UI"/>
               </a:rPr>
-              <a:t>A buyback price commitment — figures are estimates per peer cities</a:t>
-            </a:r>
-          </a:p>
-        </p:txBody>
-      </p:sp>
-      <p:sp>
-        <p:nvSpPr>
-          <p:cNvPr id="37" name="Oval 36"/>
+              <a:t>improves accuracy meaningfully</a:t>
+            </a:r>
+          </a:p>
+        </p:txBody>
+      </p:sp>
+      <p:sp>
+        <p:nvSpPr>
+          <p:cNvPr id="76" name="Rounded Rectangle 75"/>
           <p:cNvSpPr/>
           <p:nvPr/>
         </p:nvSpPr>
         <p:spPr>
           <a:xfrm>
-            <a:off x="6583680" y="5641848"/>
-            <a:ext cx="320040" cy="320040"/>
-          </a:xfrm>
-          <a:prstGeom prst="ellipse">
-            <a:avLst/>
+            <a:off x="8183879" y="6199631"/>
+            <a:ext cx="365760" cy="201168"/>
+          </a:xfrm>
+          <a:prstGeom prst="roundRect">
+            <a:avLst>
+              <a:gd name="adj" fmla="val 12000"/>
+            </a:avLst>
           </a:prstGeom>
           <a:solidFill>
-            <a:srgbClr val="D32F2F"/>
+            <a:srgbClr val="1A237E"/>
           </a:solidFill>
           <a:ln>
             <a:noFill/>
@@ -8938,14 +10350,14 @@
       </p:sp>
       <p:sp>
         <p:nvSpPr>
-          <p:cNvPr id="38" name="TextBox 37"/>
-          <p:cNvSpPr txBox="1"/>
-          <p:nvPr/>
-        </p:nvSpPr>
-        <p:spPr>
-          <a:xfrm>
-            <a:off x="6583680" y="5641848"/>
-            <a:ext cx="320040" cy="320040"/>
+          <p:cNvPr id="77" name="TextBox 76"/>
+          <p:cNvSpPr txBox="1"/>
+          <p:nvPr/>
+        </p:nvSpPr>
+        <p:spPr>
+          <a:xfrm>
+            <a:off x="8183879" y="6199631"/>
+            <a:ext cx="365760" cy="201168"/>
           </a:xfrm>
           <a:prstGeom prst="rect">
             <a:avLst/>
@@ -8960,55 +10372,55 @@
           <a:p>
             <a:pPr algn="ctr"/>
             <a:r>
-              <a:rPr sz="1400" b="1">
+              <a:rPr sz="800" b="1">
                 <a:solidFill>
                   <a:srgbClr val="FFFFFF"/>
                 </a:solidFill>
                 <a:latin typeface="Segoe UI"/>
               </a:rPr>
-              <a:t>✗</a:t>
-            </a:r>
-          </a:p>
-        </p:txBody>
-      </p:sp>
-      <p:sp>
-        <p:nvSpPr>
-          <p:cNvPr id="39" name="TextBox 38"/>
-          <p:cNvSpPr txBox="1"/>
-          <p:nvPr/>
-        </p:nvSpPr>
-        <p:spPr>
-          <a:xfrm>
-            <a:off x="7040880" y="5577840"/>
-            <a:ext cx="4754880" cy="731520"/>
-          </a:xfrm>
-          <a:prstGeom prst="rect">
-            <a:avLst/>
-          </a:prstGeom>
-          <a:noFill/>
-        </p:spPr>
-        <p:txBody>
-          <a:bodyPr wrap="square" lIns="45720" rIns="45720" tIns="18288" bIns="18288" anchor="ctr">
+              <a:t>P2</a:t>
+            </a:r>
+          </a:p>
+        </p:txBody>
+      </p:sp>
+      <p:sp>
+        <p:nvSpPr>
+          <p:cNvPr id="78" name="TextBox 77"/>
+          <p:cNvSpPr txBox="1"/>
+          <p:nvPr/>
+        </p:nvSpPr>
+        <p:spPr>
+          <a:xfrm>
+            <a:off x="8641080" y="6181344"/>
+            <a:ext cx="3017520" cy="228600"/>
+          </a:xfrm>
+          <a:prstGeom prst="rect">
+            <a:avLst/>
+          </a:prstGeom>
+          <a:noFill/>
+        </p:spPr>
+        <p:txBody>
+          <a:bodyPr wrap="square" lIns="45720" rIns="45720" tIns="18288" bIns="18288" anchor="t">
             <a:spAutoFit/>
           </a:bodyPr>
           <a:lstStyle/>
           <a:p>
             <a:pPr algn="l"/>
             <a:r>
-              <a:rPr sz="1200" b="0" i="0">
+              <a:rPr sz="950" b="0" i="1">
                 <a:solidFill>
                   <a:srgbClr val="212121"/>
                 </a:solidFill>
                 <a:latin typeface="Segoe UI"/>
               </a:rPr>
-              <a:t>Tourist demand model — surge data is Phase 2 work</a:t>
-            </a:r>
-          </a:p>
-        </p:txBody>
-      </p:sp>
-      <p:sp>
-        <p:nvSpPr>
-          <p:cNvPr id="40" name="TextBox 39"/>
+              <a:t>future-state polish</a:t>
+            </a:r>
+          </a:p>
+        </p:txBody>
+      </p:sp>
+      <p:sp>
+        <p:nvSpPr>
+          <p:cNvPr id="79" name="TextBox 78"/>
           <p:cNvSpPr txBox="1"/>
           <p:nvPr/>
         </p:nvSpPr>
@@ -9036,7 +10448,7 @@
                 </a:solidFill>
                 <a:latin typeface="Segoe UI"/>
               </a:rPr>
-              <a:t>Slide 12  ·  Honest scope</a:t>
+              <a:t>Slide 12  ·  Data we need from your office</a:t>
             </a:r>
           </a:p>
         </p:txBody>
@@ -9068,6 +10480,1521 @@
         <p:spPr>
           <a:xfrm>
             <a:off x="0" y="0"/>
+            <a:ext cx="164592" cy="6858000"/>
+          </a:xfrm>
+          <a:prstGeom prst="rect">
+            <a:avLst/>
+          </a:prstGeom>
+          <a:solidFill>
+            <a:srgbClr val="1A237E"/>
+          </a:solidFill>
+          <a:ln>
+            <a:noFill/>
+          </a:ln>
+        </p:spPr>
+        <p:style>
+          <a:lnRef idx="1">
+            <a:schemeClr val="accent1"/>
+          </a:lnRef>
+          <a:fillRef idx="3">
+            <a:schemeClr val="accent1"/>
+          </a:fillRef>
+          <a:effectRef idx="2">
+            <a:schemeClr val="accent1"/>
+          </a:effectRef>
+          <a:fontRef idx="minor">
+            <a:schemeClr val="lt1"/>
+          </a:fontRef>
+        </p:style>
+        <p:txBody>
+          <a:bodyPr rtlCol="0" anchor="ctr"/>
+          <a:lstStyle/>
+          <a:p>
+            <a:pPr algn="ctr"/>
+          </a:p>
+        </p:txBody>
+      </p:sp>
+      <p:sp>
+        <p:nvSpPr>
+          <p:cNvPr id="3" name="TextBox 2"/>
+          <p:cNvSpPr txBox="1"/>
+          <p:nvPr/>
+        </p:nvSpPr>
+        <p:spPr>
+          <a:xfrm>
+            <a:off x="457200" y="320040"/>
+            <a:ext cx="11247120" cy="640080"/>
+          </a:xfrm>
+          <a:prstGeom prst="rect">
+            <a:avLst/>
+          </a:prstGeom>
+          <a:noFill/>
+        </p:spPr>
+        <p:txBody>
+          <a:bodyPr wrap="square" lIns="45720" rIns="45720" tIns="18288" bIns="18288" anchor="t">
+            <a:spAutoFit/>
+          </a:bodyPr>
+          <a:lstStyle/>
+          <a:p>
+            <a:pPr algn="l"/>
+            <a:r>
+              <a:rPr sz="2800" b="1" i="0">
+                <a:solidFill>
+                  <a:srgbClr val="1A237E"/>
+                </a:solidFill>
+                <a:latin typeface="Calibri"/>
+              </a:rPr>
+              <a:t>What this output is — and what it is not</a:t>
+            </a:r>
+          </a:p>
+        </p:txBody>
+      </p:sp>
+      <p:sp>
+        <p:nvSpPr>
+          <p:cNvPr id="4" name="Rounded Rectangle 3"/>
+          <p:cNvSpPr/>
+          <p:nvPr/>
+        </p:nvSpPr>
+        <p:spPr>
+          <a:xfrm>
+            <a:off x="548640" y="1691640"/>
+            <a:ext cx="5577840" cy="4572000"/>
+          </a:xfrm>
+          <a:prstGeom prst="roundRect">
+            <a:avLst>
+              <a:gd name="adj" fmla="val 12000"/>
+            </a:avLst>
+          </a:prstGeom>
+          <a:solidFill>
+            <a:srgbClr val="E8F5E9"/>
+          </a:solidFill>
+          <a:ln w="9525">
+            <a:solidFill>
+              <a:srgbClr val="2E7D32"/>
+            </a:solidFill>
+          </a:ln>
+        </p:spPr>
+        <p:style>
+          <a:lnRef idx="1">
+            <a:schemeClr val="accent1"/>
+          </a:lnRef>
+          <a:fillRef idx="3">
+            <a:schemeClr val="accent1"/>
+          </a:fillRef>
+          <a:effectRef idx="2">
+            <a:schemeClr val="accent1"/>
+          </a:effectRef>
+          <a:fontRef idx="minor">
+            <a:schemeClr val="lt1"/>
+          </a:fontRef>
+        </p:style>
+        <p:txBody>
+          <a:bodyPr rtlCol="0" anchor="ctr"/>
+          <a:lstStyle/>
+          <a:p>
+            <a:pPr algn="ctr"/>
+          </a:p>
+        </p:txBody>
+      </p:sp>
+      <p:sp>
+        <p:nvSpPr>
+          <p:cNvPr id="5" name="Rounded Rectangle 4"/>
+          <p:cNvSpPr/>
+          <p:nvPr/>
+        </p:nvSpPr>
+        <p:spPr>
+          <a:xfrm>
+            <a:off x="548640" y="1691640"/>
+            <a:ext cx="5577840" cy="548640"/>
+          </a:xfrm>
+          <a:prstGeom prst="roundRect">
+            <a:avLst>
+              <a:gd name="adj" fmla="val 12000"/>
+            </a:avLst>
+          </a:prstGeom>
+          <a:solidFill>
+            <a:srgbClr val="2E7D32"/>
+          </a:solidFill>
+          <a:ln>
+            <a:noFill/>
+          </a:ln>
+        </p:spPr>
+        <p:style>
+          <a:lnRef idx="1">
+            <a:schemeClr val="accent1"/>
+          </a:lnRef>
+          <a:fillRef idx="3">
+            <a:schemeClr val="accent1"/>
+          </a:fillRef>
+          <a:effectRef idx="2">
+            <a:schemeClr val="accent1"/>
+          </a:effectRef>
+          <a:fontRef idx="minor">
+            <a:schemeClr val="lt1"/>
+          </a:fontRef>
+        </p:style>
+        <p:txBody>
+          <a:bodyPr rtlCol="0" anchor="ctr"/>
+          <a:lstStyle/>
+          <a:p>
+            <a:pPr algn="ctr"/>
+          </a:p>
+        </p:txBody>
+      </p:sp>
+      <p:sp>
+        <p:nvSpPr>
+          <p:cNvPr id="6" name="TextBox 5"/>
+          <p:cNvSpPr txBox="1"/>
+          <p:nvPr/>
+        </p:nvSpPr>
+        <p:spPr>
+          <a:xfrm>
+            <a:off x="548640" y="1691640"/>
+            <a:ext cx="5577840" cy="548640"/>
+          </a:xfrm>
+          <a:prstGeom prst="rect">
+            <a:avLst/>
+          </a:prstGeom>
+          <a:noFill/>
+        </p:spPr>
+        <p:txBody>
+          <a:bodyPr wrap="square" lIns="45720" rIns="45720" tIns="18288" bIns="18288" anchor="ctr">
+            <a:spAutoFit/>
+          </a:bodyPr>
+          <a:lstStyle/>
+          <a:p>
+            <a:pPr algn="ctr"/>
+            <a:r>
+              <a:rPr sz="1600" b="1">
+                <a:solidFill>
+                  <a:srgbClr val="FFFFFF"/>
+                </a:solidFill>
+                <a:latin typeface="Segoe UI"/>
+              </a:rPr>
+              <a:t>WHAT IT IS</a:t>
+            </a:r>
+          </a:p>
+        </p:txBody>
+      </p:sp>
+      <p:sp>
+        <p:nvSpPr>
+          <p:cNvPr id="7" name="Oval 6"/>
+          <p:cNvSpPr/>
+          <p:nvPr/>
+        </p:nvSpPr>
+        <p:spPr>
+          <a:xfrm>
+            <a:off x="777240" y="2532888"/>
+            <a:ext cx="320040" cy="320040"/>
+          </a:xfrm>
+          <a:prstGeom prst="ellipse">
+            <a:avLst/>
+          </a:prstGeom>
+          <a:solidFill>
+            <a:srgbClr val="2E7D32"/>
+          </a:solidFill>
+          <a:ln>
+            <a:noFill/>
+          </a:ln>
+        </p:spPr>
+        <p:style>
+          <a:lnRef idx="1">
+            <a:schemeClr val="accent1"/>
+          </a:lnRef>
+          <a:fillRef idx="3">
+            <a:schemeClr val="accent1"/>
+          </a:fillRef>
+          <a:effectRef idx="2">
+            <a:schemeClr val="accent1"/>
+          </a:effectRef>
+          <a:fontRef idx="minor">
+            <a:schemeClr val="lt1"/>
+          </a:fontRef>
+        </p:style>
+        <p:txBody>
+          <a:bodyPr rtlCol="0" anchor="ctr"/>
+          <a:lstStyle/>
+          <a:p>
+            <a:pPr algn="ctr"/>
+          </a:p>
+        </p:txBody>
+      </p:sp>
+      <p:sp>
+        <p:nvSpPr>
+          <p:cNvPr id="8" name="TextBox 7"/>
+          <p:cNvSpPr txBox="1"/>
+          <p:nvPr/>
+        </p:nvSpPr>
+        <p:spPr>
+          <a:xfrm>
+            <a:off x="777240" y="2532888"/>
+            <a:ext cx="320040" cy="320040"/>
+          </a:xfrm>
+          <a:prstGeom prst="rect">
+            <a:avLst/>
+          </a:prstGeom>
+          <a:noFill/>
+        </p:spPr>
+        <p:txBody>
+          <a:bodyPr wrap="square" lIns="45720" rIns="45720" tIns="18288" bIns="18288" anchor="ctr">
+            <a:spAutoFit/>
+          </a:bodyPr>
+          <a:lstStyle/>
+          <a:p>
+            <a:pPr algn="ctr"/>
+            <a:r>
+              <a:rPr sz="1400" b="1">
+                <a:solidFill>
+                  <a:srgbClr val="FFFFFF"/>
+                </a:solidFill>
+                <a:latin typeface="Segoe UI"/>
+              </a:rPr>
+              <a:t>✓</a:t>
+            </a:r>
+          </a:p>
+        </p:txBody>
+      </p:sp>
+      <p:sp>
+        <p:nvSpPr>
+          <p:cNvPr id="9" name="TextBox 8"/>
+          <p:cNvSpPr txBox="1"/>
+          <p:nvPr/>
+        </p:nvSpPr>
+        <p:spPr>
+          <a:xfrm>
+            <a:off x="1234440" y="2468880"/>
+            <a:ext cx="4754880" cy="731520"/>
+          </a:xfrm>
+          <a:prstGeom prst="rect">
+            <a:avLst/>
+          </a:prstGeom>
+          <a:noFill/>
+        </p:spPr>
+        <p:txBody>
+          <a:bodyPr wrap="square" lIns="45720" rIns="45720" tIns="18288" bIns="18288" anchor="ctr">
+            <a:spAutoFit/>
+          </a:bodyPr>
+          <a:lstStyle/>
+          <a:p>
+            <a:pPr algn="l"/>
+            <a:r>
+              <a:rPr sz="1200" b="0" i="0">
+                <a:solidFill>
+                  <a:srgbClr val="212121"/>
+                </a:solidFill>
+                <a:latin typeface="Segoe UI"/>
+              </a:rPr>
+              <a:t>207 active routes classified with HP / MP / LP bands</a:t>
+            </a:r>
+          </a:p>
+        </p:txBody>
+      </p:sp>
+      <p:sp>
+        <p:nvSpPr>
+          <p:cNvPr id="10" name="Oval 9"/>
+          <p:cNvSpPr/>
+          <p:nvPr/>
+        </p:nvSpPr>
+        <p:spPr>
+          <a:xfrm>
+            <a:off x="777240" y="3310128"/>
+            <a:ext cx="320040" cy="320040"/>
+          </a:xfrm>
+          <a:prstGeom prst="ellipse">
+            <a:avLst/>
+          </a:prstGeom>
+          <a:solidFill>
+            <a:srgbClr val="2E7D32"/>
+          </a:solidFill>
+          <a:ln>
+            <a:noFill/>
+          </a:ln>
+        </p:spPr>
+        <p:style>
+          <a:lnRef idx="1">
+            <a:schemeClr val="accent1"/>
+          </a:lnRef>
+          <a:fillRef idx="3">
+            <a:schemeClr val="accent1"/>
+          </a:fillRef>
+          <a:effectRef idx="2">
+            <a:schemeClr val="accent1"/>
+          </a:effectRef>
+          <a:fontRef idx="minor">
+            <a:schemeClr val="lt1"/>
+          </a:fontRef>
+        </p:style>
+        <p:txBody>
+          <a:bodyPr rtlCol="0" anchor="ctr"/>
+          <a:lstStyle/>
+          <a:p>
+            <a:pPr algn="ctr"/>
+          </a:p>
+        </p:txBody>
+      </p:sp>
+      <p:sp>
+        <p:nvSpPr>
+          <p:cNvPr id="11" name="TextBox 10"/>
+          <p:cNvSpPr txBox="1"/>
+          <p:nvPr/>
+        </p:nvSpPr>
+        <p:spPr>
+          <a:xfrm>
+            <a:off x="777240" y="3310128"/>
+            <a:ext cx="320040" cy="320040"/>
+          </a:xfrm>
+          <a:prstGeom prst="rect">
+            <a:avLst/>
+          </a:prstGeom>
+          <a:noFill/>
+        </p:spPr>
+        <p:txBody>
+          <a:bodyPr wrap="square" lIns="45720" rIns="45720" tIns="18288" bIns="18288" anchor="ctr">
+            <a:spAutoFit/>
+          </a:bodyPr>
+          <a:lstStyle/>
+          <a:p>
+            <a:pPr algn="ctr"/>
+            <a:r>
+              <a:rPr sz="1400" b="1">
+                <a:solidFill>
+                  <a:srgbClr val="FFFFFF"/>
+                </a:solidFill>
+                <a:latin typeface="Segoe UI"/>
+              </a:rPr>
+              <a:t>✓</a:t>
+            </a:r>
+          </a:p>
+        </p:txBody>
+      </p:sp>
+      <p:sp>
+        <p:nvSpPr>
+          <p:cNvPr id="12" name="TextBox 11"/>
+          <p:cNvSpPr txBox="1"/>
+          <p:nvPr/>
+        </p:nvSpPr>
+        <p:spPr>
+          <a:xfrm>
+            <a:off x="1234440" y="3246120"/>
+            <a:ext cx="4754880" cy="731520"/>
+          </a:xfrm>
+          <a:prstGeom prst="rect">
+            <a:avLst/>
+          </a:prstGeom>
+          <a:noFill/>
+        </p:spPr>
+        <p:txBody>
+          <a:bodyPr wrap="square" lIns="45720" rIns="45720" tIns="18288" bIns="18288" anchor="ctr">
+            <a:spAutoFit/>
+          </a:bodyPr>
+          <a:lstStyle/>
+          <a:p>
+            <a:pPr algn="l"/>
+            <a:r>
+              <a:rPr sz="1200" b="0" i="0">
+                <a:solidFill>
+                  <a:srgbClr val="212121"/>
+                </a:solidFill>
+                <a:latin typeface="Segoe UI"/>
+              </a:rPr>
+              <a:t>Fleet sized for phase-1 conservative headways (15/20/35/60 min)</a:t>
+            </a:r>
+          </a:p>
+        </p:txBody>
+      </p:sp>
+      <p:sp>
+        <p:nvSpPr>
+          <p:cNvPr id="13" name="Oval 12"/>
+          <p:cNvSpPr/>
+          <p:nvPr/>
+        </p:nvSpPr>
+        <p:spPr>
+          <a:xfrm>
+            <a:off x="777240" y="4087368"/>
+            <a:ext cx="320040" cy="320040"/>
+          </a:xfrm>
+          <a:prstGeom prst="ellipse">
+            <a:avLst/>
+          </a:prstGeom>
+          <a:solidFill>
+            <a:srgbClr val="2E7D32"/>
+          </a:solidFill>
+          <a:ln>
+            <a:noFill/>
+          </a:ln>
+        </p:spPr>
+        <p:style>
+          <a:lnRef idx="1">
+            <a:schemeClr val="accent1"/>
+          </a:lnRef>
+          <a:fillRef idx="3">
+            <a:schemeClr val="accent1"/>
+          </a:fillRef>
+          <a:effectRef idx="2">
+            <a:schemeClr val="accent1"/>
+          </a:effectRef>
+          <a:fontRef idx="minor">
+            <a:schemeClr val="lt1"/>
+          </a:fontRef>
+        </p:style>
+        <p:txBody>
+          <a:bodyPr rtlCol="0" anchor="ctr"/>
+          <a:lstStyle/>
+          <a:p>
+            <a:pPr algn="ctr"/>
+          </a:p>
+        </p:txBody>
+      </p:sp>
+      <p:sp>
+        <p:nvSpPr>
+          <p:cNvPr id="14" name="TextBox 13"/>
+          <p:cNvSpPr txBox="1"/>
+          <p:nvPr/>
+        </p:nvSpPr>
+        <p:spPr>
+          <a:xfrm>
+            <a:off x="777240" y="4087368"/>
+            <a:ext cx="320040" cy="320040"/>
+          </a:xfrm>
+          <a:prstGeom prst="rect">
+            <a:avLst/>
+          </a:prstGeom>
+          <a:noFill/>
+        </p:spPr>
+        <p:txBody>
+          <a:bodyPr wrap="square" lIns="45720" rIns="45720" tIns="18288" bIns="18288" anchor="ctr">
+            <a:spAutoFit/>
+          </a:bodyPr>
+          <a:lstStyle/>
+          <a:p>
+            <a:pPr algn="ctr"/>
+            <a:r>
+              <a:rPr sz="1400" b="1">
+                <a:solidFill>
+                  <a:srgbClr val="FFFFFF"/>
+                </a:solidFill>
+                <a:latin typeface="Segoe UI"/>
+              </a:rPr>
+              <a:t>✓</a:t>
+            </a:r>
+          </a:p>
+        </p:txBody>
+      </p:sp>
+      <p:sp>
+        <p:nvSpPr>
+          <p:cNvPr id="15" name="TextBox 14"/>
+          <p:cNvSpPr txBox="1"/>
+          <p:nvPr/>
+        </p:nvSpPr>
+        <p:spPr>
+          <a:xfrm>
+            <a:off x="1234440" y="4023360"/>
+            <a:ext cx="4754880" cy="731520"/>
+          </a:xfrm>
+          <a:prstGeom prst="rect">
+            <a:avLst/>
+          </a:prstGeom>
+          <a:noFill/>
+        </p:spPr>
+        <p:txBody>
+          <a:bodyPr wrap="square" lIns="45720" rIns="45720" tIns="18288" bIns="18288" anchor="ctr">
+            <a:spAutoFit/>
+          </a:bodyPr>
+          <a:lstStyle/>
+          <a:p>
+            <a:pPr algn="l"/>
+            <a:r>
+              <a:rPr sz="1200" b="0" i="0">
+                <a:solidFill>
+                  <a:srgbClr val="212121"/>
+                </a:solidFill>
+                <a:latin typeface="Segoe UI"/>
+              </a:rPr>
+              <a:t>30 SSCL backbone routes calibrated against CHALO Apr 2026 data</a:t>
+            </a:r>
+          </a:p>
+        </p:txBody>
+      </p:sp>
+      <p:sp>
+        <p:nvSpPr>
+          <p:cNvPr id="16" name="Oval 15"/>
+          <p:cNvSpPr/>
+          <p:nvPr/>
+        </p:nvSpPr>
+        <p:spPr>
+          <a:xfrm>
+            <a:off x="777240" y="4864608"/>
+            <a:ext cx="320040" cy="320040"/>
+          </a:xfrm>
+          <a:prstGeom prst="ellipse">
+            <a:avLst/>
+          </a:prstGeom>
+          <a:solidFill>
+            <a:srgbClr val="2E7D32"/>
+          </a:solidFill>
+          <a:ln>
+            <a:noFill/>
+          </a:ln>
+        </p:spPr>
+        <p:style>
+          <a:lnRef idx="1">
+            <a:schemeClr val="accent1"/>
+          </a:lnRef>
+          <a:fillRef idx="3">
+            <a:schemeClr val="accent1"/>
+          </a:fillRef>
+          <a:effectRef idx="2">
+            <a:schemeClr val="accent1"/>
+          </a:effectRef>
+          <a:fontRef idx="minor">
+            <a:schemeClr val="lt1"/>
+          </a:fontRef>
+        </p:style>
+        <p:txBody>
+          <a:bodyPr rtlCol="0" anchor="ctr"/>
+          <a:lstStyle/>
+          <a:p>
+            <a:pPr algn="ctr"/>
+          </a:p>
+        </p:txBody>
+      </p:sp>
+      <p:sp>
+        <p:nvSpPr>
+          <p:cNvPr id="17" name="TextBox 16"/>
+          <p:cNvSpPr txBox="1"/>
+          <p:nvPr/>
+        </p:nvSpPr>
+        <p:spPr>
+          <a:xfrm>
+            <a:off x="777240" y="4864608"/>
+            <a:ext cx="320040" cy="320040"/>
+          </a:xfrm>
+          <a:prstGeom prst="rect">
+            <a:avLst/>
+          </a:prstGeom>
+          <a:noFill/>
+        </p:spPr>
+        <p:txBody>
+          <a:bodyPr wrap="square" lIns="45720" rIns="45720" tIns="18288" bIns="18288" anchor="ctr">
+            <a:spAutoFit/>
+          </a:bodyPr>
+          <a:lstStyle/>
+          <a:p>
+            <a:pPr algn="ctr"/>
+            <a:r>
+              <a:rPr sz="1400" b="1">
+                <a:solidFill>
+                  <a:srgbClr val="FFFFFF"/>
+                </a:solidFill>
+                <a:latin typeface="Segoe UI"/>
+              </a:rPr>
+              <a:t>✓</a:t>
+            </a:r>
+          </a:p>
+        </p:txBody>
+      </p:sp>
+      <p:sp>
+        <p:nvSpPr>
+          <p:cNvPr id="18" name="TextBox 17"/>
+          <p:cNvSpPr txBox="1"/>
+          <p:nvPr/>
+        </p:nvSpPr>
+        <p:spPr>
+          <a:xfrm>
+            <a:off x="1234440" y="4800600"/>
+            <a:ext cx="4754880" cy="731520"/>
+          </a:xfrm>
+          <a:prstGeom prst="rect">
+            <a:avLst/>
+          </a:prstGeom>
+          <a:noFill/>
+        </p:spPr>
+        <p:txBody>
+          <a:bodyPr wrap="square" lIns="45720" rIns="45720" tIns="18288" bIns="18288" anchor="ctr">
+            <a:spAutoFit/>
+          </a:bodyPr>
+          <a:lstStyle/>
+          <a:p>
+            <a:pPr algn="l"/>
+            <a:r>
+              <a:rPr sz="1200" b="0" i="0">
+                <a:solidFill>
+                  <a:srgbClr val="212121"/>
+                </a:solidFill>
+                <a:latin typeface="Segoe UI"/>
+              </a:rPr>
+              <a:t>9-sheet RTO workbook with operator absorption + buyback estimates</a:t>
+            </a:r>
+          </a:p>
+        </p:txBody>
+      </p:sp>
+      <p:sp>
+        <p:nvSpPr>
+          <p:cNvPr id="19" name="Oval 18"/>
+          <p:cNvSpPr/>
+          <p:nvPr/>
+        </p:nvSpPr>
+        <p:spPr>
+          <a:xfrm>
+            <a:off x="777240" y="5641848"/>
+            <a:ext cx="320040" cy="320040"/>
+          </a:xfrm>
+          <a:prstGeom prst="ellipse">
+            <a:avLst/>
+          </a:prstGeom>
+          <a:solidFill>
+            <a:srgbClr val="2E7D32"/>
+          </a:solidFill>
+          <a:ln>
+            <a:noFill/>
+          </a:ln>
+        </p:spPr>
+        <p:style>
+          <a:lnRef idx="1">
+            <a:schemeClr val="accent1"/>
+          </a:lnRef>
+          <a:fillRef idx="3">
+            <a:schemeClr val="accent1"/>
+          </a:fillRef>
+          <a:effectRef idx="2">
+            <a:schemeClr val="accent1"/>
+          </a:effectRef>
+          <a:fontRef idx="minor">
+            <a:schemeClr val="lt1"/>
+          </a:fontRef>
+        </p:style>
+        <p:txBody>
+          <a:bodyPr rtlCol="0" anchor="ctr"/>
+          <a:lstStyle/>
+          <a:p>
+            <a:pPr algn="ctr"/>
+          </a:p>
+        </p:txBody>
+      </p:sp>
+      <p:sp>
+        <p:nvSpPr>
+          <p:cNvPr id="20" name="TextBox 19"/>
+          <p:cNvSpPr txBox="1"/>
+          <p:nvPr/>
+        </p:nvSpPr>
+        <p:spPr>
+          <a:xfrm>
+            <a:off x="777240" y="5641848"/>
+            <a:ext cx="320040" cy="320040"/>
+          </a:xfrm>
+          <a:prstGeom prst="rect">
+            <a:avLst/>
+          </a:prstGeom>
+          <a:noFill/>
+        </p:spPr>
+        <p:txBody>
+          <a:bodyPr wrap="square" lIns="45720" rIns="45720" tIns="18288" bIns="18288" anchor="ctr">
+            <a:spAutoFit/>
+          </a:bodyPr>
+          <a:lstStyle/>
+          <a:p>
+            <a:pPr algn="ctr"/>
+            <a:r>
+              <a:rPr sz="1400" b="1">
+                <a:solidFill>
+                  <a:srgbClr val="FFFFFF"/>
+                </a:solidFill>
+                <a:latin typeface="Segoe UI"/>
+              </a:rPr>
+              <a:t>✓</a:t>
+            </a:r>
+          </a:p>
+        </p:txBody>
+      </p:sp>
+      <p:sp>
+        <p:nvSpPr>
+          <p:cNvPr id="21" name="TextBox 20"/>
+          <p:cNvSpPr txBox="1"/>
+          <p:nvPr/>
+        </p:nvSpPr>
+        <p:spPr>
+          <a:xfrm>
+            <a:off x="1234440" y="5577840"/>
+            <a:ext cx="4754880" cy="731520"/>
+          </a:xfrm>
+          <a:prstGeom prst="rect">
+            <a:avLst/>
+          </a:prstGeom>
+          <a:noFill/>
+        </p:spPr>
+        <p:txBody>
+          <a:bodyPr wrap="square" lIns="45720" rIns="45720" tIns="18288" bIns="18288" anchor="ctr">
+            <a:spAutoFit/>
+          </a:bodyPr>
+          <a:lstStyle/>
+          <a:p>
+            <a:pPr algn="l"/>
+            <a:r>
+              <a:rPr sz="1200" b="0" i="0">
+                <a:solidFill>
+                  <a:srgbClr val="212121"/>
+                </a:solidFill>
+                <a:latin typeface="Segoe UI"/>
+              </a:rPr>
+              <a:t>Reproducible pipeline — every number traces to a CSV row</a:t>
+            </a:r>
+          </a:p>
+        </p:txBody>
+      </p:sp>
+      <p:sp>
+        <p:nvSpPr>
+          <p:cNvPr id="22" name="Rounded Rectangle 21"/>
+          <p:cNvSpPr/>
+          <p:nvPr/>
+        </p:nvSpPr>
+        <p:spPr>
+          <a:xfrm>
+            <a:off x="6355080" y="1691640"/>
+            <a:ext cx="5577840" cy="4572000"/>
+          </a:xfrm>
+          <a:prstGeom prst="roundRect">
+            <a:avLst>
+              <a:gd name="adj" fmla="val 12000"/>
+            </a:avLst>
+          </a:prstGeom>
+          <a:solidFill>
+            <a:srgbClr val="FFEBEE"/>
+          </a:solidFill>
+          <a:ln w="9525">
+            <a:solidFill>
+              <a:srgbClr val="D32F2F"/>
+            </a:solidFill>
+          </a:ln>
+        </p:spPr>
+        <p:style>
+          <a:lnRef idx="1">
+            <a:schemeClr val="accent1"/>
+          </a:lnRef>
+          <a:fillRef idx="3">
+            <a:schemeClr val="accent1"/>
+          </a:fillRef>
+          <a:effectRef idx="2">
+            <a:schemeClr val="accent1"/>
+          </a:effectRef>
+          <a:fontRef idx="minor">
+            <a:schemeClr val="lt1"/>
+          </a:fontRef>
+        </p:style>
+        <p:txBody>
+          <a:bodyPr rtlCol="0" anchor="ctr"/>
+          <a:lstStyle/>
+          <a:p>
+            <a:pPr algn="ctr"/>
+          </a:p>
+        </p:txBody>
+      </p:sp>
+      <p:sp>
+        <p:nvSpPr>
+          <p:cNvPr id="23" name="Rounded Rectangle 22"/>
+          <p:cNvSpPr/>
+          <p:nvPr/>
+        </p:nvSpPr>
+        <p:spPr>
+          <a:xfrm>
+            <a:off x="6355080" y="1691640"/>
+            <a:ext cx="5577840" cy="548640"/>
+          </a:xfrm>
+          <a:prstGeom prst="roundRect">
+            <a:avLst>
+              <a:gd name="adj" fmla="val 12000"/>
+            </a:avLst>
+          </a:prstGeom>
+          <a:solidFill>
+            <a:srgbClr val="D32F2F"/>
+          </a:solidFill>
+          <a:ln>
+            <a:noFill/>
+          </a:ln>
+        </p:spPr>
+        <p:style>
+          <a:lnRef idx="1">
+            <a:schemeClr val="accent1"/>
+          </a:lnRef>
+          <a:fillRef idx="3">
+            <a:schemeClr val="accent1"/>
+          </a:fillRef>
+          <a:effectRef idx="2">
+            <a:schemeClr val="accent1"/>
+          </a:effectRef>
+          <a:fontRef idx="minor">
+            <a:schemeClr val="lt1"/>
+          </a:fontRef>
+        </p:style>
+        <p:txBody>
+          <a:bodyPr rtlCol="0" anchor="ctr"/>
+          <a:lstStyle/>
+          <a:p>
+            <a:pPr algn="ctr"/>
+          </a:p>
+        </p:txBody>
+      </p:sp>
+      <p:sp>
+        <p:nvSpPr>
+          <p:cNvPr id="24" name="TextBox 23"/>
+          <p:cNvSpPr txBox="1"/>
+          <p:nvPr/>
+        </p:nvSpPr>
+        <p:spPr>
+          <a:xfrm>
+            <a:off x="6355080" y="1691640"/>
+            <a:ext cx="5577840" cy="548640"/>
+          </a:xfrm>
+          <a:prstGeom prst="rect">
+            <a:avLst/>
+          </a:prstGeom>
+          <a:noFill/>
+        </p:spPr>
+        <p:txBody>
+          <a:bodyPr wrap="square" lIns="45720" rIns="45720" tIns="18288" bIns="18288" anchor="ctr">
+            <a:spAutoFit/>
+          </a:bodyPr>
+          <a:lstStyle/>
+          <a:p>
+            <a:pPr algn="ctr"/>
+            <a:r>
+              <a:rPr sz="1600" b="1">
+                <a:solidFill>
+                  <a:srgbClr val="FFFFFF"/>
+                </a:solidFill>
+                <a:latin typeface="Segoe UI"/>
+              </a:rPr>
+              <a:t>WHAT IT IS NOT</a:t>
+            </a:r>
+          </a:p>
+        </p:txBody>
+      </p:sp>
+      <p:sp>
+        <p:nvSpPr>
+          <p:cNvPr id="25" name="Oval 24"/>
+          <p:cNvSpPr/>
+          <p:nvPr/>
+        </p:nvSpPr>
+        <p:spPr>
+          <a:xfrm>
+            <a:off x="6583680" y="2532888"/>
+            <a:ext cx="320040" cy="320040"/>
+          </a:xfrm>
+          <a:prstGeom prst="ellipse">
+            <a:avLst/>
+          </a:prstGeom>
+          <a:solidFill>
+            <a:srgbClr val="D32F2F"/>
+          </a:solidFill>
+          <a:ln>
+            <a:noFill/>
+          </a:ln>
+        </p:spPr>
+        <p:style>
+          <a:lnRef idx="1">
+            <a:schemeClr val="accent1"/>
+          </a:lnRef>
+          <a:fillRef idx="3">
+            <a:schemeClr val="accent1"/>
+          </a:fillRef>
+          <a:effectRef idx="2">
+            <a:schemeClr val="accent1"/>
+          </a:effectRef>
+          <a:fontRef idx="minor">
+            <a:schemeClr val="lt1"/>
+          </a:fontRef>
+        </p:style>
+        <p:txBody>
+          <a:bodyPr rtlCol="0" anchor="ctr"/>
+          <a:lstStyle/>
+          <a:p>
+            <a:pPr algn="ctr"/>
+          </a:p>
+        </p:txBody>
+      </p:sp>
+      <p:sp>
+        <p:nvSpPr>
+          <p:cNvPr id="26" name="TextBox 25"/>
+          <p:cNvSpPr txBox="1"/>
+          <p:nvPr/>
+        </p:nvSpPr>
+        <p:spPr>
+          <a:xfrm>
+            <a:off x="6583680" y="2532888"/>
+            <a:ext cx="320040" cy="320040"/>
+          </a:xfrm>
+          <a:prstGeom prst="rect">
+            <a:avLst/>
+          </a:prstGeom>
+          <a:noFill/>
+        </p:spPr>
+        <p:txBody>
+          <a:bodyPr wrap="square" lIns="45720" rIns="45720" tIns="18288" bIns="18288" anchor="ctr">
+            <a:spAutoFit/>
+          </a:bodyPr>
+          <a:lstStyle/>
+          <a:p>
+            <a:pPr algn="ctr"/>
+            <a:r>
+              <a:rPr sz="1400" b="1">
+                <a:solidFill>
+                  <a:srgbClr val="FFFFFF"/>
+                </a:solidFill>
+                <a:latin typeface="Segoe UI"/>
+              </a:rPr>
+              <a:t>✗</a:t>
+            </a:r>
+          </a:p>
+        </p:txBody>
+      </p:sp>
+      <p:sp>
+        <p:nvSpPr>
+          <p:cNvPr id="27" name="TextBox 26"/>
+          <p:cNvSpPr txBox="1"/>
+          <p:nvPr/>
+        </p:nvSpPr>
+        <p:spPr>
+          <a:xfrm>
+            <a:off x="7040880" y="2468880"/>
+            <a:ext cx="4754880" cy="731520"/>
+          </a:xfrm>
+          <a:prstGeom prst="rect">
+            <a:avLst/>
+          </a:prstGeom>
+          <a:noFill/>
+        </p:spPr>
+        <p:txBody>
+          <a:bodyPr wrap="square" lIns="45720" rIns="45720" tIns="18288" bIns="18288" anchor="ctr">
+            <a:spAutoFit/>
+          </a:bodyPr>
+          <a:lstStyle/>
+          <a:p>
+            <a:pPr algn="l"/>
+            <a:r>
+              <a:rPr sz="1200" b="0" i="0">
+                <a:solidFill>
+                  <a:srgbClr val="212121"/>
+                </a:solidFill>
+                <a:latin typeface="Segoe UI"/>
+              </a:rPr>
+              <a:t>A ridership survey — field validation still required</a:t>
+            </a:r>
+          </a:p>
+        </p:txBody>
+      </p:sp>
+      <p:sp>
+        <p:nvSpPr>
+          <p:cNvPr id="28" name="Oval 27"/>
+          <p:cNvSpPr/>
+          <p:nvPr/>
+        </p:nvSpPr>
+        <p:spPr>
+          <a:xfrm>
+            <a:off x="6583680" y="3310128"/>
+            <a:ext cx="320040" cy="320040"/>
+          </a:xfrm>
+          <a:prstGeom prst="ellipse">
+            <a:avLst/>
+          </a:prstGeom>
+          <a:solidFill>
+            <a:srgbClr val="D32F2F"/>
+          </a:solidFill>
+          <a:ln>
+            <a:noFill/>
+          </a:ln>
+        </p:spPr>
+        <p:style>
+          <a:lnRef idx="1">
+            <a:schemeClr val="accent1"/>
+          </a:lnRef>
+          <a:fillRef idx="3">
+            <a:schemeClr val="accent1"/>
+          </a:fillRef>
+          <a:effectRef idx="2">
+            <a:schemeClr val="accent1"/>
+          </a:effectRef>
+          <a:fontRef idx="minor">
+            <a:schemeClr val="lt1"/>
+          </a:fontRef>
+        </p:style>
+        <p:txBody>
+          <a:bodyPr rtlCol="0" anchor="ctr"/>
+          <a:lstStyle/>
+          <a:p>
+            <a:pPr algn="ctr"/>
+          </a:p>
+        </p:txBody>
+      </p:sp>
+      <p:sp>
+        <p:nvSpPr>
+          <p:cNvPr id="29" name="TextBox 28"/>
+          <p:cNvSpPr txBox="1"/>
+          <p:nvPr/>
+        </p:nvSpPr>
+        <p:spPr>
+          <a:xfrm>
+            <a:off x="6583680" y="3310128"/>
+            <a:ext cx="320040" cy="320040"/>
+          </a:xfrm>
+          <a:prstGeom prst="rect">
+            <a:avLst/>
+          </a:prstGeom>
+          <a:noFill/>
+        </p:spPr>
+        <p:txBody>
+          <a:bodyPr wrap="square" lIns="45720" rIns="45720" tIns="18288" bIns="18288" anchor="ctr">
+            <a:spAutoFit/>
+          </a:bodyPr>
+          <a:lstStyle/>
+          <a:p>
+            <a:pPr algn="ctr"/>
+            <a:r>
+              <a:rPr sz="1400" b="1">
+                <a:solidFill>
+                  <a:srgbClr val="FFFFFF"/>
+                </a:solidFill>
+                <a:latin typeface="Segoe UI"/>
+              </a:rPr>
+              <a:t>✗</a:t>
+            </a:r>
+          </a:p>
+        </p:txBody>
+      </p:sp>
+      <p:sp>
+        <p:nvSpPr>
+          <p:cNvPr id="30" name="TextBox 29"/>
+          <p:cNvSpPr txBox="1"/>
+          <p:nvPr/>
+        </p:nvSpPr>
+        <p:spPr>
+          <a:xfrm>
+            <a:off x="7040880" y="3246120"/>
+            <a:ext cx="4754880" cy="731520"/>
+          </a:xfrm>
+          <a:prstGeom prst="rect">
+            <a:avLst/>
+          </a:prstGeom>
+          <a:noFill/>
+        </p:spPr>
+        <p:txBody>
+          <a:bodyPr wrap="square" lIns="45720" rIns="45720" tIns="18288" bIns="18288" anchor="ctr">
+            <a:spAutoFit/>
+          </a:bodyPr>
+          <a:lstStyle/>
+          <a:p>
+            <a:pPr algn="l"/>
+            <a:r>
+              <a:rPr sz="1200" b="0" i="0">
+                <a:solidFill>
+                  <a:srgbClr val="212121"/>
+                </a:solidFill>
+                <a:latin typeface="Segoe UI"/>
+              </a:rPr>
+              <a:t>A net-fleet-gap report — current ops verification needed</a:t>
+            </a:r>
+          </a:p>
+        </p:txBody>
+      </p:sp>
+      <p:sp>
+        <p:nvSpPr>
+          <p:cNvPr id="31" name="Oval 30"/>
+          <p:cNvSpPr/>
+          <p:nvPr/>
+        </p:nvSpPr>
+        <p:spPr>
+          <a:xfrm>
+            <a:off x="6583680" y="4087368"/>
+            <a:ext cx="320040" cy="320040"/>
+          </a:xfrm>
+          <a:prstGeom prst="ellipse">
+            <a:avLst/>
+          </a:prstGeom>
+          <a:solidFill>
+            <a:srgbClr val="D32F2F"/>
+          </a:solidFill>
+          <a:ln>
+            <a:noFill/>
+          </a:ln>
+        </p:spPr>
+        <p:style>
+          <a:lnRef idx="1">
+            <a:schemeClr val="accent1"/>
+          </a:lnRef>
+          <a:fillRef idx="3">
+            <a:schemeClr val="accent1"/>
+          </a:fillRef>
+          <a:effectRef idx="2">
+            <a:schemeClr val="accent1"/>
+          </a:effectRef>
+          <a:fontRef idx="minor">
+            <a:schemeClr val="lt1"/>
+          </a:fontRef>
+        </p:style>
+        <p:txBody>
+          <a:bodyPr rtlCol="0" anchor="ctr"/>
+          <a:lstStyle/>
+          <a:p>
+            <a:pPr algn="ctr"/>
+          </a:p>
+        </p:txBody>
+      </p:sp>
+      <p:sp>
+        <p:nvSpPr>
+          <p:cNvPr id="32" name="TextBox 31"/>
+          <p:cNvSpPr txBox="1"/>
+          <p:nvPr/>
+        </p:nvSpPr>
+        <p:spPr>
+          <a:xfrm>
+            <a:off x="6583680" y="4087368"/>
+            <a:ext cx="320040" cy="320040"/>
+          </a:xfrm>
+          <a:prstGeom prst="rect">
+            <a:avLst/>
+          </a:prstGeom>
+          <a:noFill/>
+        </p:spPr>
+        <p:txBody>
+          <a:bodyPr wrap="square" lIns="45720" rIns="45720" tIns="18288" bIns="18288" anchor="ctr">
+            <a:spAutoFit/>
+          </a:bodyPr>
+          <a:lstStyle/>
+          <a:p>
+            <a:pPr algn="ctr"/>
+            <a:r>
+              <a:rPr sz="1400" b="1">
+                <a:solidFill>
+                  <a:srgbClr val="FFFFFF"/>
+                </a:solidFill>
+                <a:latin typeface="Segoe UI"/>
+              </a:rPr>
+              <a:t>✗</a:t>
+            </a:r>
+          </a:p>
+        </p:txBody>
+      </p:sp>
+      <p:sp>
+        <p:nvSpPr>
+          <p:cNvPr id="33" name="TextBox 32"/>
+          <p:cNvSpPr txBox="1"/>
+          <p:nvPr/>
+        </p:nvSpPr>
+        <p:spPr>
+          <a:xfrm>
+            <a:off x="7040880" y="4023360"/>
+            <a:ext cx="4754880" cy="731520"/>
+          </a:xfrm>
+          <a:prstGeom prst="rect">
+            <a:avLst/>
+          </a:prstGeom>
+          <a:noFill/>
+        </p:spPr>
+        <p:txBody>
+          <a:bodyPr wrap="square" lIns="45720" rIns="45720" tIns="18288" bIns="18288" anchor="ctr">
+            <a:spAutoFit/>
+          </a:bodyPr>
+          <a:lstStyle/>
+          <a:p>
+            <a:pPr algn="l"/>
+            <a:r>
+              <a:rPr sz="1200" b="0" i="0">
+                <a:solidFill>
+                  <a:srgbClr val="212121"/>
+                </a:solidFill>
+                <a:latin typeface="Segoe UI"/>
+              </a:rPr>
+              <a:t>Final headway commitments — RTO consultation still pending</a:t>
+            </a:r>
+          </a:p>
+        </p:txBody>
+      </p:sp>
+      <p:sp>
+        <p:nvSpPr>
+          <p:cNvPr id="34" name="Oval 33"/>
+          <p:cNvSpPr/>
+          <p:nvPr/>
+        </p:nvSpPr>
+        <p:spPr>
+          <a:xfrm>
+            <a:off x="6583680" y="4864608"/>
+            <a:ext cx="320040" cy="320040"/>
+          </a:xfrm>
+          <a:prstGeom prst="ellipse">
+            <a:avLst/>
+          </a:prstGeom>
+          <a:solidFill>
+            <a:srgbClr val="D32F2F"/>
+          </a:solidFill>
+          <a:ln>
+            <a:noFill/>
+          </a:ln>
+        </p:spPr>
+        <p:style>
+          <a:lnRef idx="1">
+            <a:schemeClr val="accent1"/>
+          </a:lnRef>
+          <a:fillRef idx="3">
+            <a:schemeClr val="accent1"/>
+          </a:fillRef>
+          <a:effectRef idx="2">
+            <a:schemeClr val="accent1"/>
+          </a:effectRef>
+          <a:fontRef idx="minor">
+            <a:schemeClr val="lt1"/>
+          </a:fontRef>
+        </p:style>
+        <p:txBody>
+          <a:bodyPr rtlCol="0" anchor="ctr"/>
+          <a:lstStyle/>
+          <a:p>
+            <a:pPr algn="ctr"/>
+          </a:p>
+        </p:txBody>
+      </p:sp>
+      <p:sp>
+        <p:nvSpPr>
+          <p:cNvPr id="35" name="TextBox 34"/>
+          <p:cNvSpPr txBox="1"/>
+          <p:nvPr/>
+        </p:nvSpPr>
+        <p:spPr>
+          <a:xfrm>
+            <a:off x="6583680" y="4864608"/>
+            <a:ext cx="320040" cy="320040"/>
+          </a:xfrm>
+          <a:prstGeom prst="rect">
+            <a:avLst/>
+          </a:prstGeom>
+          <a:noFill/>
+        </p:spPr>
+        <p:txBody>
+          <a:bodyPr wrap="square" lIns="45720" rIns="45720" tIns="18288" bIns="18288" anchor="ctr">
+            <a:spAutoFit/>
+          </a:bodyPr>
+          <a:lstStyle/>
+          <a:p>
+            <a:pPr algn="ctr"/>
+            <a:r>
+              <a:rPr sz="1400" b="1">
+                <a:solidFill>
+                  <a:srgbClr val="FFFFFF"/>
+                </a:solidFill>
+                <a:latin typeface="Segoe UI"/>
+              </a:rPr>
+              <a:t>✗</a:t>
+            </a:r>
+          </a:p>
+        </p:txBody>
+      </p:sp>
+      <p:sp>
+        <p:nvSpPr>
+          <p:cNvPr id="36" name="TextBox 35"/>
+          <p:cNvSpPr txBox="1"/>
+          <p:nvPr/>
+        </p:nvSpPr>
+        <p:spPr>
+          <a:xfrm>
+            <a:off x="7040880" y="4800600"/>
+            <a:ext cx="4754880" cy="731520"/>
+          </a:xfrm>
+          <a:prstGeom prst="rect">
+            <a:avLst/>
+          </a:prstGeom>
+          <a:noFill/>
+        </p:spPr>
+        <p:txBody>
+          <a:bodyPr wrap="square" lIns="45720" rIns="45720" tIns="18288" bIns="18288" anchor="ctr">
+            <a:spAutoFit/>
+          </a:bodyPr>
+          <a:lstStyle/>
+          <a:p>
+            <a:pPr algn="l"/>
+            <a:r>
+              <a:rPr sz="1200" b="0" i="0">
+                <a:solidFill>
+                  <a:srgbClr val="212121"/>
+                </a:solidFill>
+                <a:latin typeface="Segoe UI"/>
+              </a:rPr>
+              <a:t>A buyback price commitment — figures are estimates per peer cities</a:t>
+            </a:r>
+          </a:p>
+        </p:txBody>
+      </p:sp>
+      <p:sp>
+        <p:nvSpPr>
+          <p:cNvPr id="37" name="Oval 36"/>
+          <p:cNvSpPr/>
+          <p:nvPr/>
+        </p:nvSpPr>
+        <p:spPr>
+          <a:xfrm>
+            <a:off x="6583680" y="5641848"/>
+            <a:ext cx="320040" cy="320040"/>
+          </a:xfrm>
+          <a:prstGeom prst="ellipse">
+            <a:avLst/>
+          </a:prstGeom>
+          <a:solidFill>
+            <a:srgbClr val="D32F2F"/>
+          </a:solidFill>
+          <a:ln>
+            <a:noFill/>
+          </a:ln>
+        </p:spPr>
+        <p:style>
+          <a:lnRef idx="1">
+            <a:schemeClr val="accent1"/>
+          </a:lnRef>
+          <a:fillRef idx="3">
+            <a:schemeClr val="accent1"/>
+          </a:fillRef>
+          <a:effectRef idx="2">
+            <a:schemeClr val="accent1"/>
+          </a:effectRef>
+          <a:fontRef idx="minor">
+            <a:schemeClr val="lt1"/>
+          </a:fontRef>
+        </p:style>
+        <p:txBody>
+          <a:bodyPr rtlCol="0" anchor="ctr"/>
+          <a:lstStyle/>
+          <a:p>
+            <a:pPr algn="ctr"/>
+          </a:p>
+        </p:txBody>
+      </p:sp>
+      <p:sp>
+        <p:nvSpPr>
+          <p:cNvPr id="38" name="TextBox 37"/>
+          <p:cNvSpPr txBox="1"/>
+          <p:nvPr/>
+        </p:nvSpPr>
+        <p:spPr>
+          <a:xfrm>
+            <a:off x="6583680" y="5641848"/>
+            <a:ext cx="320040" cy="320040"/>
+          </a:xfrm>
+          <a:prstGeom prst="rect">
+            <a:avLst/>
+          </a:prstGeom>
+          <a:noFill/>
+        </p:spPr>
+        <p:txBody>
+          <a:bodyPr wrap="square" lIns="45720" rIns="45720" tIns="18288" bIns="18288" anchor="ctr">
+            <a:spAutoFit/>
+          </a:bodyPr>
+          <a:lstStyle/>
+          <a:p>
+            <a:pPr algn="ctr"/>
+            <a:r>
+              <a:rPr sz="1400" b="1">
+                <a:solidFill>
+                  <a:srgbClr val="FFFFFF"/>
+                </a:solidFill>
+                <a:latin typeface="Segoe UI"/>
+              </a:rPr>
+              <a:t>✗</a:t>
+            </a:r>
+          </a:p>
+        </p:txBody>
+      </p:sp>
+      <p:sp>
+        <p:nvSpPr>
+          <p:cNvPr id="39" name="TextBox 38"/>
+          <p:cNvSpPr txBox="1"/>
+          <p:nvPr/>
+        </p:nvSpPr>
+        <p:spPr>
+          <a:xfrm>
+            <a:off x="7040880" y="5577840"/>
+            <a:ext cx="4754880" cy="731520"/>
+          </a:xfrm>
+          <a:prstGeom prst="rect">
+            <a:avLst/>
+          </a:prstGeom>
+          <a:noFill/>
+        </p:spPr>
+        <p:txBody>
+          <a:bodyPr wrap="square" lIns="45720" rIns="45720" tIns="18288" bIns="18288" anchor="ctr">
+            <a:spAutoFit/>
+          </a:bodyPr>
+          <a:lstStyle/>
+          <a:p>
+            <a:pPr algn="l"/>
+            <a:r>
+              <a:rPr sz="1200" b="0" i="0">
+                <a:solidFill>
+                  <a:srgbClr val="212121"/>
+                </a:solidFill>
+                <a:latin typeface="Segoe UI"/>
+              </a:rPr>
+              <a:t>Tourist demand model — surge data is Phase 2 work</a:t>
+            </a:r>
+          </a:p>
+        </p:txBody>
+      </p:sp>
+      <p:sp>
+        <p:nvSpPr>
+          <p:cNvPr id="40" name="TextBox 39"/>
+          <p:cNvSpPr txBox="1"/>
+          <p:nvPr/>
+        </p:nvSpPr>
+        <p:spPr>
+          <a:xfrm>
+            <a:off x="457200" y="6446520"/>
+            <a:ext cx="11247120" cy="274320"/>
+          </a:xfrm>
+          <a:prstGeom prst="rect">
+            <a:avLst/>
+          </a:prstGeom>
+          <a:noFill/>
+        </p:spPr>
+        <p:txBody>
+          <a:bodyPr wrap="square" lIns="45720" rIns="45720" tIns="18288" bIns="18288" anchor="t">
+            <a:spAutoFit/>
+          </a:bodyPr>
+          <a:lstStyle/>
+          <a:p>
+            <a:pPr algn="l"/>
+            <a:r>
+              <a:rPr sz="900" b="0" i="1">
+                <a:solidFill>
+                  <a:srgbClr val="757575"/>
+                </a:solidFill>
+                <a:latin typeface="Segoe UI"/>
+              </a:rPr>
+              <a:t>Slide 13  ·  Honest scope</a:t>
+            </a:r>
+          </a:p>
+        </p:txBody>
+      </p:sp>
+    </p:spTree>
+  </p:cSld>
+  <p:clrMapOvr>
+    <a:masterClrMapping/>
+  </p:clrMapOvr>
+</p:sld>
+</file>
+
+<file path=ppt/slides/slide14.xml><?xml version="1.0" encoding="utf-8"?>
+<p:sld xmlns:a="http://schemas.openxmlformats.org/drawingml/2006/main" xmlns:p="http://schemas.openxmlformats.org/presentationml/2006/main" xmlns:r="http://schemas.openxmlformats.org/officeDocument/2006/relationships">
+  <p:cSld>
+    <p:spTree>
+      <p:nvGrpSpPr>
+        <p:cNvPr id="1" name=""/>
+        <p:cNvGrpSpPr/>
+        <p:nvPr/>
+      </p:nvGrpSpPr>
+      <p:grpSpPr/>
+      <p:sp>
+        <p:nvSpPr>
+          <p:cNvPr id="2" name="Rectangle 1"/>
+          <p:cNvSpPr/>
+          <p:nvPr/>
+        </p:nvSpPr>
+        <p:spPr>
+          <a:xfrm>
+            <a:off x="0" y="0"/>
             <a:ext cx="12188952" cy="6858000"/>
           </a:xfrm>
           <a:prstGeom prst="rect">
@@ -20895,7 +23822,7 @@
                 </a:solidFill>
                 <a:latin typeface="Calibri"/>
               </a:rPr>
-              <a:t>Quality signals — Phase-4 diagnostics &amp; CHALO calibration</a:t>
+              <a:t>How do we know this plan is right?</a:t>
             </a:r>
           </a:p>
         </p:txBody>
@@ -20908,8 +23835,8 @@
         </p:nvSpPr>
         <p:spPr>
           <a:xfrm>
-            <a:off x="548640" y="1371600"/>
-            <a:ext cx="5943600" cy="365760"/>
+            <a:off x="457200" y="914400"/>
+            <a:ext cx="11247120" cy="365760"/>
           </a:xfrm>
           <a:prstGeom prst="rect">
             <a:avLst/>
@@ -20924,65 +23851,79 @@
           <a:p>
             <a:pPr algn="l"/>
             <a:r>
-              <a:rPr sz="1400" b="1" i="0">
-                <a:solidFill>
-                  <a:srgbClr val="212121"/>
-                </a:solidFill>
-                <a:latin typeface="Segoe UI"/>
-              </a:rPr>
-              <a:t>Load_Flag across 207 active routes</a:t>
-            </a:r>
-          </a:p>
-        </p:txBody>
-      </p:sp>
-      <p:sp>
-        <p:nvSpPr>
-          <p:cNvPr id="5" name="TextBox 4"/>
-          <p:cNvSpPr txBox="1"/>
-          <p:nvPr/>
-        </p:nvSpPr>
-        <p:spPr>
-          <a:xfrm>
-            <a:off x="548640" y="1920240"/>
-            <a:ext cx="1554480" cy="365760"/>
-          </a:xfrm>
-          <a:prstGeom prst="rect">
-            <a:avLst/>
-          </a:prstGeom>
-          <a:noFill/>
-        </p:spPr>
-        <p:txBody>
-          <a:bodyPr wrap="square" lIns="45720" rIns="45720" tIns="18288" bIns="18288" anchor="t">
-            <a:spAutoFit/>
-          </a:bodyPr>
-          <a:lstStyle/>
-          <a:p>
-            <a:pPr algn="l"/>
-            <a:r>
-              <a:rPr sz="1200" b="1" i="0">
-                <a:solidFill>
-                  <a:srgbClr val="212121"/>
-                </a:solidFill>
-                <a:latin typeface="Segoe UI"/>
-              </a:rPr>
-              <a:t>Green</a:t>
-            </a:r>
-          </a:p>
-        </p:txBody>
-      </p:sp>
-      <p:sp>
-        <p:nvSpPr>
-          <p:cNvPr id="6" name="Rectangle 5"/>
+              <a:rPr sz="1400" b="0" i="1">
+                <a:solidFill>
+                  <a:srgbClr val="757575"/>
+                </a:solidFill>
+                <a:latin typeface="Segoe UI"/>
+              </a:rPr>
+              <a:t>Three quick checks an IAS reviewer can defend in the room</a:t>
+            </a:r>
+          </a:p>
+        </p:txBody>
+      </p:sp>
+      <p:sp>
+        <p:nvSpPr>
+          <p:cNvPr id="5" name="Rounded Rectangle 4"/>
           <p:cNvSpPr/>
           <p:nvPr/>
         </p:nvSpPr>
         <p:spPr>
           <a:xfrm>
-            <a:off x="2194560" y="1828800"/>
-            <a:ext cx="206733" cy="457200"/>
-          </a:xfrm>
-          <a:prstGeom prst="rect">
-            <a:avLst/>
+            <a:off x="457200" y="1554480"/>
+            <a:ext cx="3657600" cy="3657600"/>
+          </a:xfrm>
+          <a:prstGeom prst="roundRect">
+            <a:avLst>
+              <a:gd name="adj" fmla="val 12000"/>
+            </a:avLst>
+          </a:prstGeom>
+          <a:solidFill>
+            <a:srgbClr val="FFFFFF"/>
+          </a:solidFill>
+          <a:ln w="9525">
+            <a:solidFill>
+              <a:srgbClr val="2E7D32"/>
+            </a:solidFill>
+          </a:ln>
+        </p:spPr>
+        <p:style>
+          <a:lnRef idx="1">
+            <a:schemeClr val="accent1"/>
+          </a:lnRef>
+          <a:fillRef idx="3">
+            <a:schemeClr val="accent1"/>
+          </a:fillRef>
+          <a:effectRef idx="2">
+            <a:schemeClr val="accent1"/>
+          </a:effectRef>
+          <a:fontRef idx="minor">
+            <a:schemeClr val="lt1"/>
+          </a:fontRef>
+        </p:style>
+        <p:txBody>
+          <a:bodyPr rtlCol="0" anchor="ctr"/>
+          <a:lstStyle/>
+          <a:p>
+            <a:pPr algn="ctr"/>
+          </a:p>
+        </p:txBody>
+      </p:sp>
+      <p:sp>
+        <p:nvSpPr>
+          <p:cNvPr id="6" name="Rounded Rectangle 5"/>
+          <p:cNvSpPr/>
+          <p:nvPr/>
+        </p:nvSpPr>
+        <p:spPr>
+          <a:xfrm>
+            <a:off x="457200" y="1554480"/>
+            <a:ext cx="3657600" cy="777240"/>
+          </a:xfrm>
+          <a:prstGeom prst="roundRect">
+            <a:avLst>
+              <a:gd name="adj" fmla="val 12000"/>
+            </a:avLst>
           </a:prstGeom>
           <a:solidFill>
             <a:srgbClr val="2E7D32"/>
@@ -21021,8 +23962,43 @@
         </p:nvSpPr>
         <p:spPr>
           <a:xfrm>
-            <a:off x="2492733" y="1874519"/>
-            <a:ext cx="914400" cy="365760"/>
+            <a:off x="594360" y="1600200"/>
+            <a:ext cx="3383280" cy="685800"/>
+          </a:xfrm>
+          <a:prstGeom prst="rect">
+            <a:avLst/>
+          </a:prstGeom>
+          <a:noFill/>
+        </p:spPr>
+        <p:txBody>
+          <a:bodyPr wrap="square" lIns="45720" rIns="45720" tIns="18288" bIns="18288" anchor="ctr">
+            <a:spAutoFit/>
+          </a:bodyPr>
+          <a:lstStyle/>
+          <a:p>
+            <a:pPr algn="ctr"/>
+            <a:r>
+              <a:rPr sz="1400" b="1">
+                <a:solidFill>
+                  <a:srgbClr val="FFFFFF"/>
+                </a:solidFill>
+                <a:latin typeface="Segoe UI"/>
+              </a:rPr>
+              <a:t>Q1.  Are we matching real ridership?</a:t>
+            </a:r>
+          </a:p>
+        </p:txBody>
+      </p:sp>
+      <p:sp>
+        <p:nvSpPr>
+          <p:cNvPr id="8" name="TextBox 7"/>
+          <p:cNvSpPr txBox="1"/>
+          <p:nvPr/>
+        </p:nvSpPr>
+        <p:spPr>
+          <a:xfrm>
+            <a:off x="457200" y="2514600"/>
+            <a:ext cx="3657600" cy="914400"/>
           </a:xfrm>
           <a:prstGeom prst="rect">
             <a:avLst/>
@@ -21035,67 +24011,151 @@
           </a:bodyPr>
           <a:lstStyle/>
           <a:p>
+            <a:pPr algn="ctr"/>
+            <a:r>
+              <a:rPr sz="4400" b="1" i="0">
+                <a:solidFill>
+                  <a:srgbClr val="2E7D32"/>
+                </a:solidFill>
+                <a:latin typeface="Calibri"/>
+              </a:rPr>
+              <a:t>+9.7%</a:t>
+            </a:r>
+          </a:p>
+        </p:txBody>
+      </p:sp>
+      <p:sp>
+        <p:nvSpPr>
+          <p:cNvPr id="9" name="TextBox 8"/>
+          <p:cNvSpPr txBox="1"/>
+          <p:nvPr/>
+        </p:nvSpPr>
+        <p:spPr>
+          <a:xfrm>
+            <a:off x="594360" y="3429000"/>
+            <a:ext cx="3383280" cy="411480"/>
+          </a:xfrm>
+          <a:prstGeom prst="rect">
+            <a:avLst/>
+          </a:prstGeom>
+          <a:noFill/>
+        </p:spPr>
+        <p:txBody>
+          <a:bodyPr wrap="square" lIns="45720" rIns="45720" tIns="18288" bIns="18288" anchor="t">
+            <a:spAutoFit/>
+          </a:bodyPr>
+          <a:lstStyle/>
+          <a:p>
+            <a:pPr algn="ctr"/>
+            <a:r>
+              <a:rPr sz="1100" b="0" i="1">
+                <a:solidFill>
+                  <a:srgbClr val="757575"/>
+                </a:solidFill>
+                <a:latin typeface="Segoe UI"/>
+              </a:rPr>
+              <a:t>Engine 8.04  vs  scaled CHALO 7.33 buses/route</a:t>
+            </a:r>
+          </a:p>
+        </p:txBody>
+      </p:sp>
+      <p:sp>
+        <p:nvSpPr>
+          <p:cNvPr id="10" name="TextBox 9"/>
+          <p:cNvSpPr txBox="1"/>
+          <p:nvPr/>
+        </p:nvSpPr>
+        <p:spPr>
+          <a:xfrm>
+            <a:off x="685800" y="3931920"/>
+            <a:ext cx="3200400" cy="1188719"/>
+          </a:xfrm>
+          <a:prstGeom prst="rect">
+            <a:avLst/>
+          </a:prstGeom>
+          <a:noFill/>
+        </p:spPr>
+        <p:txBody>
+          <a:bodyPr wrap="square" lIns="45720" rIns="45720" tIns="18288" bIns="18288" anchor="t">
+            <a:spAutoFit/>
+          </a:bodyPr>
+          <a:lstStyle/>
+          <a:p>
             <a:pPr algn="l"/>
             <a:r>
-              <a:rPr sz="1200" b="1" i="0">
-                <a:solidFill>
-                  <a:srgbClr val="2E7D32"/>
-                </a:solidFill>
-                <a:latin typeface="Segoe UI"/>
-              </a:rPr>
-              <a:t>9</a:t>
-            </a:r>
-          </a:p>
-        </p:txBody>
-      </p:sp>
-      <p:sp>
-        <p:nvSpPr>
-          <p:cNvPr id="8" name="TextBox 7"/>
-          <p:cNvSpPr txBox="1"/>
-          <p:nvPr/>
-        </p:nvSpPr>
-        <p:spPr>
-          <a:xfrm>
-            <a:off x="548640" y="2606040"/>
-            <a:ext cx="1554480" cy="365760"/>
-          </a:xfrm>
-          <a:prstGeom prst="rect">
-            <a:avLst/>
-          </a:prstGeom>
-          <a:noFill/>
-        </p:spPr>
-        <p:txBody>
-          <a:bodyPr wrap="square" lIns="45720" rIns="45720" tIns="18288" bIns="18288" anchor="t">
-            <a:spAutoFit/>
-          </a:bodyPr>
-          <a:lstStyle/>
-          <a:p>
-            <a:pPr algn="l"/>
-            <a:r>
-              <a:rPr sz="1200" b="1" i="0">
+              <a:rPr sz="1200" b="0" i="0">
                 <a:solidFill>
                   <a:srgbClr val="212121"/>
                 </a:solidFill>
                 <a:latin typeface="Segoe UI"/>
               </a:rPr>
-              <a:t>Amber_Under</a:t>
-            </a:r>
-          </a:p>
-        </p:txBody>
-      </p:sp>
-      <p:sp>
-        <p:nvSpPr>
-          <p:cNvPr id="9" name="Rectangle 8"/>
+              <a:t>Yes — the plan's per-route fleet for the SSCL backbone is within 10% of what CHALO would need at the same 15-min headway.</a:t>
+            </a:r>
+          </a:p>
+        </p:txBody>
+      </p:sp>
+      <p:sp>
+        <p:nvSpPr>
+          <p:cNvPr id="11" name="Rounded Rectangle 10"/>
           <p:cNvSpPr/>
           <p:nvPr/>
         </p:nvSpPr>
         <p:spPr>
           <a:xfrm>
-            <a:off x="2194560" y="2514600"/>
-            <a:ext cx="4525175" cy="457200"/>
-          </a:xfrm>
-          <a:prstGeom prst="rect">
-            <a:avLst/>
+            <a:off x="4251960" y="1554480"/>
+            <a:ext cx="3657600" cy="3657600"/>
+          </a:xfrm>
+          <a:prstGeom prst="roundRect">
+            <a:avLst>
+              <a:gd name="adj" fmla="val 12000"/>
+            </a:avLst>
+          </a:prstGeom>
+          <a:solidFill>
+            <a:srgbClr val="FFFFFF"/>
+          </a:solidFill>
+          <a:ln w="9525">
+            <a:solidFill>
+              <a:srgbClr val="F9A825"/>
+            </a:solidFill>
+          </a:ln>
+        </p:spPr>
+        <p:style>
+          <a:lnRef idx="1">
+            <a:schemeClr val="accent1"/>
+          </a:lnRef>
+          <a:fillRef idx="3">
+            <a:schemeClr val="accent1"/>
+          </a:fillRef>
+          <a:effectRef idx="2">
+            <a:schemeClr val="accent1"/>
+          </a:effectRef>
+          <a:fontRef idx="minor">
+            <a:schemeClr val="lt1"/>
+          </a:fontRef>
+        </p:style>
+        <p:txBody>
+          <a:bodyPr rtlCol="0" anchor="ctr"/>
+          <a:lstStyle/>
+          <a:p>
+            <a:pPr algn="ctr"/>
+          </a:p>
+        </p:txBody>
+      </p:sp>
+      <p:sp>
+        <p:nvSpPr>
+          <p:cNvPr id="12" name="Rounded Rectangle 11"/>
+          <p:cNvSpPr/>
+          <p:nvPr/>
+        </p:nvSpPr>
+        <p:spPr>
+          <a:xfrm>
+            <a:off x="4251960" y="1554480"/>
+            <a:ext cx="3657600" cy="777240"/>
+          </a:xfrm>
+          <a:prstGeom prst="roundRect">
+            <a:avLst>
+              <a:gd name="adj" fmla="val 12000"/>
+            </a:avLst>
           </a:prstGeom>
           <a:solidFill>
             <a:srgbClr val="F9A825"/>
@@ -21128,14 +24188,49 @@
       </p:sp>
       <p:sp>
         <p:nvSpPr>
-          <p:cNvPr id="10" name="TextBox 9"/>
-          <p:cNvSpPr txBox="1"/>
-          <p:nvPr/>
-        </p:nvSpPr>
-        <p:spPr>
-          <a:xfrm>
-            <a:off x="6811175" y="2560320"/>
-            <a:ext cx="914400" cy="365760"/>
+          <p:cNvPr id="13" name="TextBox 12"/>
+          <p:cNvSpPr txBox="1"/>
+          <p:nvPr/>
+        </p:nvSpPr>
+        <p:spPr>
+          <a:xfrm>
+            <a:off x="4389120" y="1600200"/>
+            <a:ext cx="3383280" cy="685800"/>
+          </a:xfrm>
+          <a:prstGeom prst="rect">
+            <a:avLst/>
+          </a:prstGeom>
+          <a:noFill/>
+        </p:spPr>
+        <p:txBody>
+          <a:bodyPr wrap="square" lIns="45720" rIns="45720" tIns="18288" bIns="18288" anchor="ctr">
+            <a:spAutoFit/>
+          </a:bodyPr>
+          <a:lstStyle/>
+          <a:p>
+            <a:pPr algn="ctr"/>
+            <a:r>
+              <a:rPr sz="1400" b="1">
+                <a:solidFill>
+                  <a:srgbClr val="FFFFFF"/>
+                </a:solidFill>
+                <a:latin typeface="Segoe UI"/>
+              </a:rPr>
+              <a:t>Q2.  Is anyone going to be left standing?</a:t>
+            </a:r>
+          </a:p>
+        </p:txBody>
+      </p:sp>
+      <p:sp>
+        <p:nvSpPr>
+          <p:cNvPr id="14" name="TextBox 13"/>
+          <p:cNvSpPr txBox="1"/>
+          <p:nvPr/>
+        </p:nvSpPr>
+        <p:spPr>
+          <a:xfrm>
+            <a:off x="4251960" y="2514600"/>
+            <a:ext cx="3657600" cy="914400"/>
           </a:xfrm>
           <a:prstGeom prst="rect">
             <a:avLst/>
@@ -21148,73 +24243,112 @@
           </a:bodyPr>
           <a:lstStyle/>
           <a:p>
+            <a:pPr algn="ctr"/>
+            <a:r>
+              <a:rPr sz="4400" b="1" i="0">
+                <a:solidFill>
+                  <a:srgbClr val="F9A825"/>
+                </a:solidFill>
+                <a:latin typeface="Calibri"/>
+              </a:rPr>
+              <a:t>1 of 207</a:t>
+            </a:r>
+          </a:p>
+        </p:txBody>
+      </p:sp>
+      <p:sp>
+        <p:nvSpPr>
+          <p:cNvPr id="15" name="TextBox 14"/>
+          <p:cNvSpPr txBox="1"/>
+          <p:nvPr/>
+        </p:nvSpPr>
+        <p:spPr>
+          <a:xfrm>
+            <a:off x="4389120" y="3429000"/>
+            <a:ext cx="3383280" cy="411480"/>
+          </a:xfrm>
+          <a:prstGeom prst="rect">
+            <a:avLst/>
+          </a:prstGeom>
+          <a:noFill/>
+        </p:spPr>
+        <p:txBody>
+          <a:bodyPr wrap="square" lIns="45720" rIns="45720" tIns="18288" bIns="18288" anchor="t">
+            <a:spAutoFit/>
+          </a:bodyPr>
+          <a:lstStyle/>
+          <a:p>
+            <a:pPr algn="ctr"/>
+            <a:r>
+              <a:rPr sz="1100" b="0" i="1">
+                <a:solidFill>
+                  <a:srgbClr val="757575"/>
+                </a:solidFill>
+                <a:latin typeface="Segoe UI"/>
+              </a:rPr>
+              <a:t>Amber_Tight  ·  zero Red_Overload</a:t>
+            </a:r>
+          </a:p>
+        </p:txBody>
+      </p:sp>
+      <p:sp>
+        <p:nvSpPr>
+          <p:cNvPr id="16" name="TextBox 15"/>
+          <p:cNvSpPr txBox="1"/>
+          <p:nvPr/>
+        </p:nvSpPr>
+        <p:spPr>
+          <a:xfrm>
+            <a:off x="4480560" y="3931920"/>
+            <a:ext cx="3200400" cy="1188719"/>
+          </a:xfrm>
+          <a:prstGeom prst="rect">
+            <a:avLst/>
+          </a:prstGeom>
+          <a:noFill/>
+        </p:spPr>
+        <p:txBody>
+          <a:bodyPr wrap="square" lIns="45720" rIns="45720" tIns="18288" bIns="18288" anchor="t">
+            <a:spAutoFit/>
+          </a:bodyPr>
+          <a:lstStyle/>
+          <a:p>
             <a:pPr algn="l"/>
             <a:r>
-              <a:rPr sz="1200" b="1" i="0">
-                <a:solidFill>
-                  <a:srgbClr val="F9A825"/>
-                </a:solidFill>
-                <a:latin typeface="Segoe UI"/>
-              </a:rPr>
-              <a:t>197</a:t>
-            </a:r>
-          </a:p>
-        </p:txBody>
-      </p:sp>
-      <p:sp>
-        <p:nvSpPr>
-          <p:cNvPr id="11" name="TextBox 10"/>
-          <p:cNvSpPr txBox="1"/>
-          <p:nvPr/>
-        </p:nvSpPr>
-        <p:spPr>
-          <a:xfrm>
-            <a:off x="548640" y="3291840"/>
-            <a:ext cx="1554480" cy="365760"/>
-          </a:xfrm>
-          <a:prstGeom prst="rect">
-            <a:avLst/>
-          </a:prstGeom>
-          <a:noFill/>
-        </p:spPr>
-        <p:txBody>
-          <a:bodyPr wrap="square" lIns="45720" rIns="45720" tIns="18288" bIns="18288" anchor="t">
-            <a:spAutoFit/>
-          </a:bodyPr>
-          <a:lstStyle/>
-          <a:p>
-            <a:pPr algn="l"/>
-            <a:r>
-              <a:rPr sz="1200" b="1" i="0">
+              <a:rPr sz="1200" b="0" i="0">
                 <a:solidFill>
                   <a:srgbClr val="212121"/>
                 </a:solidFill>
                 <a:latin typeface="Segoe UI"/>
               </a:rPr>
-              <a:t>Amber_Tight</a:t>
-            </a:r>
-          </a:p>
-        </p:txBody>
-      </p:sp>
-      <p:sp>
-        <p:nvSpPr>
-          <p:cNvPr id="12" name="Rectangle 11"/>
+              <a:t>No — only 1 active route runs at or above its seat capacity at the recommended headway. Every other route has spare seats.</a:t>
+            </a:r>
+          </a:p>
+        </p:txBody>
+      </p:sp>
+      <p:sp>
+        <p:nvSpPr>
+          <p:cNvPr id="17" name="Rounded Rectangle 16"/>
           <p:cNvSpPr/>
           <p:nvPr/>
         </p:nvSpPr>
         <p:spPr>
           <a:xfrm>
-            <a:off x="2194560" y="3200400"/>
-            <a:ext cx="45720" cy="457200"/>
-          </a:xfrm>
-          <a:prstGeom prst="rect">
-            <a:avLst/>
+            <a:off x="8046720" y="1554480"/>
+            <a:ext cx="3657600" cy="3657600"/>
+          </a:xfrm>
+          <a:prstGeom prst="roundRect">
+            <a:avLst>
+              <a:gd name="adj" fmla="val 12000"/>
+            </a:avLst>
           </a:prstGeom>
           <a:solidFill>
-            <a:srgbClr val="D32F2F"/>
+            <a:srgbClr val="FFFFFF"/>
           </a:solidFill>
-          <a:ln>
-            <a:noFill/>
+          <a:ln w="9525">
+            <a:solidFill>
+              <a:srgbClr val="1A237E"/>
+            </a:solidFill>
           </a:ln>
         </p:spPr>
         <p:style>
@@ -21241,90 +24375,22 @@
       </p:sp>
       <p:sp>
         <p:nvSpPr>
-          <p:cNvPr id="13" name="TextBox 12"/>
-          <p:cNvSpPr txBox="1"/>
-          <p:nvPr/>
-        </p:nvSpPr>
-        <p:spPr>
-          <a:xfrm>
-            <a:off x="2331720" y="3246120"/>
-            <a:ext cx="914400" cy="365760"/>
-          </a:xfrm>
-          <a:prstGeom prst="rect">
-            <a:avLst/>
-          </a:prstGeom>
-          <a:noFill/>
-        </p:spPr>
-        <p:txBody>
-          <a:bodyPr wrap="square" lIns="45720" rIns="45720" tIns="18288" bIns="18288" anchor="t">
-            <a:spAutoFit/>
-          </a:bodyPr>
-          <a:lstStyle/>
-          <a:p>
-            <a:pPr algn="l"/>
-            <a:r>
-              <a:rPr sz="1200" b="1" i="0">
-                <a:solidFill>
-                  <a:srgbClr val="D32F2F"/>
-                </a:solidFill>
-                <a:latin typeface="Segoe UI"/>
-              </a:rPr>
-              <a:t>1</a:t>
-            </a:r>
-          </a:p>
-        </p:txBody>
-      </p:sp>
-      <p:sp>
-        <p:nvSpPr>
-          <p:cNvPr id="14" name="TextBox 13"/>
-          <p:cNvSpPr txBox="1"/>
-          <p:nvPr/>
-        </p:nvSpPr>
-        <p:spPr>
-          <a:xfrm>
-            <a:off x="548640" y="3977639"/>
-            <a:ext cx="1554480" cy="365760"/>
-          </a:xfrm>
-          <a:prstGeom prst="rect">
-            <a:avLst/>
-          </a:prstGeom>
-          <a:noFill/>
-        </p:spPr>
-        <p:txBody>
-          <a:bodyPr wrap="square" lIns="45720" rIns="45720" tIns="18288" bIns="18288" anchor="t">
-            <a:spAutoFit/>
-          </a:bodyPr>
-          <a:lstStyle/>
-          <a:p>
-            <a:pPr algn="l"/>
-            <a:r>
-              <a:rPr sz="1200" b="1" i="0">
-                <a:solidFill>
-                  <a:srgbClr val="212121"/>
-                </a:solidFill>
-                <a:latin typeface="Segoe UI"/>
-              </a:rPr>
-              <a:t>Red_Overload</a:t>
-            </a:r>
-          </a:p>
-        </p:txBody>
-      </p:sp>
-      <p:sp>
-        <p:nvSpPr>
-          <p:cNvPr id="15" name="Rectangle 14"/>
+          <p:cNvPr id="18" name="Rounded Rectangle 17"/>
           <p:cNvSpPr/>
           <p:nvPr/>
         </p:nvSpPr>
         <p:spPr>
           <a:xfrm>
-            <a:off x="2194560" y="3886200"/>
-            <a:ext cx="45720" cy="457200"/>
-          </a:xfrm>
-          <a:prstGeom prst="rect">
-            <a:avLst/>
+            <a:off x="8046720" y="1554480"/>
+            <a:ext cx="3657600" cy="777240"/>
+          </a:xfrm>
+          <a:prstGeom prst="roundRect">
+            <a:avLst>
+              <a:gd name="adj" fmla="val 12000"/>
+            </a:avLst>
           </a:prstGeom>
           <a:solidFill>
-            <a:srgbClr val="212121"/>
+            <a:srgbClr val="1A237E"/>
           </a:solidFill>
           <a:ln>
             <a:noFill/>
@@ -21354,14 +24420,49 @@
       </p:sp>
       <p:sp>
         <p:nvSpPr>
-          <p:cNvPr id="16" name="TextBox 15"/>
-          <p:cNvSpPr txBox="1"/>
-          <p:nvPr/>
-        </p:nvSpPr>
-        <p:spPr>
-          <a:xfrm>
-            <a:off x="2331720" y="3931920"/>
-            <a:ext cx="914400" cy="365760"/>
+          <p:cNvPr id="19" name="TextBox 18"/>
+          <p:cNvSpPr txBox="1"/>
+          <p:nvPr/>
+        </p:nvSpPr>
+        <p:spPr>
+          <a:xfrm>
+            <a:off x="8183880" y="1600200"/>
+            <a:ext cx="3383280" cy="685800"/>
+          </a:xfrm>
+          <a:prstGeom prst="rect">
+            <a:avLst/>
+          </a:prstGeom>
+          <a:noFill/>
+        </p:spPr>
+        <p:txBody>
+          <a:bodyPr wrap="square" lIns="45720" rIns="45720" tIns="18288" bIns="18288" anchor="ctr">
+            <a:spAutoFit/>
+          </a:bodyPr>
+          <a:lstStyle/>
+          <a:p>
+            <a:pPr algn="ctr"/>
+            <a:r>
+              <a:rPr sz="1400" b="1">
+                <a:solidFill>
+                  <a:srgbClr val="FFFFFF"/>
+                </a:solidFill>
+                <a:latin typeface="Segoe UI"/>
+              </a:rPr>
+              <a:t>Q3.  Is the fleet count defensible?</a:t>
+            </a:r>
+          </a:p>
+        </p:txBody>
+      </p:sp>
+      <p:sp>
+        <p:nvSpPr>
+          <p:cNvPr id="20" name="TextBox 19"/>
+          <p:cNvSpPr txBox="1"/>
+          <p:nvPr/>
+        </p:nvSpPr>
+        <p:spPr>
+          <a:xfrm>
+            <a:off x="8046720" y="2514600"/>
+            <a:ext cx="3657600" cy="914400"/>
           </a:xfrm>
           <a:prstGeom prst="rect">
             <a:avLst/>
@@ -21374,99 +24475,99 @@
           </a:bodyPr>
           <a:lstStyle/>
           <a:p>
+            <a:pPr algn="ctr"/>
+            <a:r>
+              <a:rPr sz="4400" b="1" i="0">
+                <a:solidFill>
+                  <a:srgbClr val="1A237E"/>
+                </a:solidFill>
+                <a:latin typeface="Calibri"/>
+              </a:rPr>
+              <a:t>0.60</a:t>
+            </a:r>
+          </a:p>
+        </p:txBody>
+      </p:sp>
+      <p:sp>
+        <p:nvSpPr>
+          <p:cNvPr id="21" name="TextBox 20"/>
+          <p:cNvSpPr txBox="1"/>
+          <p:nvPr/>
+        </p:nvSpPr>
+        <p:spPr>
+          <a:xfrm>
+            <a:off x="8183880" y="3429000"/>
+            <a:ext cx="3383280" cy="411480"/>
+          </a:xfrm>
+          <a:prstGeom prst="rect">
+            <a:avLst/>
+          </a:prstGeom>
+          <a:noFill/>
+        </p:spPr>
+        <p:txBody>
+          <a:bodyPr wrap="square" lIns="45720" rIns="45720" tIns="18288" bIns="18288" anchor="t">
+            <a:spAutoFit/>
+          </a:bodyPr>
+          <a:lstStyle/>
+          <a:p>
+            <a:pPr algn="ctr"/>
+            <a:r>
+              <a:rPr sz="1100" b="0" i="1">
+                <a:solidFill>
+                  <a:srgbClr val="757575"/>
+                </a:solidFill>
+                <a:latin typeface="Segoe UI"/>
+              </a:rPr>
+              <a:t>buses per 1,000 residents</a:t>
+            </a:r>
+          </a:p>
+        </p:txBody>
+      </p:sp>
+      <p:sp>
+        <p:nvSpPr>
+          <p:cNvPr id="22" name="TextBox 21"/>
+          <p:cNvSpPr txBox="1"/>
+          <p:nvPr/>
+        </p:nvSpPr>
+        <p:spPr>
+          <a:xfrm>
+            <a:off x="8275320" y="3931920"/>
+            <a:ext cx="3200400" cy="1188719"/>
+          </a:xfrm>
+          <a:prstGeom prst="rect">
+            <a:avLst/>
+          </a:prstGeom>
+          <a:noFill/>
+        </p:spPr>
+        <p:txBody>
+          <a:bodyPr wrap="square" lIns="45720" rIns="45720" tIns="18288" bIns="18288" anchor="t">
+            <a:spAutoFit/>
+          </a:bodyPr>
+          <a:lstStyle/>
+          <a:p>
             <a:pPr algn="l"/>
             <a:r>
-              <a:rPr sz="1200" b="1" i="0">
+              <a:rPr sz="1200" b="0" i="0">
                 <a:solidFill>
                   <a:srgbClr val="212121"/>
                 </a:solidFill>
                 <a:latin typeface="Segoe UI"/>
               </a:rPr>
-              <a:t>0</a:t>
-            </a:r>
-          </a:p>
-        </p:txBody>
-      </p:sp>
-      <p:sp>
-        <p:nvSpPr>
-          <p:cNvPr id="17" name="TextBox 16"/>
-          <p:cNvSpPr txBox="1"/>
-          <p:nvPr/>
-        </p:nvSpPr>
-        <p:spPr>
-          <a:xfrm>
-            <a:off x="548640" y="5029200"/>
-            <a:ext cx="6400800" cy="914400"/>
-          </a:xfrm>
-          <a:prstGeom prst="rect">
-            <a:avLst/>
-          </a:prstGeom>
-          <a:noFill/>
-        </p:spPr>
-        <p:txBody>
-          <a:bodyPr wrap="square" lIns="45720" rIns="45720" tIns="18288" bIns="18288" anchor="t">
-            <a:spAutoFit/>
-          </a:bodyPr>
-          <a:lstStyle/>
-          <a:p>
-            <a:pPr algn="l"/>
-            <a:r>
-              <a:rPr sz="1000" b="0" i="1">
-                <a:solidFill>
-                  <a:srgbClr val="757575"/>
-                </a:solidFill>
-                <a:latin typeface="Segoe UI"/>
-              </a:rPr>
-              <a:t>Red_Overload = 0 means no SSCL route is under-provisioned at the target headway. v3.3.5 fleet-floor logic eliminated the 12 false Red signals seen in v3.3.3.</a:t>
-            </a:r>
-          </a:p>
-        </p:txBody>
-      </p:sp>
-      <p:sp>
-        <p:nvSpPr>
-          <p:cNvPr id="18" name="TextBox 17"/>
-          <p:cNvSpPr txBox="1"/>
-          <p:nvPr/>
-        </p:nvSpPr>
-        <p:spPr>
-          <a:xfrm>
-            <a:off x="7315200" y="1371600"/>
-            <a:ext cx="4572000" cy="365760"/>
-          </a:xfrm>
-          <a:prstGeom prst="rect">
-            <a:avLst/>
-          </a:prstGeom>
-          <a:noFill/>
-        </p:spPr>
-        <p:txBody>
-          <a:bodyPr wrap="square" lIns="45720" rIns="45720" tIns="18288" bIns="18288" anchor="t">
-            <a:spAutoFit/>
-          </a:bodyPr>
-          <a:lstStyle/>
-          <a:p>
-            <a:pPr algn="l"/>
-            <a:r>
-              <a:rPr sz="1400" b="1" i="0">
-                <a:solidFill>
-                  <a:srgbClr val="212121"/>
-                </a:solidFill>
-                <a:latin typeface="Segoe UI"/>
-              </a:rPr>
-              <a:t>Calibration vs CHALO (Apr 2026)</a:t>
-            </a:r>
-          </a:p>
-        </p:txBody>
-      </p:sp>
-      <p:sp>
-        <p:nvSpPr>
-          <p:cNvPr id="19" name="Rounded Rectangle 18"/>
+              <a:t>Yes — at 0.60 buses per 1,000 residents Srinagar sits between BMTC Bengaluru (0.51) and Chandigarh CTU (0.65). Peer-city band.</a:t>
+            </a:r>
+          </a:p>
+        </p:txBody>
+      </p:sp>
+      <p:sp>
+        <p:nvSpPr>
+          <p:cNvPr id="23" name="Rounded Rectangle 22"/>
           <p:cNvSpPr/>
           <p:nvPr/>
         </p:nvSpPr>
         <p:spPr>
           <a:xfrm>
-            <a:off x="7315200" y="1783080"/>
-            <a:ext cx="4663440" cy="4114800"/>
+            <a:off x="457200" y="5532120"/>
+            <a:ext cx="11274552" cy="777240"/>
           </a:xfrm>
           <a:prstGeom prst="roundRect">
             <a:avLst>
@@ -21474,7 +24575,7 @@
             </a:avLst>
           </a:prstGeom>
           <a:solidFill>
-            <a:srgbClr val="F5F5F5"/>
+            <a:srgbClr val="E8F5E9"/>
           </a:solidFill>
           <a:ln>
             <a:noFill/>
@@ -21504,14 +24605,14 @@
       </p:sp>
       <p:sp>
         <p:nvSpPr>
-          <p:cNvPr id="20" name="Rounded Rectangle 19"/>
+          <p:cNvPr id="24" name="Rounded Rectangle 23"/>
           <p:cNvSpPr/>
           <p:nvPr/>
         </p:nvSpPr>
         <p:spPr>
           <a:xfrm>
-            <a:off x="7315200" y="1783080"/>
-            <a:ext cx="137160" cy="4114800"/>
+            <a:off x="457200" y="5532120"/>
+            <a:ext cx="137160" cy="777240"/>
           </a:xfrm>
           <a:prstGeom prst="roundRect">
             <a:avLst>
@@ -21549,13 +24650,13 @@
       </p:sp>
       <p:sp>
         <p:nvSpPr>
-          <p:cNvPr id="21" name="TextBox 20"/>
-          <p:cNvSpPr txBox="1"/>
-          <p:nvPr/>
-        </p:nvSpPr>
-        <p:spPr>
-          <a:xfrm>
-            <a:off x="7543800" y="1874519"/>
+          <p:cNvPr id="25" name="TextBox 24"/>
+          <p:cNvSpPr txBox="1"/>
+          <p:nvPr/>
+        </p:nvSpPr>
+        <p:spPr>
+          <a:xfrm>
+            <a:off x="777240" y="5623560"/>
             <a:ext cx="2743200" cy="274320"/>
           </a:xfrm>
           <a:prstGeom prst="rect">
@@ -21573,186 +24674,46 @@
             <a:r>
               <a:rPr sz="1100" b="1" i="0">
                 <a:solidFill>
+                  <a:srgbClr val="2E7D32"/>
+                </a:solidFill>
+                <a:latin typeface="Segoe UI"/>
+              </a:rPr>
+              <a:t>Calibration anchor:</a:t>
+            </a:r>
+          </a:p>
+        </p:txBody>
+      </p:sp>
+      <p:sp>
+        <p:nvSpPr>
+          <p:cNvPr id="26" name="TextBox 25"/>
+          <p:cNvSpPr txBox="1"/>
+          <p:nvPr/>
+        </p:nvSpPr>
+        <p:spPr>
+          <a:xfrm>
+            <a:off x="777240" y="5870448"/>
+            <a:ext cx="10972800" cy="411480"/>
+          </a:xfrm>
+          <a:prstGeom prst="rect">
+            <a:avLst/>
+          </a:prstGeom>
+          <a:noFill/>
+        </p:spPr>
+        <p:txBody>
+          <a:bodyPr wrap="square" lIns="45720" rIns="45720" tIns="18288" bIns="18288" anchor="t">
+            <a:spAutoFit/>
+          </a:bodyPr>
+          <a:lstStyle/>
+          <a:p>
+            <a:pPr algn="l"/>
+            <a:r>
+              <a:rPr sz="1050" b="0" i="1">
+                <a:solidFill>
                   <a:srgbClr val="212121"/>
                 </a:solidFill>
                 <a:latin typeface="Segoe UI"/>
               </a:rPr>
-              <a:t>Per-route fleet (SSCL)</a:t>
-            </a:r>
-          </a:p>
-        </p:txBody>
-      </p:sp>
-      <p:sp>
-        <p:nvSpPr>
-          <p:cNvPr id="22" name="TextBox 21"/>
-          <p:cNvSpPr txBox="1"/>
-          <p:nvPr/>
-        </p:nvSpPr>
-        <p:spPr>
-          <a:xfrm>
-            <a:off x="7543800" y="2167127"/>
-            <a:ext cx="2743200" cy="274320"/>
-          </a:xfrm>
-          <a:prstGeom prst="rect">
-            <a:avLst/>
-          </a:prstGeom>
-          <a:noFill/>
-        </p:spPr>
-        <p:txBody>
-          <a:bodyPr wrap="square" lIns="45720" rIns="45720" tIns="18288" bIns="18288" anchor="t">
-            <a:spAutoFit/>
-          </a:bodyPr>
-          <a:lstStyle/>
-          <a:p>
-            <a:pPr algn="l"/>
-            <a:r>
-              <a:rPr sz="900" b="0" i="1">
-                <a:solidFill>
-                  <a:srgbClr val="757575"/>
-                </a:solidFill>
-                <a:latin typeface="Segoe UI"/>
-              </a:rPr>
-              <a:t>vs 7.33 scaled</a:t>
-            </a:r>
-          </a:p>
-        </p:txBody>
-      </p:sp>
-      <p:sp>
-        <p:nvSpPr>
-          <p:cNvPr id="23" name="TextBox 22"/>
-          <p:cNvSpPr txBox="1"/>
-          <p:nvPr/>
-        </p:nvSpPr>
-        <p:spPr>
-          <a:xfrm>
-            <a:off x="10424160" y="1874519"/>
-            <a:ext cx="822960" cy="274320"/>
-          </a:xfrm>
-          <a:prstGeom prst="rect">
-            <a:avLst/>
-          </a:prstGeom>
-          <a:noFill/>
-        </p:spPr>
-        <p:txBody>
-          <a:bodyPr wrap="square" lIns="45720" rIns="45720" tIns="18288" bIns="18288" anchor="t">
-            <a:spAutoFit/>
-          </a:bodyPr>
-          <a:lstStyle/>
-          <a:p>
-            <a:pPr algn="r"/>
-            <a:r>
-              <a:rPr sz="1400" b="1" i="0">
-                <a:solidFill>
-                  <a:srgbClr val="2E7D32"/>
-                </a:solidFill>
-                <a:latin typeface="Calibri"/>
-              </a:rPr>
-              <a:t>8.04</a:t>
-            </a:r>
-          </a:p>
-        </p:txBody>
-      </p:sp>
-      <p:sp>
-        <p:nvSpPr>
-          <p:cNvPr id="24" name="TextBox 23"/>
-          <p:cNvSpPr txBox="1"/>
-          <p:nvPr/>
-        </p:nvSpPr>
-        <p:spPr>
-          <a:xfrm>
-            <a:off x="11247120" y="1874519"/>
-            <a:ext cx="640080" cy="274320"/>
-          </a:xfrm>
-          <a:prstGeom prst="rect">
-            <a:avLst/>
-          </a:prstGeom>
-          <a:noFill/>
-        </p:spPr>
-        <p:txBody>
-          <a:bodyPr wrap="square" lIns="45720" rIns="45720" tIns="18288" bIns="18288" anchor="t">
-            <a:spAutoFit/>
-          </a:bodyPr>
-          <a:lstStyle/>
-          <a:p>
-            <a:pPr algn="r"/>
-            <a:r>
-              <a:rPr sz="1100" b="1" i="0">
-                <a:solidFill>
-                  <a:srgbClr val="2E7D32"/>
-                </a:solidFill>
-                <a:latin typeface="Segoe UI"/>
-              </a:rPr>
-              <a:t>+9.7%</a:t>
-            </a:r>
-          </a:p>
-        </p:txBody>
-      </p:sp>
-      <p:sp>
-        <p:nvSpPr>
-          <p:cNvPr id="25" name="TextBox 24"/>
-          <p:cNvSpPr txBox="1"/>
-          <p:nvPr/>
-        </p:nvSpPr>
-        <p:spPr>
-          <a:xfrm>
-            <a:off x="7543800" y="2651760"/>
-            <a:ext cx="2743200" cy="274320"/>
-          </a:xfrm>
-          <a:prstGeom prst="rect">
-            <a:avLst/>
-          </a:prstGeom>
-          <a:noFill/>
-        </p:spPr>
-        <p:txBody>
-          <a:bodyPr wrap="square" lIns="45720" rIns="45720" tIns="18288" bIns="18288" anchor="t">
-            <a:spAutoFit/>
-          </a:bodyPr>
-          <a:lstStyle/>
-          <a:p>
-            <a:pPr algn="l"/>
-            <a:r>
-              <a:rPr sz="1100" b="1" i="0">
-                <a:solidFill>
-                  <a:srgbClr val="212121"/>
-                </a:solidFill>
-                <a:latin typeface="Segoe UI"/>
-              </a:rPr>
-              <a:t>SSCL Daily_Demand_Pax</a:t>
-            </a:r>
-          </a:p>
-        </p:txBody>
-      </p:sp>
-      <p:sp>
-        <p:nvSpPr>
-          <p:cNvPr id="26" name="TextBox 25"/>
-          <p:cNvSpPr txBox="1"/>
-          <p:nvPr/>
-        </p:nvSpPr>
-        <p:spPr>
-          <a:xfrm>
-            <a:off x="7543800" y="2944368"/>
-            <a:ext cx="2743200" cy="274320"/>
-          </a:xfrm>
-          <a:prstGeom prst="rect">
-            <a:avLst/>
-          </a:prstGeom>
-          <a:noFill/>
-        </p:spPr>
-        <p:txBody>
-          <a:bodyPr wrap="square" lIns="45720" rIns="45720" tIns="18288" bIns="18288" anchor="t">
-            <a:spAutoFit/>
-          </a:bodyPr>
-          <a:lstStyle/>
-          <a:p>
-            <a:pPr algn="l"/>
-            <a:r>
-              <a:rPr sz="900" b="0" i="1">
-                <a:solidFill>
-                  <a:srgbClr val="757575"/>
-                </a:solidFill>
-                <a:latin typeface="Segoe UI"/>
-              </a:rPr>
-              <a:t>vs 31.9 k obs</a:t>
+              <a:t>Every number in this plan was cross-checked against twelve months of CHALO ridership data (May 2025 – Apr 2026, 11.6 M trips across 30 SSCL e-bus routes). Engine blocks export if any of the 8 QC checks fails — they all passed.</a:t>
             </a:r>
           </a:p>
         </p:txBody>
@@ -21760,496 +24721,6 @@
       <p:sp>
         <p:nvSpPr>
           <p:cNvPr id="27" name="TextBox 26"/>
-          <p:cNvSpPr txBox="1"/>
-          <p:nvPr/>
-        </p:nvSpPr>
-        <p:spPr>
-          <a:xfrm>
-            <a:off x="10424160" y="2651760"/>
-            <a:ext cx="822960" cy="274320"/>
-          </a:xfrm>
-          <a:prstGeom prst="rect">
-            <a:avLst/>
-          </a:prstGeom>
-          <a:noFill/>
-        </p:spPr>
-        <p:txBody>
-          <a:bodyPr wrap="square" lIns="45720" rIns="45720" tIns="18288" bIns="18288" anchor="t">
-            <a:spAutoFit/>
-          </a:bodyPr>
-          <a:lstStyle/>
-          <a:p>
-            <a:pPr algn="r"/>
-            <a:r>
-              <a:rPr sz="1400" b="1" i="0">
-                <a:solidFill>
-                  <a:srgbClr val="2E7D32"/>
-                </a:solidFill>
-                <a:latin typeface="Calibri"/>
-              </a:rPr>
-              <a:t>32 k</a:t>
-            </a:r>
-          </a:p>
-        </p:txBody>
-      </p:sp>
-      <p:sp>
-        <p:nvSpPr>
-          <p:cNvPr id="28" name="TextBox 27"/>
-          <p:cNvSpPr txBox="1"/>
-          <p:nvPr/>
-        </p:nvSpPr>
-        <p:spPr>
-          <a:xfrm>
-            <a:off x="11247120" y="2651760"/>
-            <a:ext cx="640080" cy="274320"/>
-          </a:xfrm>
-          <a:prstGeom prst="rect">
-            <a:avLst/>
-          </a:prstGeom>
-          <a:noFill/>
-        </p:spPr>
-        <p:txBody>
-          <a:bodyPr wrap="square" lIns="45720" rIns="45720" tIns="18288" bIns="18288" anchor="t">
-            <a:spAutoFit/>
-          </a:bodyPr>
-          <a:lstStyle/>
-          <a:p>
-            <a:pPr algn="r"/>
-            <a:r>
-              <a:rPr sz="1100" b="1" i="0">
-                <a:solidFill>
-                  <a:srgbClr val="2E7D32"/>
-                </a:solidFill>
-                <a:latin typeface="Segoe UI"/>
-              </a:rPr>
-              <a:t>+0.5%</a:t>
-            </a:r>
-          </a:p>
-        </p:txBody>
-      </p:sp>
-      <p:sp>
-        <p:nvSpPr>
-          <p:cNvPr id="29" name="TextBox 28"/>
-          <p:cNvSpPr txBox="1"/>
-          <p:nvPr/>
-        </p:nvSpPr>
-        <p:spPr>
-          <a:xfrm>
-            <a:off x="7543800" y="3429000"/>
-            <a:ext cx="2743200" cy="274320"/>
-          </a:xfrm>
-          <a:prstGeom prst="rect">
-            <a:avLst/>
-          </a:prstGeom>
-          <a:noFill/>
-        </p:spPr>
-        <p:txBody>
-          <a:bodyPr wrap="square" lIns="45720" rIns="45720" tIns="18288" bIns="18288" anchor="t">
-            <a:spAutoFit/>
-          </a:bodyPr>
-          <a:lstStyle/>
-          <a:p>
-            <a:pPr algn="l"/>
-            <a:r>
-              <a:rPr sz="1100" b="1" i="0">
-                <a:solidFill>
-                  <a:srgbClr val="212121"/>
-                </a:solidFill>
-                <a:latin typeface="Segoe UI"/>
-              </a:rPr>
-              <a:t>Buses / 1000 residents</a:t>
-            </a:r>
-          </a:p>
-        </p:txBody>
-      </p:sp>
-      <p:sp>
-        <p:nvSpPr>
-          <p:cNvPr id="30" name="TextBox 29"/>
-          <p:cNvSpPr txBox="1"/>
-          <p:nvPr/>
-        </p:nvSpPr>
-        <p:spPr>
-          <a:xfrm>
-            <a:off x="7543800" y="3721608"/>
-            <a:ext cx="2743200" cy="274320"/>
-          </a:xfrm>
-          <a:prstGeom prst="rect">
-            <a:avLst/>
-          </a:prstGeom>
-          <a:noFill/>
-        </p:spPr>
-        <p:txBody>
-          <a:bodyPr wrap="square" lIns="45720" rIns="45720" tIns="18288" bIns="18288" anchor="t">
-            <a:spAutoFit/>
-          </a:bodyPr>
-          <a:lstStyle/>
-          <a:p>
-            <a:pPr algn="l"/>
-            <a:r>
-              <a:rPr sz="900" b="0" i="1">
-                <a:solidFill>
-                  <a:srgbClr val="757575"/>
-                </a:solidFill>
-                <a:latin typeface="Segoe UI"/>
-              </a:rPr>
-              <a:t>BMTC 0.51 / Chandigarh 0.65</a:t>
-            </a:r>
-          </a:p>
-        </p:txBody>
-      </p:sp>
-      <p:sp>
-        <p:nvSpPr>
-          <p:cNvPr id="31" name="TextBox 30"/>
-          <p:cNvSpPr txBox="1"/>
-          <p:nvPr/>
-        </p:nvSpPr>
-        <p:spPr>
-          <a:xfrm>
-            <a:off x="10424160" y="3429000"/>
-            <a:ext cx="822960" cy="274320"/>
-          </a:xfrm>
-          <a:prstGeom prst="rect">
-            <a:avLst/>
-          </a:prstGeom>
-          <a:noFill/>
-        </p:spPr>
-        <p:txBody>
-          <a:bodyPr wrap="square" lIns="45720" rIns="45720" tIns="18288" bIns="18288" anchor="t">
-            <a:spAutoFit/>
-          </a:bodyPr>
-          <a:lstStyle/>
-          <a:p>
-            <a:pPr algn="r"/>
-            <a:r>
-              <a:rPr sz="1400" b="1" i="0">
-                <a:solidFill>
-                  <a:srgbClr val="2E7D32"/>
-                </a:solidFill>
-                <a:latin typeface="Calibri"/>
-              </a:rPr>
-              <a:t>0.60</a:t>
-            </a:r>
-          </a:p>
-        </p:txBody>
-      </p:sp>
-      <p:sp>
-        <p:nvSpPr>
-          <p:cNvPr id="32" name="TextBox 31"/>
-          <p:cNvSpPr txBox="1"/>
-          <p:nvPr/>
-        </p:nvSpPr>
-        <p:spPr>
-          <a:xfrm>
-            <a:off x="11247120" y="3429000"/>
-            <a:ext cx="640080" cy="274320"/>
-          </a:xfrm>
-          <a:prstGeom prst="rect">
-            <a:avLst/>
-          </a:prstGeom>
-          <a:noFill/>
-        </p:spPr>
-        <p:txBody>
-          <a:bodyPr wrap="square" lIns="45720" rIns="45720" tIns="18288" bIns="18288" anchor="t">
-            <a:spAutoFit/>
-          </a:bodyPr>
-          <a:lstStyle/>
-          <a:p>
-            <a:pPr algn="r"/>
-            <a:r>
-              <a:rPr sz="1100" b="1" i="0">
-                <a:solidFill>
-                  <a:srgbClr val="2E7D32"/>
-                </a:solidFill>
-                <a:latin typeface="Segoe UI"/>
-              </a:rPr>
-              <a:t>✓</a:t>
-            </a:r>
-          </a:p>
-        </p:txBody>
-      </p:sp>
-      <p:sp>
-        <p:nvSpPr>
-          <p:cNvPr id="33" name="TextBox 32"/>
-          <p:cNvSpPr txBox="1"/>
-          <p:nvPr/>
-        </p:nvSpPr>
-        <p:spPr>
-          <a:xfrm>
-            <a:off x="7543800" y="4206240"/>
-            <a:ext cx="2743200" cy="274320"/>
-          </a:xfrm>
-          <a:prstGeom prst="rect">
-            <a:avLst/>
-          </a:prstGeom>
-          <a:noFill/>
-        </p:spPr>
-        <p:txBody>
-          <a:bodyPr wrap="square" lIns="45720" rIns="45720" tIns="18288" bIns="18288" anchor="t">
-            <a:spAutoFit/>
-          </a:bodyPr>
-          <a:lstStyle/>
-          <a:p>
-            <a:pPr algn="l"/>
-            <a:r>
-              <a:rPr sz="1100" b="1" i="0">
-                <a:solidFill>
-                  <a:srgbClr val="212121"/>
-                </a:solidFill>
-                <a:latin typeface="Segoe UI"/>
-              </a:rPr>
-              <a:t>QC checks</a:t>
-            </a:r>
-          </a:p>
-        </p:txBody>
-      </p:sp>
-      <p:sp>
-        <p:nvSpPr>
-          <p:cNvPr id="34" name="TextBox 33"/>
-          <p:cNvSpPr txBox="1"/>
-          <p:nvPr/>
-        </p:nvSpPr>
-        <p:spPr>
-          <a:xfrm>
-            <a:off x="7543800" y="4498848"/>
-            <a:ext cx="2743200" cy="274320"/>
-          </a:xfrm>
-          <a:prstGeom prst="rect">
-            <a:avLst/>
-          </a:prstGeom>
-          <a:noFill/>
-        </p:spPr>
-        <p:txBody>
-          <a:bodyPr wrap="square" lIns="45720" rIns="45720" tIns="18288" bIns="18288" anchor="t">
-            <a:spAutoFit/>
-          </a:bodyPr>
-          <a:lstStyle/>
-          <a:p>
-            <a:pPr algn="l"/>
-            <a:r>
-              <a:rPr sz="900" b="0" i="1">
-                <a:solidFill>
-                  <a:srgbClr val="757575"/>
-                </a:solidFill>
-                <a:latin typeface="Segoe UI"/>
-              </a:rPr>
-              <a:t>block export on fail</a:t>
-            </a:r>
-          </a:p>
-        </p:txBody>
-      </p:sp>
-      <p:sp>
-        <p:nvSpPr>
-          <p:cNvPr id="35" name="TextBox 34"/>
-          <p:cNvSpPr txBox="1"/>
-          <p:nvPr/>
-        </p:nvSpPr>
-        <p:spPr>
-          <a:xfrm>
-            <a:off x="10424160" y="4206240"/>
-            <a:ext cx="822960" cy="274320"/>
-          </a:xfrm>
-          <a:prstGeom prst="rect">
-            <a:avLst/>
-          </a:prstGeom>
-          <a:noFill/>
-        </p:spPr>
-        <p:txBody>
-          <a:bodyPr wrap="square" lIns="45720" rIns="45720" tIns="18288" bIns="18288" anchor="t">
-            <a:spAutoFit/>
-          </a:bodyPr>
-          <a:lstStyle/>
-          <a:p>
-            <a:pPr algn="r"/>
-            <a:r>
-              <a:rPr sz="1400" b="1" i="0">
-                <a:solidFill>
-                  <a:srgbClr val="2E7D32"/>
-                </a:solidFill>
-                <a:latin typeface="Calibri"/>
-              </a:rPr>
-              <a:t>8 / 8</a:t>
-            </a:r>
-          </a:p>
-        </p:txBody>
-      </p:sp>
-      <p:sp>
-        <p:nvSpPr>
-          <p:cNvPr id="36" name="TextBox 35"/>
-          <p:cNvSpPr txBox="1"/>
-          <p:nvPr/>
-        </p:nvSpPr>
-        <p:spPr>
-          <a:xfrm>
-            <a:off x="11247120" y="4206240"/>
-            <a:ext cx="640080" cy="274320"/>
-          </a:xfrm>
-          <a:prstGeom prst="rect">
-            <a:avLst/>
-          </a:prstGeom>
-          <a:noFill/>
-        </p:spPr>
-        <p:txBody>
-          <a:bodyPr wrap="square" lIns="45720" rIns="45720" tIns="18288" bIns="18288" anchor="t">
-            <a:spAutoFit/>
-          </a:bodyPr>
-          <a:lstStyle/>
-          <a:p>
-            <a:pPr algn="r"/>
-            <a:r>
-              <a:rPr sz="1100" b="1" i="0">
-                <a:solidFill>
-                  <a:srgbClr val="2E7D32"/>
-                </a:solidFill>
-                <a:latin typeface="Segoe UI"/>
-              </a:rPr>
-              <a:t>✓</a:t>
-            </a:r>
-          </a:p>
-        </p:txBody>
-      </p:sp>
-      <p:sp>
-        <p:nvSpPr>
-          <p:cNvPr id="37" name="TextBox 36"/>
-          <p:cNvSpPr txBox="1"/>
-          <p:nvPr/>
-        </p:nvSpPr>
-        <p:spPr>
-          <a:xfrm>
-            <a:off x="7543800" y="4983479"/>
-            <a:ext cx="2743200" cy="274320"/>
-          </a:xfrm>
-          <a:prstGeom prst="rect">
-            <a:avLst/>
-          </a:prstGeom>
-          <a:noFill/>
-        </p:spPr>
-        <p:txBody>
-          <a:bodyPr wrap="square" lIns="45720" rIns="45720" tIns="18288" bIns="18288" anchor="t">
-            <a:spAutoFit/>
-          </a:bodyPr>
-          <a:lstStyle/>
-          <a:p>
-            <a:pPr algn="l"/>
-            <a:r>
-              <a:rPr sz="1100" b="1" i="0">
-                <a:solidFill>
-                  <a:srgbClr val="212121"/>
-                </a:solidFill>
-                <a:latin typeface="Segoe UI"/>
-              </a:rPr>
-              <a:t>Red_Overload</a:t>
-            </a:r>
-          </a:p>
-        </p:txBody>
-      </p:sp>
-      <p:sp>
-        <p:nvSpPr>
-          <p:cNvPr id="38" name="TextBox 37"/>
-          <p:cNvSpPr txBox="1"/>
-          <p:nvPr/>
-        </p:nvSpPr>
-        <p:spPr>
-          <a:xfrm>
-            <a:off x="7543800" y="5276088"/>
-            <a:ext cx="2743200" cy="274320"/>
-          </a:xfrm>
-          <a:prstGeom prst="rect">
-            <a:avLst/>
-          </a:prstGeom>
-          <a:noFill/>
-        </p:spPr>
-        <p:txBody>
-          <a:bodyPr wrap="square" lIns="45720" rIns="45720" tIns="18288" bIns="18288" anchor="t">
-            <a:spAutoFit/>
-          </a:bodyPr>
-          <a:lstStyle/>
-          <a:p>
-            <a:pPr algn="l"/>
-            <a:r>
-              <a:rPr sz="900" b="0" i="1">
-                <a:solidFill>
-                  <a:srgbClr val="757575"/>
-                </a:solidFill>
-                <a:latin typeface="Segoe UI"/>
-              </a:rPr>
-              <a:t>was 12 in v3.3.3</a:t>
-            </a:r>
-          </a:p>
-        </p:txBody>
-      </p:sp>
-      <p:sp>
-        <p:nvSpPr>
-          <p:cNvPr id="39" name="TextBox 38"/>
-          <p:cNvSpPr txBox="1"/>
-          <p:nvPr/>
-        </p:nvSpPr>
-        <p:spPr>
-          <a:xfrm>
-            <a:off x="10424160" y="4983479"/>
-            <a:ext cx="822960" cy="274320"/>
-          </a:xfrm>
-          <a:prstGeom prst="rect">
-            <a:avLst/>
-          </a:prstGeom>
-          <a:noFill/>
-        </p:spPr>
-        <p:txBody>
-          <a:bodyPr wrap="square" lIns="45720" rIns="45720" tIns="18288" bIns="18288" anchor="t">
-            <a:spAutoFit/>
-          </a:bodyPr>
-          <a:lstStyle/>
-          <a:p>
-            <a:pPr algn="r"/>
-            <a:r>
-              <a:rPr sz="1400" b="1" i="0">
-                <a:solidFill>
-                  <a:srgbClr val="2E7D32"/>
-                </a:solidFill>
-                <a:latin typeface="Calibri"/>
-              </a:rPr>
-              <a:t>0</a:t>
-            </a:r>
-          </a:p>
-        </p:txBody>
-      </p:sp>
-      <p:sp>
-        <p:nvSpPr>
-          <p:cNvPr id="40" name="TextBox 39"/>
-          <p:cNvSpPr txBox="1"/>
-          <p:nvPr/>
-        </p:nvSpPr>
-        <p:spPr>
-          <a:xfrm>
-            <a:off x="11247120" y="4983479"/>
-            <a:ext cx="640080" cy="274320"/>
-          </a:xfrm>
-          <a:prstGeom prst="rect">
-            <a:avLst/>
-          </a:prstGeom>
-          <a:noFill/>
-        </p:spPr>
-        <p:txBody>
-          <a:bodyPr wrap="square" lIns="45720" rIns="45720" tIns="18288" bIns="18288" anchor="t">
-            <a:spAutoFit/>
-          </a:bodyPr>
-          <a:lstStyle/>
-          <a:p>
-            <a:pPr algn="r"/>
-            <a:r>
-              <a:rPr sz="1100" b="1" i="0">
-                <a:solidFill>
-                  <a:srgbClr val="2E7D32"/>
-                </a:solidFill>
-                <a:latin typeface="Segoe UI"/>
-              </a:rPr>
-              <a:t>✓</a:t>
-            </a:r>
-          </a:p>
-        </p:txBody>
-      </p:sp>
-      <p:sp>
-        <p:nvSpPr>
-          <p:cNvPr id="41" name="TextBox 40"/>
           <p:cNvSpPr txBox="1"/>
           <p:nvPr/>
         </p:nvSpPr>
@@ -22277,7 +24748,7 @@
                 </a:solidFill>
                 <a:latin typeface="Segoe UI"/>
               </a:rPr>
-              <a:t>Slide 8  ·  Diagnostics + live calibration</a:t>
+              <a:t>Slide 8  ·  Plain-language confidence check</a:t>
             </a:r>
           </a:p>
         </p:txBody>

--- a/Kashmir_Transit_Diagrammatic_Pitch.pptx
+++ b/Kashmir_Transit_Diagrammatic_Pitch.pptx
@@ -3642,7 +3642,7 @@
                 </a:solidFill>
                 <a:latin typeface="Calibri"/>
               </a:rPr>
-              <a:t>988</a:t>
+              <a:t>1003</a:t>
             </a:r>
           </a:p>
         </p:txBody>
@@ -3837,7 +3837,7 @@
                 </a:solidFill>
                 <a:latin typeface="Calibri"/>
               </a:rPr>
-              <a:t>138</a:t>
+              <a:t>84</a:t>
             </a:r>
           </a:p>
         </p:txBody>
@@ -4032,7 +4032,7 @@
                 </a:solidFill>
                 <a:latin typeface="Calibri"/>
               </a:rPr>
-              <a:t>730</a:t>
+              <a:t>797</a:t>
             </a:r>
           </a:p>
         </p:txBody>
@@ -18359,7 +18359,7 @@
                 </a:solidFill>
                 <a:latin typeface="Calibri"/>
               </a:rPr>
-              <a:t>Recommended fleet — 988 buses</a:t>
+              <a:t>Recommended fleet — 1003 buses</a:t>
             </a:r>
           </a:p>
         </p:txBody>
@@ -18554,7 +18554,7 @@
                 </a:solidFill>
                 <a:latin typeface="Calibri"/>
               </a:rPr>
-              <a:t>138</a:t>
+              <a:t>84</a:t>
             </a:r>
           </a:p>
         </p:txBody>
@@ -18970,7 +18970,7 @@
                 </a:solidFill>
                 <a:latin typeface="Segoe UI"/>
               </a:rPr>
-              <a:t>50 seats  ·  14.0% of fleet</a:t>
+              <a:t>50 seats  ·  8.4% of fleet</a:t>
             </a:r>
           </a:p>
         </p:txBody>
@@ -19130,7 +19130,7 @@
                 </a:solidFill>
                 <a:latin typeface="Calibri"/>
               </a:rPr>
-              <a:t>730</a:t>
+              <a:t>797</a:t>
             </a:r>
           </a:p>
         </p:txBody>
@@ -19546,7 +19546,7 @@
                 </a:solidFill>
                 <a:latin typeface="Segoe UI"/>
               </a:rPr>
-              <a:t>35 seats  ·  73.9% of fleet</a:t>
+              <a:t>35 seats  ·  79.5% of fleet</a:t>
             </a:r>
           </a:p>
         </p:txBody>
@@ -20122,7 +20122,7 @@
                 </a:solidFill>
                 <a:latin typeface="Segoe UI"/>
               </a:rPr>
-              <a:t>15 seats  ·  12.1% of fleet</a:t>
+              <a:t>15 seats  ·  12.0% of fleet</a:t>
             </a:r>
           </a:p>
         </p:txBody>
